--- a/web/pitch.pptx
+++ b/web/pitch.pptx
@@ -15,7 +15,7 @@
     <p:sldId id="263" r:id="rId14"/>
     <p:sldId id="264" r:id="rId15"/>
   </p:sldIdLst>
-  <p:sldSz cx="12192000" cy="6858000" type="screen4x3"/>
+  <p:sldSz cx="12191695" cy="6858000" type="screen4x3"/>
   <p:notesSz cx="6858000" cy="9144000"/>
   <p:defaultTextStyle>
     <a:defPPr>
@@ -3096,16 +3096,83 @@
         <p:nvPr/>
       </p:nvGrpSpPr>
       <p:grpSpPr/>
-      <p:sp>
-        <p:nvSpPr>
-          <p:cNvPr id="2" name="TextBox 1"/>
+      <p:pic>
+        <p:nvPicPr>
+          <p:cNvPr id="2" name="Picture 1" descr="title-wash.jpg"/>
+          <p:cNvPicPr>
+            <a:picLocks noChangeAspect="1"/>
+          </p:cNvPicPr>
+          <p:nvPr/>
+        </p:nvPicPr>
+        <p:blipFill>
+          <a:blip r:embed="rId2"/>
+          <a:stretch>
+            <a:fillRect/>
+          </a:stretch>
+        </p:blipFill>
+        <p:spPr>
+          <a:xfrm>
+            <a:off x="0" y="0"/>
+            <a:ext cx="12191695" cy="6858000"/>
+          </a:xfrm>
+          <a:prstGeom prst="rect">
+            <a:avLst/>
+          </a:prstGeom>
+        </p:spPr>
+      </p:pic>
+      <p:sp>
+        <p:nvSpPr>
+          <p:cNvPr id="3" name="Rectangle 2"/>
+          <p:cNvSpPr/>
+          <p:nvPr/>
+        </p:nvSpPr>
+        <p:spPr>
+          <a:xfrm>
+            <a:off x="0" y="0"/>
+            <a:ext cx="128016" cy="6858000"/>
+          </a:xfrm>
+          <a:prstGeom prst="rect">
+            <a:avLst/>
+          </a:prstGeom>
+          <a:solidFill>
+            <a:srgbClr val="C56A1A"/>
+          </a:solidFill>
+          <a:ln>
+            <a:noFill/>
+          </a:ln>
+        </p:spPr>
+        <p:style>
+          <a:lnRef idx="1">
+            <a:schemeClr val="accent1"/>
+          </a:lnRef>
+          <a:fillRef idx="3">
+            <a:schemeClr val="accent1"/>
+          </a:fillRef>
+          <a:effectRef idx="2">
+            <a:schemeClr val="accent1"/>
+          </a:effectRef>
+          <a:fontRef idx="minor">
+            <a:schemeClr val="lt1"/>
+          </a:fontRef>
+        </p:style>
+        <p:txBody>
+          <a:bodyPr rtlCol="0" anchor="ctr"/>
+          <a:lstStyle/>
+          <a:p>
+            <a:pPr algn="ctr"/>
+          </a:p>
+        </p:txBody>
+      </p:sp>
+      <p:sp>
+        <p:nvSpPr>
+          <p:cNvPr id="4" name="TextBox 3"/>
           <p:cNvSpPr txBox="1"/>
           <p:nvPr/>
         </p:nvSpPr>
         <p:spPr>
           <a:xfrm>
-            <a:off x="548640" y="411480"/>
-            <a:ext cx="10972800" cy="365760"/>
+            <a:off x="502920" y="320040"/>
+            <a:ext cx="10972800" cy="274320"/>
           </a:xfrm>
           <a:prstGeom prst="rect">
             <a:avLst/>
@@ -3113,34 +3180,34 @@
           <a:noFill/>
         </p:spPr>
         <p:txBody>
-          <a:bodyPr wrap="none">
+          <a:bodyPr wrap="square">
             <a:spAutoFit/>
           </a:bodyPr>
           <a:lstStyle/>
           <a:p>
             <a:pPr algn="l"/>
             <a:r>
-              <a:rPr sz="1400" b="1">
+              <a:rPr sz="1200" b="1">
                 <a:solidFill>
-                  <a:srgbClr val="A44B13"/>
+                  <a:srgbClr val="C56A1A"/>
                 </a:solidFill>
                 <a:latin typeface="Calibri"/>
               </a:rPr>
-              <a:t>CODEX BUILD HOUSE · PUNE</a:t>
-            </a:r>
-          </a:p>
-        </p:txBody>
-      </p:sp>
-      <p:sp>
-        <p:nvSpPr>
-          <p:cNvPr id="3" name="TextBox 2"/>
+              <a:t>CODEX BUILD HOUSE  ·  PUNE  ·  BRIEFING</a:t>
+            </a:r>
+          </a:p>
+        </p:txBody>
+      </p:sp>
+      <p:sp>
+        <p:nvSpPr>
+          <p:cNvPr id="5" name="TextBox 4"/>
           <p:cNvSpPr txBox="1"/>
           <p:nvPr/>
         </p:nvSpPr>
         <p:spPr>
           <a:xfrm>
-            <a:off x="548640" y="914400"/>
-            <a:ext cx="10972800" cy="1463040"/>
+            <a:off x="502920" y="685800"/>
+            <a:ext cx="10972800" cy="1097280"/>
           </a:xfrm>
           <a:prstGeom prst="rect">
             <a:avLst/>
@@ -3148,16 +3215,16 @@
           <a:noFill/>
         </p:spPr>
         <p:txBody>
-          <a:bodyPr wrap="none">
+          <a:bodyPr wrap="square">
             <a:spAutoFit/>
           </a:bodyPr>
           <a:lstStyle/>
           <a:p>
             <a:pPr algn="l"/>
             <a:r>
-              <a:rPr sz="3600" b="1">
+              <a:rPr sz="4000" b="1">
                 <a:solidFill>
-                  <a:srgbClr val="254563"/>
+                  <a:srgbClr val="FFF8EE"/>
                 </a:solidFill>
                 <a:latin typeface="Calibri"/>
               </a:rPr>
@@ -3168,14 +3235,14 @@
       </p:sp>
       <p:sp>
         <p:nvSpPr>
-          <p:cNvPr id="4" name="TextBox 3"/>
+          <p:cNvPr id="6" name="TextBox 5"/>
           <p:cNvSpPr txBox="1"/>
           <p:nvPr/>
         </p:nvSpPr>
         <p:spPr>
           <a:xfrm>
-            <a:off x="548640" y="2560320"/>
-            <a:ext cx="10972800" cy="3108960"/>
+            <a:off x="502920" y="1828800"/>
+            <a:ext cx="10972800" cy="365760"/>
           </a:xfrm>
           <a:prstGeom prst="rect">
             <a:avLst/>
@@ -3183,56 +3250,612 @@
           <a:noFill/>
         </p:spPr>
         <p:txBody>
-          <a:bodyPr wrap="none">
+          <a:bodyPr wrap="square">
             <a:spAutoFit/>
           </a:bodyPr>
           <a:lstStyle/>
           <a:p>
-            <a:pPr/>
-            <a:r>
-              <a:rPr sz="2000">
+            <a:pPr algn="l"/>
+            <a:r>
+              <a:rPr sz="1800" b="0">
                 <a:solidFill>
-                  <a:srgbClr val="262B31"/>
+                  <a:srgbClr val="F4EFE6"/>
                 </a:solidFill>
                 <a:latin typeface="Calibri"/>
               </a:rPr>
-              <a:t>Independent English/Marathi hub for official Maharashtra public warnings.</a:t>
-            </a:r>
-          </a:p>
-          <a:p>
-            <a:pPr/>
-            <a:r>
-              <a:rPr sz="2000">
+              <a:t>महाराष्ट्र नागरी सतर्कता</a:t>
+            </a:r>
+          </a:p>
+        </p:txBody>
+      </p:sp>
+      <p:sp>
+        <p:nvSpPr>
+          <p:cNvPr id="7" name="TextBox 6"/>
+          <p:cNvSpPr txBox="1"/>
+          <p:nvPr/>
+        </p:nvSpPr>
+        <p:spPr>
+          <a:xfrm>
+            <a:off x="502920" y="2286000"/>
+            <a:ext cx="10972800" cy="731520"/>
+          </a:xfrm>
+          <a:prstGeom prst="rect">
+            <a:avLst/>
+          </a:prstGeom>
+          <a:noFill/>
+        </p:spPr>
+        <p:txBody>
+          <a:bodyPr wrap="square">
+            <a:spAutoFit/>
+          </a:bodyPr>
+          <a:lstStyle/>
+          <a:p>
+            <a:pPr algn="l"/>
+            <a:r>
+              <a:rPr sz="1600" b="0">
                 <a:solidFill>
-                  <a:srgbClr val="262B31"/>
+                  <a:srgbClr val="F4EFE6"/>
                 </a:solidFill>
                 <a:latin typeface="Calibri"/>
               </a:rPr>
-              <a:t>Not a government website. Not emergency dispatch. Call 112 in danger.</a:t>
-            </a:r>
-          </a:p>
-          <a:p>
-            <a:pPr/>
-            <a:r>
-              <a:rPr sz="2000">
+              <a:t>A bilingual public-information hub that shows official warnings by district, says how fresh each source is, and refuses to treat silence as safety.</a:t>
+            </a:r>
+          </a:p>
+        </p:txBody>
+      </p:sp>
+      <p:sp>
+        <p:nvSpPr>
+          <p:cNvPr id="8" name="Rounded Rectangle 7"/>
+          <p:cNvSpPr/>
+          <p:nvPr/>
+        </p:nvSpPr>
+        <p:spPr>
+          <a:xfrm>
+            <a:off x="502920" y="3200400"/>
+            <a:ext cx="2651760" cy="1051560"/>
+          </a:xfrm>
+          <a:prstGeom prst="roundRect">
+            <a:avLst/>
+          </a:prstGeom>
+          <a:solidFill>
+            <a:srgbClr val="1C3A37"/>
+          </a:solidFill>
+          <a:ln>
+            <a:noFill/>
+          </a:ln>
+        </p:spPr>
+        <p:style>
+          <a:lnRef idx="1">
+            <a:schemeClr val="accent1"/>
+          </a:lnRef>
+          <a:fillRef idx="3">
+            <a:schemeClr val="accent1"/>
+          </a:fillRef>
+          <a:effectRef idx="2">
+            <a:schemeClr val="accent1"/>
+          </a:effectRef>
+          <a:fontRef idx="minor">
+            <a:schemeClr val="lt1"/>
+          </a:fontRef>
+        </p:style>
+        <p:txBody>
+          <a:bodyPr rtlCol="0" anchor="ctr"/>
+          <a:lstStyle/>
+          <a:p>
+            <a:pPr algn="ctr"/>
+          </a:p>
+        </p:txBody>
+      </p:sp>
+      <p:sp>
+        <p:nvSpPr>
+          <p:cNvPr id="9" name="TextBox 8"/>
+          <p:cNvSpPr txBox="1"/>
+          <p:nvPr/>
+        </p:nvSpPr>
+        <p:spPr>
+          <a:xfrm>
+            <a:off x="640080" y="3273552"/>
+            <a:ext cx="2377440" cy="502920"/>
+          </a:xfrm>
+          <a:prstGeom prst="rect">
+            <a:avLst/>
+          </a:prstGeom>
+          <a:noFill/>
+        </p:spPr>
+        <p:txBody>
+          <a:bodyPr wrap="square">
+            <a:spAutoFit/>
+          </a:bodyPr>
+          <a:lstStyle/>
+          <a:p>
+            <a:pPr algn="l"/>
+            <a:r>
+              <a:rPr sz="2600" b="1">
                 <a:solidFill>
-                  <a:srgbClr val="262B31"/>
+                  <a:srgbClr val="FFF8EE"/>
                 </a:solidFill>
                 <a:latin typeface="Calibri"/>
               </a:rPr>
-              <a:t>Empty bulletin is not an all-clear.</a:t>
-            </a:r>
-          </a:p>
-          <a:p>
-            <a:pPr/>
-            <a:r>
-              <a:rPr sz="2000">
+              <a:t>36</a:t>
+            </a:r>
+          </a:p>
+        </p:txBody>
+      </p:sp>
+      <p:sp>
+        <p:nvSpPr>
+          <p:cNvPr id="10" name="TextBox 9"/>
+          <p:cNvSpPr txBox="1"/>
+          <p:nvPr/>
+        </p:nvSpPr>
+        <p:spPr>
+          <a:xfrm>
+            <a:off x="640080" y="3794760"/>
+            <a:ext cx="2377440" cy="320040"/>
+          </a:xfrm>
+          <a:prstGeom prst="rect">
+            <a:avLst/>
+          </a:prstGeom>
+          <a:noFill/>
+        </p:spPr>
+        <p:txBody>
+          <a:bodyPr wrap="square">
+            <a:spAutoFit/>
+          </a:bodyPr>
+          <a:lstStyle/>
+          <a:p>
+            <a:pPr algn="l"/>
+            <a:r>
+              <a:rPr sz="1200" b="0">
                 <a:solidFill>
-                  <a:srgbClr val="262B31"/>
+                  <a:srgbClr val="F4EFE6"/>
                 </a:solidFill>
                 <a:latin typeface="Calibri"/>
               </a:rPr>
-              <a:t>Builder: Mangesh Raut  ·  Live: Cloudflare Workers + D1</a:t>
+              <a:t>Districts</a:t>
+            </a:r>
+          </a:p>
+        </p:txBody>
+      </p:sp>
+      <p:sp>
+        <p:nvSpPr>
+          <p:cNvPr id="11" name="Rounded Rectangle 10"/>
+          <p:cNvSpPr/>
+          <p:nvPr/>
+        </p:nvSpPr>
+        <p:spPr>
+          <a:xfrm>
+            <a:off x="3337560" y="3200400"/>
+            <a:ext cx="2651760" cy="1051560"/>
+          </a:xfrm>
+          <a:prstGeom prst="roundRect">
+            <a:avLst/>
+          </a:prstGeom>
+          <a:solidFill>
+            <a:srgbClr val="1C3A37"/>
+          </a:solidFill>
+          <a:ln>
+            <a:noFill/>
+          </a:ln>
+        </p:spPr>
+        <p:style>
+          <a:lnRef idx="1">
+            <a:schemeClr val="accent1"/>
+          </a:lnRef>
+          <a:fillRef idx="3">
+            <a:schemeClr val="accent1"/>
+          </a:fillRef>
+          <a:effectRef idx="2">
+            <a:schemeClr val="accent1"/>
+          </a:effectRef>
+          <a:fontRef idx="minor">
+            <a:schemeClr val="lt1"/>
+          </a:fontRef>
+        </p:style>
+        <p:txBody>
+          <a:bodyPr rtlCol="0" anchor="ctr"/>
+          <a:lstStyle/>
+          <a:p>
+            <a:pPr algn="ctr"/>
+          </a:p>
+        </p:txBody>
+      </p:sp>
+      <p:sp>
+        <p:nvSpPr>
+          <p:cNvPr id="12" name="TextBox 11"/>
+          <p:cNvSpPr txBox="1"/>
+          <p:nvPr/>
+        </p:nvSpPr>
+        <p:spPr>
+          <a:xfrm>
+            <a:off x="3474720" y="3273552"/>
+            <a:ext cx="2377440" cy="502920"/>
+          </a:xfrm>
+          <a:prstGeom prst="rect">
+            <a:avLst/>
+          </a:prstGeom>
+          <a:noFill/>
+        </p:spPr>
+        <p:txBody>
+          <a:bodyPr wrap="square">
+            <a:spAutoFit/>
+          </a:bodyPr>
+          <a:lstStyle/>
+          <a:p>
+            <a:pPr algn="l"/>
+            <a:r>
+              <a:rPr sz="2600" b="1">
+                <a:solidFill>
+                  <a:srgbClr val="FFF8EE"/>
+                </a:solidFill>
+                <a:latin typeface="Calibri"/>
+              </a:rPr>
+              <a:t>5</a:t>
+            </a:r>
+          </a:p>
+        </p:txBody>
+      </p:sp>
+      <p:sp>
+        <p:nvSpPr>
+          <p:cNvPr id="13" name="TextBox 12"/>
+          <p:cNvSpPr txBox="1"/>
+          <p:nvPr/>
+        </p:nvSpPr>
+        <p:spPr>
+          <a:xfrm>
+            <a:off x="3474720" y="3794760"/>
+            <a:ext cx="2377440" cy="320040"/>
+          </a:xfrm>
+          <a:prstGeom prst="rect">
+            <a:avLst/>
+          </a:prstGeom>
+          <a:noFill/>
+        </p:spPr>
+        <p:txBody>
+          <a:bodyPr wrap="square">
+            <a:spAutoFit/>
+          </a:bodyPr>
+          <a:lstStyle/>
+          <a:p>
+            <a:pPr algn="l"/>
+            <a:r>
+              <a:rPr sz="1200" b="0">
+                <a:solidFill>
+                  <a:srgbClr val="F4EFE6"/>
+                </a:solidFill>
+                <a:latin typeface="Calibri"/>
+              </a:rPr>
+              <a:t>Sources</a:t>
+            </a:r>
+          </a:p>
+        </p:txBody>
+      </p:sp>
+      <p:sp>
+        <p:nvSpPr>
+          <p:cNvPr id="14" name="Rounded Rectangle 13"/>
+          <p:cNvSpPr/>
+          <p:nvPr/>
+        </p:nvSpPr>
+        <p:spPr>
+          <a:xfrm>
+            <a:off x="6172200" y="3200400"/>
+            <a:ext cx="2651760" cy="1051560"/>
+          </a:xfrm>
+          <a:prstGeom prst="roundRect">
+            <a:avLst/>
+          </a:prstGeom>
+          <a:solidFill>
+            <a:srgbClr val="1C3A37"/>
+          </a:solidFill>
+          <a:ln>
+            <a:noFill/>
+          </a:ln>
+        </p:spPr>
+        <p:style>
+          <a:lnRef idx="1">
+            <a:schemeClr val="accent1"/>
+          </a:lnRef>
+          <a:fillRef idx="3">
+            <a:schemeClr val="accent1"/>
+          </a:fillRef>
+          <a:effectRef idx="2">
+            <a:schemeClr val="accent1"/>
+          </a:effectRef>
+          <a:fontRef idx="minor">
+            <a:schemeClr val="lt1"/>
+          </a:fontRef>
+        </p:style>
+        <p:txBody>
+          <a:bodyPr rtlCol="0" anchor="ctr"/>
+          <a:lstStyle/>
+          <a:p>
+            <a:pPr algn="ctr"/>
+          </a:p>
+        </p:txBody>
+      </p:sp>
+      <p:sp>
+        <p:nvSpPr>
+          <p:cNvPr id="15" name="TextBox 14"/>
+          <p:cNvSpPr txBox="1"/>
+          <p:nvPr/>
+        </p:nvSpPr>
+        <p:spPr>
+          <a:xfrm>
+            <a:off x="6309360" y="3273552"/>
+            <a:ext cx="2377440" cy="502920"/>
+          </a:xfrm>
+          <a:prstGeom prst="rect">
+            <a:avLst/>
+          </a:prstGeom>
+          <a:noFill/>
+        </p:spPr>
+        <p:txBody>
+          <a:bodyPr wrap="square">
+            <a:spAutoFit/>
+          </a:bodyPr>
+          <a:lstStyle/>
+          <a:p>
+            <a:pPr algn="l"/>
+            <a:r>
+              <a:rPr sz="2600" b="1">
+                <a:solidFill>
+                  <a:srgbClr val="FFF8EE"/>
+                </a:solidFill>
+                <a:latin typeface="Calibri"/>
+              </a:rPr>
+              <a:t>12</a:t>
+            </a:r>
+          </a:p>
+        </p:txBody>
+      </p:sp>
+      <p:sp>
+        <p:nvSpPr>
+          <p:cNvPr id="16" name="TextBox 15"/>
+          <p:cNvSpPr txBox="1"/>
+          <p:nvPr/>
+        </p:nvSpPr>
+        <p:spPr>
+          <a:xfrm>
+            <a:off x="6309360" y="3794760"/>
+            <a:ext cx="2377440" cy="320040"/>
+          </a:xfrm>
+          <a:prstGeom prst="rect">
+            <a:avLst/>
+          </a:prstGeom>
+          <a:noFill/>
+        </p:spPr>
+        <p:txBody>
+          <a:bodyPr wrap="square">
+            <a:spAutoFit/>
+          </a:bodyPr>
+          <a:lstStyle/>
+          <a:p>
+            <a:pPr algn="l"/>
+            <a:r>
+              <a:rPr sz="1200" b="0">
+                <a:solidFill>
+                  <a:srgbClr val="F4EFE6"/>
+                </a:solidFill>
+                <a:latin typeface="Calibri"/>
+              </a:rPr>
+              <a:t>Service dirs</a:t>
+            </a:r>
+          </a:p>
+        </p:txBody>
+      </p:sp>
+      <p:sp>
+        <p:nvSpPr>
+          <p:cNvPr id="17" name="Rounded Rectangle 16"/>
+          <p:cNvSpPr/>
+          <p:nvPr/>
+        </p:nvSpPr>
+        <p:spPr>
+          <a:xfrm>
+            <a:off x="9006840" y="3200400"/>
+            <a:ext cx="2651760" cy="1051560"/>
+          </a:xfrm>
+          <a:prstGeom prst="roundRect">
+            <a:avLst/>
+          </a:prstGeom>
+          <a:solidFill>
+            <a:srgbClr val="1C3A37"/>
+          </a:solidFill>
+          <a:ln>
+            <a:noFill/>
+          </a:ln>
+        </p:spPr>
+        <p:style>
+          <a:lnRef idx="1">
+            <a:schemeClr val="accent1"/>
+          </a:lnRef>
+          <a:fillRef idx="3">
+            <a:schemeClr val="accent1"/>
+          </a:fillRef>
+          <a:effectRef idx="2">
+            <a:schemeClr val="accent1"/>
+          </a:effectRef>
+          <a:fontRef idx="minor">
+            <a:schemeClr val="lt1"/>
+          </a:fontRef>
+        </p:style>
+        <p:txBody>
+          <a:bodyPr rtlCol="0" anchor="ctr"/>
+          <a:lstStyle/>
+          <a:p>
+            <a:pPr algn="ctr"/>
+          </a:p>
+        </p:txBody>
+      </p:sp>
+      <p:sp>
+        <p:nvSpPr>
+          <p:cNvPr id="18" name="TextBox 17"/>
+          <p:cNvSpPr txBox="1"/>
+          <p:nvPr/>
+        </p:nvSpPr>
+        <p:spPr>
+          <a:xfrm>
+            <a:off x="9144000" y="3273552"/>
+            <a:ext cx="2377440" cy="502920"/>
+          </a:xfrm>
+          <a:prstGeom prst="rect">
+            <a:avLst/>
+          </a:prstGeom>
+          <a:noFill/>
+        </p:spPr>
+        <p:txBody>
+          <a:bodyPr wrap="square">
+            <a:spAutoFit/>
+          </a:bodyPr>
+          <a:lstStyle/>
+          <a:p>
+            <a:pPr algn="l"/>
+            <a:r>
+              <a:rPr sz="2600" b="1">
+                <a:solidFill>
+                  <a:srgbClr val="FFF8EE"/>
+                </a:solidFill>
+                <a:latin typeface="Calibri"/>
+              </a:rPr>
+              <a:t>EN+MR</a:t>
+            </a:r>
+          </a:p>
+        </p:txBody>
+      </p:sp>
+      <p:sp>
+        <p:nvSpPr>
+          <p:cNvPr id="19" name="TextBox 18"/>
+          <p:cNvSpPr txBox="1"/>
+          <p:nvPr/>
+        </p:nvSpPr>
+        <p:spPr>
+          <a:xfrm>
+            <a:off x="9144000" y="3794760"/>
+            <a:ext cx="2377440" cy="320040"/>
+          </a:xfrm>
+          <a:prstGeom prst="rect">
+            <a:avLst/>
+          </a:prstGeom>
+          <a:noFill/>
+        </p:spPr>
+        <p:txBody>
+          <a:bodyPr wrap="square">
+            <a:spAutoFit/>
+          </a:bodyPr>
+          <a:lstStyle/>
+          <a:p>
+            <a:pPr algn="l"/>
+            <a:r>
+              <a:rPr sz="1200" b="0">
+                <a:solidFill>
+                  <a:srgbClr val="F4EFE6"/>
+                </a:solidFill>
+                <a:latin typeface="Calibri"/>
+              </a:rPr>
+              <a:t>No AI rewrite</a:t>
+            </a:r>
+          </a:p>
+        </p:txBody>
+      </p:sp>
+      <p:sp>
+        <p:nvSpPr>
+          <p:cNvPr id="20" name="TextBox 19"/>
+          <p:cNvSpPr txBox="1"/>
+          <p:nvPr/>
+        </p:nvSpPr>
+        <p:spPr>
+          <a:xfrm>
+            <a:off x="502920" y="4572000"/>
+            <a:ext cx="10972800" cy="1463040"/>
+          </a:xfrm>
+          <a:prstGeom prst="rect">
+            <a:avLst/>
+          </a:prstGeom>
+          <a:noFill/>
+        </p:spPr>
+        <p:txBody>
+          <a:bodyPr wrap="square">
+            <a:spAutoFit/>
+          </a:bodyPr>
+          <a:lstStyle/>
+          <a:p>
+            <a:pPr algn="l"/>
+            <a:r>
+              <a:rPr sz="1500" b="0">
+                <a:solidFill>
+                  <a:srgbClr val="F4EFE6"/>
+                </a:solidFill>
+                <a:latin typeface="Calibri"/>
+              </a:rPr>
+              <a:t>Agenda: problem table · session model · source matrix · operating rules · place lookups · information model · limits · review path</a:t>
+            </a:r>
+          </a:p>
+        </p:txBody>
+      </p:sp>
+      <p:sp>
+        <p:nvSpPr>
+          <p:cNvPr id="21" name="TextBox 20"/>
+          <p:cNvSpPr txBox="1"/>
+          <p:nvPr/>
+        </p:nvSpPr>
+        <p:spPr>
+          <a:xfrm>
+            <a:off x="411480" y="6510528"/>
+            <a:ext cx="8229600" cy="237744"/>
+          </a:xfrm>
+          <a:prstGeom prst="rect">
+            <a:avLst/>
+          </a:prstGeom>
+          <a:noFill/>
+        </p:spPr>
+        <p:txBody>
+          <a:bodyPr wrap="square">
+            <a:spAutoFit/>
+          </a:bodyPr>
+          <a:lstStyle/>
+          <a:p>
+            <a:pPr algn="l"/>
+            <a:r>
+              <a:rPr sz="1100" b="0">
+                <a:solidFill>
+                  <a:srgbClr val="D5CDC0"/>
+                </a:solidFill>
+                <a:latin typeface="Calibri"/>
+              </a:rPr>
+              <a:t>Maharashtra Civic Alerts  ·  Codex Build House Pune</a:t>
+            </a:r>
+          </a:p>
+        </p:txBody>
+      </p:sp>
+      <p:sp>
+        <p:nvSpPr>
+          <p:cNvPr id="22" name="TextBox 21"/>
+          <p:cNvSpPr txBox="1"/>
+          <p:nvPr/>
+        </p:nvSpPr>
+        <p:spPr>
+          <a:xfrm>
+            <a:off x="10332720" y="6510528"/>
+            <a:ext cx="1371600" cy="237744"/>
+          </a:xfrm>
+          <a:prstGeom prst="rect">
+            <a:avLst/>
+          </a:prstGeom>
+          <a:noFill/>
+        </p:spPr>
+        <p:txBody>
+          <a:bodyPr wrap="square">
+            <a:spAutoFit/>
+          </a:bodyPr>
+          <a:lstStyle/>
+          <a:p>
+            <a:pPr algn="r"/>
+            <a:r>
+              <a:rPr sz="1100" b="1">
+                <a:solidFill>
+                  <a:srgbClr val="D5CDC0"/>
+                </a:solidFill>
+                <a:latin typeface="Calibri"/>
+              </a:rPr>
+              <a:t>1 / 9</a:t>
             </a:r>
           </a:p>
         </p:txBody>
@@ -3255,16 +3878,83 @@
         <p:nvPr/>
       </p:nvGrpSpPr>
       <p:grpSpPr/>
-      <p:sp>
-        <p:nvSpPr>
-          <p:cNvPr id="2" name="TextBox 1"/>
+      <p:pic>
+        <p:nvPicPr>
+          <p:cNvPr id="2" name="Picture 1" descr="paper-wash.jpg"/>
+          <p:cNvPicPr>
+            <a:picLocks noChangeAspect="1"/>
+          </p:cNvPicPr>
+          <p:nvPr/>
+        </p:nvPicPr>
+        <p:blipFill>
+          <a:blip r:embed="rId2"/>
+          <a:stretch>
+            <a:fillRect/>
+          </a:stretch>
+        </p:blipFill>
+        <p:spPr>
+          <a:xfrm>
+            <a:off x="0" y="0"/>
+            <a:ext cx="12191695" cy="6858000"/>
+          </a:xfrm>
+          <a:prstGeom prst="rect">
+            <a:avLst/>
+          </a:prstGeom>
+        </p:spPr>
+      </p:pic>
+      <p:sp>
+        <p:nvSpPr>
+          <p:cNvPr id="3" name="Rectangle 2"/>
+          <p:cNvSpPr/>
+          <p:nvPr/>
+        </p:nvSpPr>
+        <p:spPr>
+          <a:xfrm>
+            <a:off x="0" y="0"/>
+            <a:ext cx="128016" cy="6858000"/>
+          </a:xfrm>
+          <a:prstGeom prst="rect">
+            <a:avLst/>
+          </a:prstGeom>
+          <a:solidFill>
+            <a:srgbClr val="C56A1A"/>
+          </a:solidFill>
+          <a:ln>
+            <a:noFill/>
+          </a:ln>
+        </p:spPr>
+        <p:style>
+          <a:lnRef idx="1">
+            <a:schemeClr val="accent1"/>
+          </a:lnRef>
+          <a:fillRef idx="3">
+            <a:schemeClr val="accent1"/>
+          </a:fillRef>
+          <a:effectRef idx="2">
+            <a:schemeClr val="accent1"/>
+          </a:effectRef>
+          <a:fontRef idx="minor">
+            <a:schemeClr val="lt1"/>
+          </a:fontRef>
+        </p:style>
+        <p:txBody>
+          <a:bodyPr rtlCol="0" anchor="ctr"/>
+          <a:lstStyle/>
+          <a:p>
+            <a:pPr algn="ctr"/>
+          </a:p>
+        </p:txBody>
+      </p:sp>
+      <p:sp>
+        <p:nvSpPr>
+          <p:cNvPr id="4" name="TextBox 3"/>
           <p:cNvSpPr txBox="1"/>
           <p:nvPr/>
         </p:nvSpPr>
         <p:spPr>
           <a:xfrm>
-            <a:off x="548640" y="411480"/>
-            <a:ext cx="10972800" cy="365760"/>
+            <a:off x="411480" y="201168"/>
+            <a:ext cx="10972800" cy="256032"/>
           </a:xfrm>
           <a:prstGeom prst="rect">
             <a:avLst/>
@@ -3272,16 +3962,16 @@
           <a:noFill/>
         </p:spPr>
         <p:txBody>
-          <a:bodyPr wrap="none">
+          <a:bodyPr wrap="square">
             <a:spAutoFit/>
           </a:bodyPr>
           <a:lstStyle/>
           <a:p>
             <a:pPr algn="l"/>
             <a:r>
-              <a:rPr sz="1400" b="1">
+              <a:rPr sz="1200" b="1">
                 <a:solidFill>
-                  <a:srgbClr val="A44B13"/>
+                  <a:srgbClr val="C56A1A"/>
                 </a:solidFill>
                 <a:latin typeface="Calibri"/>
               </a:rPr>
@@ -3292,14 +3982,14 @@
       </p:sp>
       <p:sp>
         <p:nvSpPr>
-          <p:cNvPr id="3" name="TextBox 2"/>
+          <p:cNvPr id="5" name="TextBox 4"/>
           <p:cNvSpPr txBox="1"/>
           <p:nvPr/>
         </p:nvSpPr>
         <p:spPr>
           <a:xfrm>
-            <a:off x="548640" y="914400"/>
-            <a:ext cx="10972800" cy="1463040"/>
+            <a:off x="411480" y="438912"/>
+            <a:ext cx="11338560" cy="640080"/>
           </a:xfrm>
           <a:prstGeom prst="rect">
             <a:avLst/>
@@ -3307,34 +3997,34 @@
           <a:noFill/>
         </p:spPr>
         <p:txBody>
-          <a:bodyPr wrap="none">
+          <a:bodyPr wrap="square">
             <a:spAutoFit/>
           </a:bodyPr>
           <a:lstStyle/>
           <a:p>
             <a:pPr algn="l"/>
             <a:r>
-              <a:rPr sz="3600" b="1">
+              <a:rPr sz="2400" b="1">
                 <a:solidFill>
                   <a:srgbClr val="254563"/>
                 </a:solidFill>
                 <a:latin typeface="Calibri"/>
               </a:rPr>
-              <a:t>Residents should not guess which feed is live</a:t>
-            </a:r>
-          </a:p>
-        </p:txBody>
-      </p:sp>
-      <p:sp>
-        <p:nvSpPr>
-          <p:cNvPr id="4" name="TextBox 3"/>
+              <a:t>Residents should not have to guess which feed is live</a:t>
+            </a:r>
+          </a:p>
+        </p:txBody>
+      </p:sp>
+      <p:sp>
+        <p:nvSpPr>
+          <p:cNvPr id="6" name="TextBox 5"/>
           <p:cNvSpPr txBox="1"/>
           <p:nvPr/>
         </p:nvSpPr>
         <p:spPr>
           <a:xfrm>
-            <a:off x="548640" y="2560320"/>
-            <a:ext cx="10972800" cy="3108960"/>
+            <a:off x="411480" y="6510528"/>
+            <a:ext cx="8229600" cy="237744"/>
           </a:xfrm>
           <a:prstGeom prst="rect">
             <a:avLst/>
@@ -3342,60 +4032,627 @@
           <a:noFill/>
         </p:spPr>
         <p:txBody>
-          <a:bodyPr wrap="none">
+          <a:bodyPr wrap="square">
             <a:spAutoFit/>
           </a:bodyPr>
           <a:lstStyle/>
           <a:p>
-            <a:pPr/>
-            <a:r>
-              <a:rPr sz="2000">
+            <a:pPr algn="l"/>
+            <a:r>
+              <a:rPr sz="1100" b="0">
                 <a:solidFill>
-                  <a:srgbClr val="262B31"/>
+                  <a:srgbClr val="5C564C"/>
                 </a:solidFill>
                 <a:latin typeface="Calibri"/>
               </a:rPr>
-              <a:t>Official sources are scattered across agencies.</a:t>
-            </a:r>
-          </a:p>
-          <a:p>
-            <a:pPr/>
-            <a:r>
-              <a:rPr sz="2000">
+              <a:t>Maharashtra Civic Alerts  ·  Codex Build House Pune</a:t>
+            </a:r>
+          </a:p>
+        </p:txBody>
+      </p:sp>
+      <p:sp>
+        <p:nvSpPr>
+          <p:cNvPr id="7" name="TextBox 6"/>
+          <p:cNvSpPr txBox="1"/>
+          <p:nvPr/>
+        </p:nvSpPr>
+        <p:spPr>
+          <a:xfrm>
+            <a:off x="10332720" y="6510528"/>
+            <a:ext cx="1371600" cy="237744"/>
+          </a:xfrm>
+          <a:prstGeom prst="rect">
+            <a:avLst/>
+          </a:prstGeom>
+          <a:noFill/>
+        </p:spPr>
+        <p:txBody>
+          <a:bodyPr wrap="square">
+            <a:spAutoFit/>
+          </a:bodyPr>
+          <a:lstStyle/>
+          <a:p>
+            <a:pPr algn="r"/>
+            <a:r>
+              <a:rPr sz="1100" b="1">
                 <a:solidFill>
-                  <a:srgbClr val="262B31"/>
+                  <a:srgbClr val="5C564C"/>
                 </a:solidFill>
                 <a:latin typeface="Calibri"/>
               </a:rPr>
-              <a:t>An empty map looks safe when a source is stale or disabled.</a:t>
-            </a:r>
-          </a:p>
-          <a:p>
-            <a:pPr/>
-            <a:r>
-              <a:rPr sz="2000">
-                <a:solidFill>
-                  <a:srgbClr val="262B31"/>
-                </a:solidFill>
-                <a:latin typeface="Calibri"/>
-              </a:rPr>
-              <a:t>Place names are ambiguous (Navi Mumbai spans two districts).</a:t>
-            </a:r>
-          </a:p>
-          <a:p>
-            <a:pPr/>
-            <a:r>
-              <a:rPr sz="2000">
-                <a:solidFill>
-                  <a:srgbClr val="262B31"/>
-                </a:solidFill>
-                <a:latin typeface="Calibri"/>
-              </a:rPr>
-              <a:t>Warnings must stay attributed, not rewritten by a model.</a:t>
-            </a:r>
-          </a:p>
-        </p:txBody>
-      </p:sp>
+              <a:t>2 / 9</a:t>
+            </a:r>
+          </a:p>
+        </p:txBody>
+      </p:sp>
+      <p:graphicFrame>
+        <p:nvGraphicFramePr>
+          <p:cNvPr id="8" name="Table 7"/>
+          <p:cNvGraphicFramePr>
+            <a:graphicFrameLocks noGrp="1"/>
+          </p:cNvGraphicFramePr>
+          <p:nvPr/>
+        </p:nvGraphicFramePr>
+        <p:xfrm>
+          <a:off x="411480" y="1143000"/>
+          <a:ext cx="11384280" cy="5120640"/>
+        </p:xfrm>
+        <a:graphic>
+          <a:graphicData uri="http://schemas.openxmlformats.org/drawingml/2006/table">
+            <a:tbl>
+              <a:tblPr firstRow="1" bandRow="1">
+                <a:tableStyleId>{5C22544A-7EE6-4342-B048-85BDC9FD1C3A}</a:tableStyleId>
+              </a:tblPr>
+              <a:tblGrid>
+                <a:gridCol w="2846070"/>
+                <a:gridCol w="2846070"/>
+                <a:gridCol w="2846070"/>
+                <a:gridCol w="2846070"/>
+              </a:tblGrid>
+              <a:tr h="853440">
+                <a:tc>
+                  <a:txBody>
+                    <a:bodyPr wrap="square"/>
+                    <a:lstStyle/>
+                    <a:p>
+                      <a:r>
+                        <a:rPr sz="1000" b="1">
+                          <a:solidFill>
+                            <a:srgbClr val="254563"/>
+                          </a:solidFill>
+                          <a:latin typeface="Calibri"/>
+                        </a:rPr>
+                        <a:t>Resident question</a:t>
+                      </a:r>
+                    </a:p>
+                  </a:txBody>
+                  <a:tcPr>
+                    <a:solidFill>
+                      <a:srgbClr val="EFE6D8"/>
+                    </a:solidFill>
+                  </a:tcPr>
+                </a:tc>
+                <a:tc>
+                  <a:txBody>
+                    <a:bodyPr wrap="square"/>
+                    <a:lstStyle/>
+                    <a:p>
+                      <a:r>
+                        <a:rPr sz="1000" b="1">
+                          <a:solidFill>
+                            <a:srgbClr val="254563"/>
+                          </a:solidFill>
+                          <a:latin typeface="Calibri"/>
+                        </a:rPr>
+                        <a:t>Typical today</a:t>
+                      </a:r>
+                    </a:p>
+                  </a:txBody>
+                  <a:tcPr>
+                    <a:solidFill>
+                      <a:srgbClr val="EFE6D8"/>
+                    </a:solidFill>
+                  </a:tcPr>
+                </a:tc>
+                <a:tc>
+                  <a:txBody>
+                    <a:bodyPr wrap="square"/>
+                    <a:lstStyle/>
+                    <a:p>
+                      <a:r>
+                        <a:rPr sz="1000" b="1">
+                          <a:solidFill>
+                            <a:srgbClr val="254563"/>
+                          </a:solidFill>
+                          <a:latin typeface="Calibri"/>
+                        </a:rPr>
+                        <a:t>Failure mode</a:t>
+                      </a:r>
+                    </a:p>
+                  </a:txBody>
+                  <a:tcPr>
+                    <a:solidFill>
+                      <a:srgbClr val="EFE6D8"/>
+                    </a:solidFill>
+                  </a:tcPr>
+                </a:tc>
+                <a:tc>
+                  <a:txBody>
+                    <a:bodyPr wrap="square"/>
+                    <a:lstStyle/>
+                    <a:p>
+                      <a:r>
+                        <a:rPr sz="1000" b="1">
+                          <a:solidFill>
+                            <a:srgbClr val="254563"/>
+                          </a:solidFill>
+                          <a:latin typeface="Calibri"/>
+                        </a:rPr>
+                        <a:t>This hub answers</a:t>
+                      </a:r>
+                    </a:p>
+                  </a:txBody>
+                  <a:tcPr>
+                    <a:solidFill>
+                      <a:srgbClr val="EFE6D8"/>
+                    </a:solidFill>
+                  </a:tcPr>
+                </a:tc>
+              </a:tr>
+              <a:tr h="853440">
+                <a:tc>
+                  <a:txBody>
+                    <a:bodyPr wrap="square"/>
+                    <a:lstStyle/>
+                    <a:p>
+                      <a:r>
+                        <a:rPr sz="1100" b="1">
+                          <a:solidFill>
+                            <a:srgbClr val="231F1A"/>
+                          </a:solidFill>
+                          <a:latin typeface="Calibri"/>
+                        </a:rPr>
+                        <a:t>Is this source live?</a:t>
+                      </a:r>
+                    </a:p>
+                  </a:txBody>
+                  <a:tcPr>
+                    <a:solidFill>
+                      <a:srgbClr val="FBF7F0"/>
+                    </a:solidFill>
+                  </a:tcPr>
+                </a:tc>
+                <a:tc>
+                  <a:txBody>
+                    <a:bodyPr wrap="square"/>
+                    <a:lstStyle/>
+                    <a:p>
+                      <a:r>
+                        <a:rPr sz="1100" b="0">
+                          <a:solidFill>
+                            <a:srgbClr val="231F1A"/>
+                          </a:solidFill>
+                          <a:latin typeface="Calibri"/>
+                        </a:rPr>
+                        <a:t>Empty map or last screenshot</a:t>
+                      </a:r>
+                    </a:p>
+                  </a:txBody>
+                  <a:tcPr>
+                    <a:solidFill>
+                      <a:srgbClr val="FBF7F0"/>
+                    </a:solidFill>
+                  </a:tcPr>
+                </a:tc>
+                <a:tc>
+                  <a:txBody>
+                    <a:bodyPr wrap="square"/>
+                    <a:lstStyle/>
+                    <a:p>
+                      <a:r>
+                        <a:rPr sz="1100" b="0">
+                          <a:solidFill>
+                            <a:srgbClr val="231F1A"/>
+                          </a:solidFill>
+                          <a:latin typeface="Calibri"/>
+                        </a:rPr>
+                        <a:t>Stale data looks like all-clear</a:t>
+                      </a:r>
+                    </a:p>
+                  </a:txBody>
+                  <a:tcPr>
+                    <a:solidFill>
+                      <a:srgbClr val="FBF7F0"/>
+                    </a:solidFill>
+                  </a:tcPr>
+                </a:tc>
+                <a:tc>
+                  <a:txBody>
+                    <a:bodyPr wrap="square"/>
+                    <a:lstStyle/>
+                    <a:p>
+                      <a:r>
+                        <a:rPr sz="1100" b="0">
+                          <a:solidFill>
+                            <a:srgbClr val="231F1A"/>
+                          </a:solidFill>
+                          <a:latin typeface="Calibri"/>
+                        </a:rPr>
+                        <a:t>Per-source freshness and status</a:t>
+                      </a:r>
+                    </a:p>
+                  </a:txBody>
+                  <a:tcPr>
+                    <a:solidFill>
+                      <a:srgbClr val="FBF7F0"/>
+                    </a:solidFill>
+                  </a:tcPr>
+                </a:tc>
+              </a:tr>
+              <a:tr h="853440">
+                <a:tc>
+                  <a:txBody>
+                    <a:bodyPr wrap="square"/>
+                    <a:lstStyle/>
+                    <a:p>
+                      <a:r>
+                        <a:rPr sz="1100" b="1">
+                          <a:solidFill>
+                            <a:srgbClr val="231F1A"/>
+                          </a:solidFill>
+                          <a:latin typeface="Calibri"/>
+                        </a:rPr>
+                        <a:t>Where does it apply?</a:t>
+                      </a:r>
+                    </a:p>
+                  </a:txBody>
+                  <a:tcPr>
+                    <a:solidFill>
+                      <a:srgbClr val="F7F1E8"/>
+                    </a:solidFill>
+                  </a:tcPr>
+                </a:tc>
+                <a:tc>
+                  <a:txBody>
+                    <a:bodyPr wrap="square"/>
+                    <a:lstStyle/>
+                    <a:p>
+                      <a:r>
+                        <a:rPr sz="1100" b="0">
+                          <a:solidFill>
+                            <a:srgbClr val="231F1A"/>
+                          </a:solidFill>
+                          <a:latin typeface="Calibri"/>
+                        </a:rPr>
+                        <a:t>City or village name on a poster</a:t>
+                      </a:r>
+                    </a:p>
+                  </a:txBody>
+                  <a:tcPr>
+                    <a:solidFill>
+                      <a:srgbClr val="F7F1E8"/>
+                    </a:solidFill>
+                  </a:tcPr>
+                </a:tc>
+                <a:tc>
+                  <a:txBody>
+                    <a:bodyPr wrap="square"/>
+                    <a:lstStyle/>
+                    <a:p>
+                      <a:r>
+                        <a:rPr sz="1100" b="0">
+                          <a:solidFill>
+                            <a:srgbClr val="231F1A"/>
+                          </a:solidFill>
+                          <a:latin typeface="Calibri"/>
+                        </a:rPr>
+                        <a:t>Wrong district, false precision</a:t>
+                      </a:r>
+                    </a:p>
+                  </a:txBody>
+                  <a:tcPr>
+                    <a:solidFill>
+                      <a:srgbClr val="F7F1E8"/>
+                    </a:solidFill>
+                  </a:tcPr>
+                </a:tc>
+                <a:tc>
+                  <a:txBody>
+                    <a:bodyPr wrap="square"/>
+                    <a:lstStyle/>
+                    <a:p>
+                      <a:r>
+                        <a:rPr sz="1100" b="0">
+                          <a:solidFill>
+                            <a:srgbClr val="231F1A"/>
+                          </a:solidFill>
+                          <a:latin typeface="Calibri"/>
+                        </a:rPr>
+                        <a:t>District alias; dual-candidate when needed</a:t>
+                      </a:r>
+                    </a:p>
+                  </a:txBody>
+                  <a:tcPr>
+                    <a:solidFill>
+                      <a:srgbClr val="F7F1E8"/>
+                    </a:solidFill>
+                  </a:tcPr>
+                </a:tc>
+              </a:tr>
+              <a:tr h="853440">
+                <a:tc>
+                  <a:txBody>
+                    <a:bodyPr wrap="square"/>
+                    <a:lstStyle/>
+                    <a:p>
+                      <a:r>
+                        <a:rPr sz="1100" b="1">
+                          <a:solidFill>
+                            <a:srgbClr val="231F1A"/>
+                          </a:solidFill>
+                          <a:latin typeface="Calibri"/>
+                        </a:rPr>
+                        <a:t>What should I do?</a:t>
+                      </a:r>
+                    </a:p>
+                  </a:txBody>
+                  <a:tcPr>
+                    <a:solidFill>
+                      <a:srgbClr val="FBF7F0"/>
+                    </a:solidFill>
+                  </a:tcPr>
+                </a:tc>
+                <a:tc>
+                  <a:txBody>
+                    <a:bodyPr wrap="square"/>
+                    <a:lstStyle/>
+                    <a:p>
+                      <a:r>
+                        <a:rPr sz="1100" b="0">
+                          <a:solidFill>
+                            <a:srgbClr val="231F1A"/>
+                          </a:solidFill>
+                          <a:latin typeface="Calibri"/>
+                        </a:rPr>
+                        <a:t>Scattered agency pages</a:t>
+                      </a:r>
+                    </a:p>
+                  </a:txBody>
+                  <a:tcPr>
+                    <a:solidFill>
+                      <a:srgbClr val="FBF7F0"/>
+                    </a:solidFill>
+                  </a:tcPr>
+                </a:tc>
+                <a:tc>
+                  <a:txBody>
+                    <a:bodyPr wrap="square"/>
+                    <a:lstStyle/>
+                    <a:p>
+                      <a:r>
+                        <a:rPr sz="1100" b="0">
+                          <a:solidFill>
+                            <a:srgbClr val="231F1A"/>
+                          </a:solidFill>
+                          <a:latin typeface="Calibri"/>
+                        </a:rPr>
+                        <a:t>Instructions rewritten or dropped</a:t>
+                      </a:r>
+                    </a:p>
+                  </a:txBody>
+                  <a:tcPr>
+                    <a:solidFill>
+                      <a:srgbClr val="FBF7F0"/>
+                    </a:solidFill>
+                  </a:tcPr>
+                </a:tc>
+                <a:tc>
+                  <a:txBody>
+                    <a:bodyPr wrap="square"/>
+                    <a:lstStyle/>
+                    <a:p>
+                      <a:r>
+                        <a:rPr sz="1100" b="0">
+                          <a:solidFill>
+                            <a:srgbClr val="231F1A"/>
+                          </a:solidFill>
+                          <a:latin typeface="Calibri"/>
+                        </a:rPr>
+                        <a:t>Original CAP text, EN/MR labelled</a:t>
+                      </a:r>
+                    </a:p>
+                  </a:txBody>
+                  <a:tcPr>
+                    <a:solidFill>
+                      <a:srgbClr val="FBF7F0"/>
+                    </a:solidFill>
+                  </a:tcPr>
+                </a:tc>
+              </a:tr>
+              <a:tr h="853440">
+                <a:tc>
+                  <a:txBody>
+                    <a:bodyPr wrap="square"/>
+                    <a:lstStyle/>
+                    <a:p>
+                      <a:r>
+                        <a:rPr sz="1100" b="1">
+                          <a:solidFill>
+                            <a:srgbClr val="231F1A"/>
+                          </a:solidFill>
+                          <a:latin typeface="Calibri"/>
+                        </a:rPr>
+                        <a:t>Who issued it?</a:t>
+                      </a:r>
+                    </a:p>
+                  </a:txBody>
+                  <a:tcPr>
+                    <a:solidFill>
+                      <a:srgbClr val="F7F1E8"/>
+                    </a:solidFill>
+                  </a:tcPr>
+                </a:tc>
+                <a:tc>
+                  <a:txBody>
+                    <a:bodyPr wrap="square"/>
+                    <a:lstStyle/>
+                    <a:p>
+                      <a:r>
+                        <a:rPr sz="1100" b="0">
+                          <a:solidFill>
+                            <a:srgbClr val="231F1A"/>
+                          </a:solidFill>
+                          <a:latin typeface="Calibri"/>
+                        </a:rPr>
+                        <a:t>Reposted WhatsApp card</a:t>
+                      </a:r>
+                    </a:p>
+                  </a:txBody>
+                  <a:tcPr>
+                    <a:solidFill>
+                      <a:srgbClr val="F7F1E8"/>
+                    </a:solidFill>
+                  </a:tcPr>
+                </a:tc>
+                <a:tc>
+                  <a:txBody>
+                    <a:bodyPr wrap="square"/>
+                    <a:lstStyle/>
+                    <a:p>
+                      <a:r>
+                        <a:rPr sz="1100" b="0">
+                          <a:solidFill>
+                            <a:srgbClr val="231F1A"/>
+                          </a:solidFill>
+                          <a:latin typeface="Calibri"/>
+                        </a:rPr>
+                        <a:t>Lost attribution</a:t>
+                      </a:r>
+                    </a:p>
+                  </a:txBody>
+                  <a:tcPr>
+                    <a:solidFill>
+                      <a:srgbClr val="F7F1E8"/>
+                    </a:solidFill>
+                  </a:tcPr>
+                </a:tc>
+                <a:tc>
+                  <a:txBody>
+                    <a:bodyPr wrap="square"/>
+                    <a:lstStyle/>
+                    <a:p>
+                      <a:r>
+                        <a:rPr sz="1100" b="0">
+                          <a:solidFill>
+                            <a:srgbClr val="231F1A"/>
+                          </a:solidFill>
+                          <a:latin typeface="Calibri"/>
+                        </a:rPr>
+                        <a:t>Source identity + official directory</a:t>
+                      </a:r>
+                    </a:p>
+                  </a:txBody>
+                  <a:tcPr>
+                    <a:solidFill>
+                      <a:srgbClr val="F7F1E8"/>
+                    </a:solidFill>
+                  </a:tcPr>
+                </a:tc>
+              </a:tr>
+              <a:tr h="853440">
+                <a:tc>
+                  <a:txBody>
+                    <a:bodyPr wrap="square"/>
+                    <a:lstStyle/>
+                    <a:p>
+                      <a:r>
+                        <a:rPr sz="1100" b="1">
+                          <a:solidFill>
+                            <a:srgbClr val="231F1A"/>
+                          </a:solidFill>
+                          <a:latin typeface="Calibri"/>
+                        </a:rPr>
+                        <a:t>Is the warning still on?</a:t>
+                      </a:r>
+                    </a:p>
+                  </a:txBody>
+                  <a:tcPr>
+                    <a:solidFill>
+                      <a:srgbClr val="FBF7F0"/>
+                    </a:solidFill>
+                  </a:tcPr>
+                </a:tc>
+                <a:tc>
+                  <a:txBody>
+                    <a:bodyPr wrap="square"/>
+                    <a:lstStyle/>
+                    <a:p>
+                      <a:r>
+                        <a:rPr sz="1100" b="0">
+                          <a:solidFill>
+                            <a:srgbClr val="231F1A"/>
+                          </a:solidFill>
+                          <a:latin typeface="Calibri"/>
+                        </a:rPr>
+                        <a:t>Old graphic stays in chat</a:t>
+                      </a:r>
+                    </a:p>
+                  </a:txBody>
+                  <a:tcPr>
+                    <a:solidFill>
+                      <a:srgbClr val="FBF7F0"/>
+                    </a:solidFill>
+                  </a:tcPr>
+                </a:tc>
+                <a:tc>
+                  <a:txBody>
+                    <a:bodyPr wrap="square"/>
+                    <a:lstStyle/>
+                    <a:p>
+                      <a:r>
+                        <a:rPr sz="1100" b="0">
+                          <a:solidFill>
+                            <a:srgbClr val="231F1A"/>
+                          </a:solidFill>
+                          <a:latin typeface="Calibri"/>
+                        </a:rPr>
+                        <a:t>Cancelled alert still believed</a:t>
+                      </a:r>
+                    </a:p>
+                  </a:txBody>
+                  <a:tcPr>
+                    <a:solidFill>
+                      <a:srgbClr val="FBF7F0"/>
+                    </a:solidFill>
+                  </a:tcPr>
+                </a:tc>
+                <a:tc>
+                  <a:txBody>
+                    <a:bodyPr wrap="square"/>
+                    <a:lstStyle/>
+                    <a:p>
+                      <a:r>
+                        <a:rPr sz="1100" b="0">
+                          <a:solidFill>
+                            <a:srgbClr val="231F1A"/>
+                          </a:solidFill>
+                          <a:latin typeface="Calibri"/>
+                        </a:rPr>
+                        <a:t>Actual / Update / Cancel / expiry</a:t>
+                      </a:r>
+                    </a:p>
+                  </a:txBody>
+                  <a:tcPr>
+                    <a:solidFill>
+                      <a:srgbClr val="FBF7F0"/>
+                    </a:solidFill>
+                  </a:tcPr>
+                </a:tc>
+              </a:tr>
+            </a:tbl>
+          </a:graphicData>
+        </a:graphic>
+      </p:graphicFrame>
     </p:spTree>
   </p:cSld>
   <p:clrMapOvr>
@@ -3414,16 +4671,83 @@
         <p:nvPr/>
       </p:nvGrpSpPr>
       <p:grpSpPr/>
-      <p:sp>
-        <p:nvSpPr>
-          <p:cNvPr id="2" name="TextBox 1"/>
+      <p:pic>
+        <p:nvPicPr>
+          <p:cNvPr id="2" name="Picture 1" descr="paper-wash.jpg"/>
+          <p:cNvPicPr>
+            <a:picLocks noChangeAspect="1"/>
+          </p:cNvPicPr>
+          <p:nvPr/>
+        </p:nvPicPr>
+        <p:blipFill>
+          <a:blip r:embed="rId2"/>
+          <a:stretch>
+            <a:fillRect/>
+          </a:stretch>
+        </p:blipFill>
+        <p:spPr>
+          <a:xfrm>
+            <a:off x="0" y="0"/>
+            <a:ext cx="12191695" cy="6858000"/>
+          </a:xfrm>
+          <a:prstGeom prst="rect">
+            <a:avLst/>
+          </a:prstGeom>
+        </p:spPr>
+      </p:pic>
+      <p:sp>
+        <p:nvSpPr>
+          <p:cNvPr id="3" name="Rectangle 2"/>
+          <p:cNvSpPr/>
+          <p:nvPr/>
+        </p:nvSpPr>
+        <p:spPr>
+          <a:xfrm>
+            <a:off x="0" y="0"/>
+            <a:ext cx="128016" cy="6858000"/>
+          </a:xfrm>
+          <a:prstGeom prst="rect">
+            <a:avLst/>
+          </a:prstGeom>
+          <a:solidFill>
+            <a:srgbClr val="C56A1A"/>
+          </a:solidFill>
+          <a:ln>
+            <a:noFill/>
+          </a:ln>
+        </p:spPr>
+        <p:style>
+          <a:lnRef idx="1">
+            <a:schemeClr val="accent1"/>
+          </a:lnRef>
+          <a:fillRef idx="3">
+            <a:schemeClr val="accent1"/>
+          </a:fillRef>
+          <a:effectRef idx="2">
+            <a:schemeClr val="accent1"/>
+          </a:effectRef>
+          <a:fontRef idx="minor">
+            <a:schemeClr val="lt1"/>
+          </a:fontRef>
+        </p:style>
+        <p:txBody>
+          <a:bodyPr rtlCol="0" anchor="ctr"/>
+          <a:lstStyle/>
+          <a:p>
+            <a:pPr algn="ctr"/>
+          </a:p>
+        </p:txBody>
+      </p:sp>
+      <p:sp>
+        <p:nvSpPr>
+          <p:cNvPr id="4" name="TextBox 3"/>
           <p:cNvSpPr txBox="1"/>
           <p:nvPr/>
         </p:nvSpPr>
         <p:spPr>
           <a:xfrm>
-            <a:off x="548640" y="411480"/>
-            <a:ext cx="10972800" cy="365760"/>
+            <a:off x="411480" y="201168"/>
+            <a:ext cx="10972800" cy="256032"/>
           </a:xfrm>
           <a:prstGeom prst="rect">
             <a:avLst/>
@@ -3431,16 +4755,16 @@
           <a:noFill/>
         </p:spPr>
         <p:txBody>
-          <a:bodyPr wrap="none">
+          <a:bodyPr wrap="square">
             <a:spAutoFit/>
           </a:bodyPr>
           <a:lstStyle/>
           <a:p>
             <a:pPr algn="l"/>
             <a:r>
-              <a:rPr sz="1400" b="1">
+              <a:rPr sz="1200" b="1">
                 <a:solidFill>
-                  <a:srgbClr val="A44B13"/>
+                  <a:srgbClr val="C56A1A"/>
                 </a:solidFill>
                 <a:latin typeface="Calibri"/>
               </a:rPr>
@@ -3451,14 +4775,14 @@
       </p:sp>
       <p:sp>
         <p:nvSpPr>
-          <p:cNvPr id="3" name="TextBox 2"/>
+          <p:cNvPr id="5" name="TextBox 4"/>
           <p:cNvSpPr txBox="1"/>
           <p:nvPr/>
         </p:nvSpPr>
         <p:spPr>
           <a:xfrm>
-            <a:off x="548640" y="914400"/>
-            <a:ext cx="10972800" cy="1463040"/>
+            <a:off x="411480" y="438912"/>
+            <a:ext cx="11338560" cy="640080"/>
           </a:xfrm>
           <a:prstGeom prst="rect">
             <a:avLst/>
@@ -3466,34 +4790,34 @@
           <a:noFill/>
         </p:spPr>
         <p:txBody>
-          <a:bodyPr wrap="none">
+          <a:bodyPr wrap="square">
             <a:spAutoFit/>
           </a:bodyPr>
           <a:lstStyle/>
           <a:p>
             <a:pPr algn="l"/>
             <a:r>
-              <a:rPr sz="3600" b="1">
+              <a:rPr sz="2400" b="1">
                 <a:solidFill>
                   <a:srgbClr val="254563"/>
                 </a:solidFill>
                 <a:latin typeface="Calibri"/>
               </a:rPr>
-              <a:t>A place-aware bulletin that states its coverage</a:t>
-            </a:r>
-          </a:p>
-        </p:txBody>
-      </p:sp>
-      <p:sp>
-        <p:nvSpPr>
-          <p:cNvPr id="4" name="TextBox 3"/>
+              <a:t>One session returns status, place, bulletin and services</a:t>
+            </a:r>
+          </a:p>
+        </p:txBody>
+      </p:sp>
+      <p:sp>
+        <p:nvSpPr>
+          <p:cNvPr id="6" name="TextBox 5"/>
           <p:cNvSpPr txBox="1"/>
           <p:nvPr/>
         </p:nvSpPr>
         <p:spPr>
           <a:xfrm>
-            <a:off x="548640" y="2560320"/>
-            <a:ext cx="10972800" cy="3108960"/>
+            <a:off x="411480" y="6510528"/>
+            <a:ext cx="8229600" cy="237744"/>
           </a:xfrm>
           <a:prstGeom prst="rect">
             <a:avLst/>
@@ -3501,72 +4825,627 @@
           <a:noFill/>
         </p:spPr>
         <p:txBody>
-          <a:bodyPr wrap="none">
+          <a:bodyPr wrap="square">
             <a:spAutoFit/>
           </a:bodyPr>
           <a:lstStyle/>
           <a:p>
-            <a:pPr/>
-            <a:r>
-              <a:rPr sz="2000">
+            <a:pPr algn="l"/>
+            <a:r>
+              <a:rPr sz="1100" b="0">
                 <a:solidFill>
-                  <a:srgbClr val="262B31"/>
+                  <a:srgbClr val="5C564C"/>
                 </a:solidFill>
                 <a:latin typeface="Calibri"/>
               </a:rPr>
-              <a:t>CAP lifecycle: actual, update, cancel, expiry.</a:t>
-            </a:r>
-          </a:p>
-          <a:p>
-            <a:pPr/>
-            <a:r>
-              <a:rPr sz="2000">
+              <a:t>Maharashtra Civic Alerts  ·  Codex Build House Pune</a:t>
+            </a:r>
+          </a:p>
+        </p:txBody>
+      </p:sp>
+      <p:sp>
+        <p:nvSpPr>
+          <p:cNvPr id="7" name="TextBox 6"/>
+          <p:cNvSpPr txBox="1"/>
+          <p:nvPr/>
+        </p:nvSpPr>
+        <p:spPr>
+          <a:xfrm>
+            <a:off x="10332720" y="6510528"/>
+            <a:ext cx="1371600" cy="237744"/>
+          </a:xfrm>
+          <a:prstGeom prst="rect">
+            <a:avLst/>
+          </a:prstGeom>
+          <a:noFill/>
+        </p:spPr>
+        <p:txBody>
+          <a:bodyPr wrap="square">
+            <a:spAutoFit/>
+          </a:bodyPr>
+          <a:lstStyle/>
+          <a:p>
+            <a:pPr algn="r"/>
+            <a:r>
+              <a:rPr sz="1100" b="1">
                 <a:solidFill>
-                  <a:srgbClr val="262B31"/>
+                  <a:srgbClr val="5C564C"/>
                 </a:solidFill>
                 <a:latin typeface="Calibri"/>
               </a:rPr>
-              <a:t>District search and aliases: Sawantwadi, Marunji, Navi Mumbai.</a:t>
-            </a:r>
-          </a:p>
-          <a:p>
-            <a:pPr/>
-            <a:r>
-              <a:rPr sz="2000">
-                <a:solidFill>
-                  <a:srgbClr val="262B31"/>
-                </a:solidFill>
-                <a:latin typeface="Calibri"/>
-              </a:rPr>
-              <a:t>Source-health strip before anyone reads “no alerts”.</a:t>
-            </a:r>
-          </a:p>
-          <a:p>
-            <a:pPr/>
-            <a:r>
-              <a:rPr sz="2000">
-                <a:solidFill>
-                  <a:srgbClr val="262B31"/>
-                </a:solidFill>
-                <a:latin typeface="Calibri"/>
-              </a:rPr>
-              <a:t>12 citizen-service directories labelled live vs directory-only.</a:t>
-            </a:r>
-          </a:p>
-          <a:p>
-            <a:pPr/>
-            <a:r>
-              <a:rPr sz="2000">
-                <a:solidFill>
-                  <a:srgbClr val="262B31"/>
-                </a:solidFill>
-                <a:latin typeface="Calibri"/>
-              </a:rPr>
-              <a:t>Labelled local demo fixtures that never enter production.</a:t>
-            </a:r>
-          </a:p>
-        </p:txBody>
-      </p:sp>
+              <a:t>3 / 9</a:t>
+            </a:r>
+          </a:p>
+        </p:txBody>
+      </p:sp>
+      <p:graphicFrame>
+        <p:nvGraphicFramePr>
+          <p:cNvPr id="8" name="Table 7"/>
+          <p:cNvGraphicFramePr>
+            <a:graphicFrameLocks noGrp="1"/>
+          </p:cNvGraphicFramePr>
+          <p:nvPr/>
+        </p:nvGraphicFramePr>
+        <p:xfrm>
+          <a:off x="411480" y="1143000"/>
+          <a:ext cx="11384280" cy="5120640"/>
+        </p:xfrm>
+        <a:graphic>
+          <a:graphicData uri="http://schemas.openxmlformats.org/drawingml/2006/table">
+            <a:tbl>
+              <a:tblPr firstRow="1" bandRow="1">
+                <a:tableStyleId>{5C22544A-7EE6-4342-B048-85BDC9FD1C3A}</a:tableStyleId>
+              </a:tblPr>
+              <a:tblGrid>
+                <a:gridCol w="2846070"/>
+                <a:gridCol w="2846070"/>
+                <a:gridCol w="2846070"/>
+                <a:gridCol w="2846070"/>
+              </a:tblGrid>
+              <a:tr h="853440">
+                <a:tc>
+                  <a:txBody>
+                    <a:bodyPr wrap="square"/>
+                    <a:lstStyle/>
+                    <a:p>
+                      <a:r>
+                        <a:rPr sz="1000" b="1">
+                          <a:solidFill>
+                            <a:srgbClr val="254563"/>
+                          </a:solidFill>
+                          <a:latin typeface="Calibri"/>
+                        </a:rPr>
+                        <a:t>Step</a:t>
+                      </a:r>
+                    </a:p>
+                  </a:txBody>
+                  <a:tcPr>
+                    <a:solidFill>
+                      <a:srgbClr val="EFE6D8"/>
+                    </a:solidFill>
+                  </a:tcPr>
+                </a:tc>
+                <a:tc>
+                  <a:txBody>
+                    <a:bodyPr wrap="square"/>
+                    <a:lstStyle/>
+                    <a:p>
+                      <a:r>
+                        <a:rPr sz="1000" b="1">
+                          <a:solidFill>
+                            <a:srgbClr val="254563"/>
+                          </a:solidFill>
+                          <a:latin typeface="Calibri"/>
+                        </a:rPr>
+                        <a:t>Input</a:t>
+                      </a:r>
+                    </a:p>
+                  </a:txBody>
+                  <a:tcPr>
+                    <a:solidFill>
+                      <a:srgbClr val="EFE6D8"/>
+                    </a:solidFill>
+                  </a:tcPr>
+                </a:tc>
+                <a:tc>
+                  <a:txBody>
+                    <a:bodyPr wrap="square"/>
+                    <a:lstStyle/>
+                    <a:p>
+                      <a:r>
+                        <a:rPr sz="1000" b="1">
+                          <a:solidFill>
+                            <a:srgbClr val="254563"/>
+                          </a:solidFill>
+                          <a:latin typeface="Calibri"/>
+                        </a:rPr>
+                        <a:t>Output</a:t>
+                      </a:r>
+                    </a:p>
+                  </a:txBody>
+                  <a:tcPr>
+                    <a:solidFill>
+                      <a:srgbClr val="EFE6D8"/>
+                    </a:solidFill>
+                  </a:tcPr>
+                </a:tc>
+                <a:tc>
+                  <a:txBody>
+                    <a:bodyPr wrap="square"/>
+                    <a:lstStyle/>
+                    <a:p>
+                      <a:r>
+                        <a:rPr sz="1000" b="1">
+                          <a:solidFill>
+                            <a:srgbClr val="254563"/>
+                          </a:solidFill>
+                          <a:latin typeface="Calibri"/>
+                        </a:rPr>
+                        <a:t>Honesty rule</a:t>
+                      </a:r>
+                    </a:p>
+                  </a:txBody>
+                  <a:tcPr>
+                    <a:solidFill>
+                      <a:srgbClr val="EFE6D8"/>
+                    </a:solidFill>
+                  </a:tcPr>
+                </a:tc>
+              </a:tr>
+              <a:tr h="853440">
+                <a:tc>
+                  <a:txBody>
+                    <a:bodyPr wrap="square"/>
+                    <a:lstStyle/>
+                    <a:p>
+                      <a:r>
+                        <a:rPr sz="1100" b="1">
+                          <a:solidFill>
+                            <a:srgbClr val="231F1A"/>
+                          </a:solidFill>
+                          <a:latin typeface="Calibri"/>
+                        </a:rPr>
+                        <a:t>1. Identify the site</a:t>
+                      </a:r>
+                    </a:p>
+                  </a:txBody>
+                  <a:tcPr>
+                    <a:solidFill>
+                      <a:srgbClr val="FBF7F0"/>
+                    </a:solidFill>
+                  </a:tcPr>
+                </a:tc>
+                <a:tc>
+                  <a:txBody>
+                    <a:bodyPr wrap="square"/>
+                    <a:lstStyle/>
+                    <a:p>
+                      <a:r>
+                        <a:rPr sz="1100" b="0">
+                          <a:solidFill>
+                            <a:srgbClr val="231F1A"/>
+                          </a:solidFill>
+                          <a:latin typeface="Calibri"/>
+                        </a:rPr>
+                        <a:t>—</a:t>
+                      </a:r>
+                    </a:p>
+                  </a:txBody>
+                  <a:tcPr>
+                    <a:solidFill>
+                      <a:srgbClr val="FBF7F0"/>
+                    </a:solidFill>
+                  </a:tcPr>
+                </a:tc>
+                <a:tc>
+                  <a:txBody>
+                    <a:bodyPr wrap="square"/>
+                    <a:lstStyle/>
+                    <a:p>
+                      <a:r>
+                        <a:rPr sz="1100" b="0">
+                          <a:solidFill>
+                            <a:srgbClr val="231F1A"/>
+                          </a:solidFill>
+                          <a:latin typeface="Calibri"/>
+                        </a:rPr>
+                        <a:t>Independent banner + NDMA SACHET link</a:t>
+                      </a:r>
+                    </a:p>
+                  </a:txBody>
+                  <a:tcPr>
+                    <a:solidFill>
+                      <a:srgbClr val="FBF7F0"/>
+                    </a:solidFill>
+                  </a:tcPr>
+                </a:tc>
+                <a:tc>
+                  <a:txBody>
+                    <a:bodyPr wrap="square"/>
+                    <a:lstStyle/>
+                    <a:p>
+                      <a:r>
+                        <a:rPr sz="1100" b="0">
+                          <a:solidFill>
+                            <a:srgbClr val="231F1A"/>
+                          </a:solidFill>
+                          <a:latin typeface="Calibri"/>
+                        </a:rPr>
+                        <a:t>Not a government website</a:t>
+                      </a:r>
+                    </a:p>
+                  </a:txBody>
+                  <a:tcPr>
+                    <a:solidFill>
+                      <a:srgbClr val="FBF7F0"/>
+                    </a:solidFill>
+                  </a:tcPr>
+                </a:tc>
+              </a:tr>
+              <a:tr h="853440">
+                <a:tc>
+                  <a:txBody>
+                    <a:bodyPr wrap="square"/>
+                    <a:lstStyle/>
+                    <a:p>
+                      <a:r>
+                        <a:rPr sz="1100" b="1">
+                          <a:solidFill>
+                            <a:srgbClr val="231F1A"/>
+                          </a:solidFill>
+                          <a:latin typeface="Calibri"/>
+                        </a:rPr>
+                        <a:t>2. Read latest status</a:t>
+                      </a:r>
+                    </a:p>
+                  </a:txBody>
+                  <a:tcPr>
+                    <a:solidFill>
+                      <a:srgbClr val="F7F1E8"/>
+                    </a:solidFill>
+                  </a:tcPr>
+                </a:tc>
+                <a:tc>
+                  <a:txBody>
+                    <a:bodyPr wrap="square"/>
+                    <a:lstStyle/>
+                    <a:p>
+                      <a:r>
+                        <a:rPr sz="1100" b="0">
+                          <a:solidFill>
+                            <a:srgbClr val="231F1A"/>
+                          </a:solidFill>
+                          <a:latin typeface="Calibri"/>
+                        </a:rPr>
+                        <a:t>—</a:t>
+                      </a:r>
+                    </a:p>
+                  </a:txBody>
+                  <a:tcPr>
+                    <a:solidFill>
+                      <a:srgbClr val="F7F1E8"/>
+                    </a:solidFill>
+                  </a:tcPr>
+                </a:tc>
+                <a:tc>
+                  <a:txBody>
+                    <a:bodyPr wrap="square"/>
+                    <a:lstStyle/>
+                    <a:p>
+                      <a:r>
+                        <a:rPr sz="1100" b="0">
+                          <a:solidFill>
+                            <a:srgbClr val="231F1A"/>
+                          </a:solidFill>
+                          <a:latin typeface="Calibri"/>
+                        </a:rPr>
+                        <a:t>healthy / degraded / stale + source ages</a:t>
+                      </a:r>
+                    </a:p>
+                  </a:txBody>
+                  <a:tcPr>
+                    <a:solidFill>
+                      <a:srgbClr val="F7F1E8"/>
+                    </a:solidFill>
+                  </a:tcPr>
+                </a:tc>
+                <a:tc>
+                  <a:txBody>
+                    <a:bodyPr wrap="square"/>
+                    <a:lstStyle/>
+                    <a:p>
+                      <a:r>
+                        <a:rPr sz="1100" b="0">
+                          <a:solidFill>
+                            <a:srgbClr val="231F1A"/>
+                          </a:solidFill>
+                          <a:latin typeface="Calibri"/>
+                        </a:rPr>
+                        <a:t>Partial coverage is expected</a:t>
+                      </a:r>
+                    </a:p>
+                  </a:txBody>
+                  <a:tcPr>
+                    <a:solidFill>
+                      <a:srgbClr val="F7F1E8"/>
+                    </a:solidFill>
+                  </a:tcPr>
+                </a:tc>
+              </a:tr>
+              <a:tr h="853440">
+                <a:tc>
+                  <a:txBody>
+                    <a:bodyPr wrap="square"/>
+                    <a:lstStyle/>
+                    <a:p>
+                      <a:r>
+                        <a:rPr sz="1100" b="1">
+                          <a:solidFill>
+                            <a:srgbClr val="231F1A"/>
+                          </a:solidFill>
+                          <a:latin typeface="Calibri"/>
+                        </a:rPr>
+                        <a:t>3. Find a place</a:t>
+                      </a:r>
+                    </a:p>
+                  </a:txBody>
+                  <a:tcPr>
+                    <a:solidFill>
+                      <a:srgbClr val="FBF7F0"/>
+                    </a:solidFill>
+                  </a:tcPr>
+                </a:tc>
+                <a:tc>
+                  <a:txBody>
+                    <a:bodyPr wrap="square"/>
+                    <a:lstStyle/>
+                    <a:p>
+                      <a:r>
+                        <a:rPr sz="1100" b="0">
+                          <a:solidFill>
+                            <a:srgbClr val="231F1A"/>
+                          </a:solidFill>
+                          <a:latin typeface="Calibri"/>
+                        </a:rPr>
+                        <a:t>Pune, Sawantwadi, Navi Mumbai, Marunji</a:t>
+                      </a:r>
+                    </a:p>
+                  </a:txBody>
+                  <a:tcPr>
+                    <a:solidFill>
+                      <a:srgbClr val="FBF7F0"/>
+                    </a:solidFill>
+                  </a:tcPr>
+                </a:tc>
+                <a:tc>
+                  <a:txBody>
+                    <a:bodyPr wrap="square"/>
+                    <a:lstStyle/>
+                    <a:p>
+                      <a:r>
+                        <a:rPr sz="1100" b="0">
+                          <a:solidFill>
+                            <a:srgbClr val="231F1A"/>
+                          </a:solidFill>
+                          <a:latin typeface="Calibri"/>
+                        </a:rPr>
+                        <a:t>District ID(s), precision = district-alias</a:t>
+                      </a:r>
+                    </a:p>
+                  </a:txBody>
+                  <a:tcPr>
+                    <a:solidFill>
+                      <a:srgbClr val="FBF7F0"/>
+                    </a:solidFill>
+                  </a:tcPr>
+                </a:tc>
+                <a:tc>
+                  <a:txBody>
+                    <a:bodyPr wrap="square"/>
+                    <a:lstStyle/>
+                    <a:p>
+                      <a:r>
+                        <a:rPr sz="1100" b="0">
+                          <a:solidFill>
+                            <a:srgbClr val="231F1A"/>
+                          </a:solidFill>
+                          <a:latin typeface="Calibri"/>
+                        </a:rPr>
+                        <a:t>No invented village polygons</a:t>
+                      </a:r>
+                    </a:p>
+                  </a:txBody>
+                  <a:tcPr>
+                    <a:solidFill>
+                      <a:srgbClr val="FBF7F0"/>
+                    </a:solidFill>
+                  </a:tcPr>
+                </a:tc>
+              </a:tr>
+              <a:tr h="853440">
+                <a:tc>
+                  <a:txBody>
+                    <a:bodyPr wrap="square"/>
+                    <a:lstStyle/>
+                    <a:p>
+                      <a:r>
+                        <a:rPr sz="1100" b="1">
+                          <a:solidFill>
+                            <a:srgbClr val="231F1A"/>
+                          </a:solidFill>
+                          <a:latin typeface="Calibri"/>
+                        </a:rPr>
+                        <a:t>4. Read the bulletin</a:t>
+                      </a:r>
+                    </a:p>
+                  </a:txBody>
+                  <a:tcPr>
+                    <a:solidFill>
+                      <a:srgbClr val="F7F1E8"/>
+                    </a:solidFill>
+                  </a:tcPr>
+                </a:tc>
+                <a:tc>
+                  <a:txBody>
+                    <a:bodyPr wrap="square"/>
+                    <a:lstStyle/>
+                    <a:p>
+                      <a:r>
+                        <a:rPr sz="1100" b="0">
+                          <a:solidFill>
+                            <a:srgbClr val="231F1A"/>
+                          </a:solidFill>
+                          <a:latin typeface="Calibri"/>
+                        </a:rPr>
+                        <a:t>District filter</a:t>
+                      </a:r>
+                    </a:p>
+                  </a:txBody>
+                  <a:tcPr>
+                    <a:solidFill>
+                      <a:srgbClr val="F7F1E8"/>
+                    </a:solidFill>
+                  </a:tcPr>
+                </a:tc>
+                <a:tc>
+                  <a:txBody>
+                    <a:bodyPr wrap="square"/>
+                    <a:lstStyle/>
+                    <a:p>
+                      <a:r>
+                        <a:rPr sz="1100" b="0">
+                          <a:solidFill>
+                            <a:srgbClr val="231F1A"/>
+                          </a:solidFill>
+                          <a:latin typeface="Calibri"/>
+                        </a:rPr>
+                        <a:t>Active Actual records only</a:t>
+                      </a:r>
+                    </a:p>
+                  </a:txBody>
+                  <a:tcPr>
+                    <a:solidFill>
+                      <a:srgbClr val="F7F1E8"/>
+                    </a:solidFill>
+                  </a:tcPr>
+                </a:tc>
+                <a:tc>
+                  <a:txBody>
+                    <a:bodyPr wrap="square"/>
+                    <a:lstStyle/>
+                    <a:p>
+                      <a:r>
+                        <a:rPr sz="1100" b="0">
+                          <a:solidFill>
+                            <a:srgbClr val="231F1A"/>
+                          </a:solidFill>
+                          <a:latin typeface="Calibri"/>
+                        </a:rPr>
+                        <a:t>0 alerts ≠ all-clear</a:t>
+                      </a:r>
+                    </a:p>
+                  </a:txBody>
+                  <a:tcPr>
+                    <a:solidFill>
+                      <a:srgbClr val="F7F1E8"/>
+                    </a:solidFill>
+                  </a:tcPr>
+                </a:tc>
+              </a:tr>
+              <a:tr h="853440">
+                <a:tc>
+                  <a:txBody>
+                    <a:bodyPr wrap="square"/>
+                    <a:lstStyle/>
+                    <a:p>
+                      <a:r>
+                        <a:rPr sz="1100" b="1">
+                          <a:solidFill>
+                            <a:srgbClr val="231F1A"/>
+                          </a:solidFill>
+                          <a:latin typeface="Calibri"/>
+                        </a:rPr>
+                        <a:t>5. Open services</a:t>
+                      </a:r>
+                    </a:p>
+                  </a:txBody>
+                  <a:tcPr>
+                    <a:solidFill>
+                      <a:srgbClr val="FBF7F0"/>
+                    </a:solidFill>
+                  </a:tcPr>
+                </a:tc>
+                <a:tc>
+                  <a:txBody>
+                    <a:bodyPr wrap="square"/>
+                    <a:lstStyle/>
+                    <a:p>
+                      <a:r>
+                        <a:rPr sz="1100" b="0">
+                          <a:solidFill>
+                            <a:srgbClr val="231F1A"/>
+                          </a:solidFill>
+                          <a:latin typeface="Calibri"/>
+                        </a:rPr>
+                        <a:t>Power, water, health, transport</a:t>
+                      </a:r>
+                    </a:p>
+                  </a:txBody>
+                  <a:tcPr>
+                    <a:solidFill>
+                      <a:srgbClr val="FBF7F0"/>
+                    </a:solidFill>
+                  </a:tcPr>
+                </a:tc>
+                <a:tc>
+                  <a:txBody>
+                    <a:bodyPr wrap="square"/>
+                    <a:lstStyle/>
+                    <a:p>
+                      <a:r>
+                        <a:rPr sz="1100" b="0">
+                          <a:solidFill>
+                            <a:srgbClr val="231F1A"/>
+                          </a:solidFill>
+                          <a:latin typeface="Calibri"/>
+                        </a:rPr>
+                        <a:t>Official portal + live vs directory</a:t>
+                      </a:r>
+                    </a:p>
+                  </a:txBody>
+                  <a:tcPr>
+                    <a:solidFill>
+                      <a:srgbClr val="FBF7F0"/>
+                    </a:solidFill>
+                  </a:tcPr>
+                </a:tc>
+                <a:tc>
+                  <a:txBody>
+                    <a:bodyPr wrap="square"/>
+                    <a:lstStyle/>
+                    <a:p>
+                      <a:r>
+                        <a:rPr sz="1100" b="0">
+                          <a:solidFill>
+                            <a:srgbClr val="231F1A"/>
+                          </a:solidFill>
+                          <a:latin typeface="Calibri"/>
+                        </a:rPr>
+                        <a:t>Directory is not a live incident feed</a:t>
+                      </a:r>
+                    </a:p>
+                  </a:txBody>
+                  <a:tcPr>
+                    <a:solidFill>
+                      <a:srgbClr val="FBF7F0"/>
+                    </a:solidFill>
+                  </a:tcPr>
+                </a:tc>
+              </a:tr>
+            </a:tbl>
+          </a:graphicData>
+        </a:graphic>
+      </p:graphicFrame>
     </p:spTree>
   </p:cSld>
   <p:clrMapOvr>
@@ -3585,79 +5464,9 @@
         <p:nvPr/>
       </p:nvGrpSpPr>
       <p:grpSpPr/>
-      <p:sp>
-        <p:nvSpPr>
-          <p:cNvPr id="2" name="TextBox 1"/>
-          <p:cNvSpPr txBox="1"/>
-          <p:nvPr/>
-        </p:nvSpPr>
-        <p:spPr>
-          <a:xfrm>
-            <a:off x="457200" y="228600"/>
-            <a:ext cx="10972800" cy="320040"/>
-          </a:xfrm>
-          <a:prstGeom prst="rect">
-            <a:avLst/>
-          </a:prstGeom>
-          <a:noFill/>
-        </p:spPr>
-        <p:txBody>
-          <a:bodyPr wrap="none">
-            <a:spAutoFit/>
-          </a:bodyPr>
-          <a:lstStyle/>
-          <a:p>
-            <a:pPr algn="l"/>
-            <a:r>
-              <a:rPr sz="1300" b="1">
-                <a:solidFill>
-                  <a:srgbClr val="A44B13"/>
-                </a:solidFill>
-                <a:latin typeface="Calibri"/>
-              </a:rPr>
-              <a:t>LIVE PRODUCT</a:t>
-            </a:r>
-          </a:p>
-        </p:txBody>
-      </p:sp>
-      <p:sp>
-        <p:nvSpPr>
-          <p:cNvPr id="3" name="TextBox 2"/>
-          <p:cNvSpPr txBox="1"/>
-          <p:nvPr/>
-        </p:nvSpPr>
-        <p:spPr>
-          <a:xfrm>
-            <a:off x="457200" y="502920"/>
-            <a:ext cx="10972800" cy="548640"/>
-          </a:xfrm>
-          <a:prstGeom prst="rect">
-            <a:avLst/>
-          </a:prstGeom>
-          <a:noFill/>
-        </p:spPr>
-        <p:txBody>
-          <a:bodyPr wrap="none">
-            <a:spAutoFit/>
-          </a:bodyPr>
-          <a:lstStyle/>
-          <a:p>
-            <a:pPr algn="l"/>
-            <a:r>
-              <a:rPr sz="2600" b="1">
-                <a:solidFill>
-                  <a:srgbClr val="254563"/>
-                </a:solidFill>
-                <a:latin typeface="Calibri"/>
-              </a:rPr>
-              <a:t>Production hub on Cloudflare Workers</a:t>
-            </a:r>
-          </a:p>
-        </p:txBody>
-      </p:sp>
       <p:pic>
         <p:nvPicPr>
-          <p:cNvPr id="4" name="Picture 3" descr="desktop-home.png"/>
+          <p:cNvPr id="2" name="Picture 1" descr="paper-wash.jpg"/>
           <p:cNvPicPr>
             <a:picLocks noChangeAspect="1"/>
           </p:cNvPicPr>
@@ -3671,8 +5480,8 @@
         </p:blipFill>
         <p:spPr>
           <a:xfrm>
-            <a:off x="457200" y="1143000"/>
-            <a:ext cx="11247120" cy="7029450"/>
+            <a:off x="0" y="0"/>
+            <a:ext cx="12191695" cy="6858000"/>
           </a:xfrm>
           <a:prstGeom prst="rect">
             <a:avLst/>
@@ -3681,14 +5490,57 @@
       </p:pic>
       <p:sp>
         <p:nvSpPr>
-          <p:cNvPr id="5" name="TextBox 4"/>
+          <p:cNvPr id="3" name="Rectangle 2"/>
+          <p:cNvSpPr/>
+          <p:nvPr/>
+        </p:nvSpPr>
+        <p:spPr>
+          <a:xfrm>
+            <a:off x="0" y="0"/>
+            <a:ext cx="128016" cy="6858000"/>
+          </a:xfrm>
+          <a:prstGeom prst="rect">
+            <a:avLst/>
+          </a:prstGeom>
+          <a:solidFill>
+            <a:srgbClr val="C56A1A"/>
+          </a:solidFill>
+          <a:ln>
+            <a:noFill/>
+          </a:ln>
+        </p:spPr>
+        <p:style>
+          <a:lnRef idx="1">
+            <a:schemeClr val="accent1"/>
+          </a:lnRef>
+          <a:fillRef idx="3">
+            <a:schemeClr val="accent1"/>
+          </a:fillRef>
+          <a:effectRef idx="2">
+            <a:schemeClr val="accent1"/>
+          </a:effectRef>
+          <a:fontRef idx="minor">
+            <a:schemeClr val="lt1"/>
+          </a:fontRef>
+        </p:style>
+        <p:txBody>
+          <a:bodyPr rtlCol="0" anchor="ctr"/>
+          <a:lstStyle/>
+          <a:p>
+            <a:pPr algn="ctr"/>
+          </a:p>
+        </p:txBody>
+      </p:sp>
+      <p:sp>
+        <p:nvSpPr>
+          <p:cNvPr id="4" name="TextBox 3"/>
           <p:cNvSpPr txBox="1"/>
           <p:nvPr/>
         </p:nvSpPr>
         <p:spPr>
           <a:xfrm>
-            <a:off x="457200" y="6355080"/>
-            <a:ext cx="11247120" cy="365760"/>
+            <a:off x="411480" y="201168"/>
+            <a:ext cx="10972800" cy="256032"/>
           </a:xfrm>
           <a:prstGeom prst="rect">
             <a:avLst/>
@@ -3696,24 +5548,830 @@
           <a:noFill/>
         </p:spPr>
         <p:txBody>
-          <a:bodyPr wrap="none">
+          <a:bodyPr wrap="square">
             <a:spAutoFit/>
           </a:bodyPr>
           <a:lstStyle/>
           <a:p>
             <a:pPr algn="l"/>
             <a:r>
-              <a:rPr sz="1300" b="0">
+              <a:rPr sz="1200" b="1">
                 <a:solidFill>
-                  <a:srgbClr val="58616B"/>
+                  <a:srgbClr val="C56A1A"/>
                 </a:solidFill>
                 <a:latin typeface="Calibri"/>
               </a:rPr>
-              <a:t>https://maharashtra-sachet.mangeshraut712.workers.dev</a:t>
-            </a:r>
-          </a:p>
-        </p:txBody>
-      </p:sp>
+              <a:t>COVERAGE MATRIX</a:t>
+            </a:r>
+          </a:p>
+        </p:txBody>
+      </p:sp>
+      <p:sp>
+        <p:nvSpPr>
+          <p:cNvPr id="5" name="TextBox 4"/>
+          <p:cNvSpPr txBox="1"/>
+          <p:nvPr/>
+        </p:nvSpPr>
+        <p:spPr>
+          <a:xfrm>
+            <a:off x="411480" y="438912"/>
+            <a:ext cx="11338560" cy="640080"/>
+          </a:xfrm>
+          <a:prstGeom prst="rect">
+            <a:avLst/>
+          </a:prstGeom>
+          <a:noFill/>
+        </p:spPr>
+        <p:txBody>
+          <a:bodyPr wrap="square">
+            <a:spAutoFit/>
+          </a:bodyPr>
+          <a:lstStyle/>
+          <a:p>
+            <a:pPr algn="l"/>
+            <a:r>
+              <a:rPr sz="2400" b="1">
+                <a:solidFill>
+                  <a:srgbClr val="254563"/>
+                </a:solidFill>
+                <a:latin typeface="Calibri"/>
+              </a:rPr>
+              <a:t>Five official sources, two intentionally disconnected</a:t>
+            </a:r>
+          </a:p>
+        </p:txBody>
+      </p:sp>
+      <p:sp>
+        <p:nvSpPr>
+          <p:cNvPr id="6" name="TextBox 5"/>
+          <p:cNvSpPr txBox="1"/>
+          <p:nvPr/>
+        </p:nvSpPr>
+        <p:spPr>
+          <a:xfrm>
+            <a:off x="411480" y="6510528"/>
+            <a:ext cx="8229600" cy="237744"/>
+          </a:xfrm>
+          <a:prstGeom prst="rect">
+            <a:avLst/>
+          </a:prstGeom>
+          <a:noFill/>
+        </p:spPr>
+        <p:txBody>
+          <a:bodyPr wrap="square">
+            <a:spAutoFit/>
+          </a:bodyPr>
+          <a:lstStyle/>
+          <a:p>
+            <a:pPr algn="l"/>
+            <a:r>
+              <a:rPr sz="1100" b="0">
+                <a:solidFill>
+                  <a:srgbClr val="5C564C"/>
+                </a:solidFill>
+                <a:latin typeface="Calibri"/>
+              </a:rPr>
+              <a:t>Maharashtra Civic Alerts  ·  Codex Build House Pune</a:t>
+            </a:r>
+          </a:p>
+        </p:txBody>
+      </p:sp>
+      <p:sp>
+        <p:nvSpPr>
+          <p:cNvPr id="7" name="TextBox 6"/>
+          <p:cNvSpPr txBox="1"/>
+          <p:nvPr/>
+        </p:nvSpPr>
+        <p:spPr>
+          <a:xfrm>
+            <a:off x="10332720" y="6510528"/>
+            <a:ext cx="1371600" cy="237744"/>
+          </a:xfrm>
+          <a:prstGeom prst="rect">
+            <a:avLst/>
+          </a:prstGeom>
+          <a:noFill/>
+        </p:spPr>
+        <p:txBody>
+          <a:bodyPr wrap="square">
+            <a:spAutoFit/>
+          </a:bodyPr>
+          <a:lstStyle/>
+          <a:p>
+            <a:pPr algn="r"/>
+            <a:r>
+              <a:rPr sz="1100" b="1">
+                <a:solidFill>
+                  <a:srgbClr val="5C564C"/>
+                </a:solidFill>
+                <a:latin typeface="Calibri"/>
+              </a:rPr>
+              <a:t>4 / 9</a:t>
+            </a:r>
+          </a:p>
+        </p:txBody>
+      </p:sp>
+      <p:graphicFrame>
+        <p:nvGraphicFramePr>
+          <p:cNvPr id="8" name="Table 7"/>
+          <p:cNvGraphicFramePr>
+            <a:graphicFrameLocks noGrp="1"/>
+          </p:cNvGraphicFramePr>
+          <p:nvPr/>
+        </p:nvGraphicFramePr>
+        <p:xfrm>
+          <a:off x="411480" y="1143000"/>
+          <a:ext cx="11384280" cy="5120640"/>
+        </p:xfrm>
+        <a:graphic>
+          <a:graphicData uri="http://schemas.openxmlformats.org/drawingml/2006/table">
+            <a:tbl>
+              <a:tblPr firstRow="1" bandRow="1">
+                <a:tableStyleId>{5C22544A-7EE6-4342-B048-85BDC9FD1C3A}</a:tableStyleId>
+              </a:tblPr>
+              <a:tblGrid>
+                <a:gridCol w="2276856"/>
+                <a:gridCol w="2276856"/>
+                <a:gridCol w="2276856"/>
+                <a:gridCol w="2276856"/>
+                <a:gridCol w="2276856"/>
+              </a:tblGrid>
+              <a:tr h="853440">
+                <a:tc>
+                  <a:txBody>
+                    <a:bodyPr wrap="square"/>
+                    <a:lstStyle/>
+                    <a:p>
+                      <a:r>
+                        <a:rPr sz="1000" b="1">
+                          <a:solidFill>
+                            <a:srgbClr val="254563"/>
+                          </a:solidFill>
+                          <a:latin typeface="Calibri"/>
+                        </a:rPr>
+                        <a:t>Source</a:t>
+                      </a:r>
+                    </a:p>
+                  </a:txBody>
+                  <a:tcPr>
+                    <a:solidFill>
+                      <a:srgbClr val="EFE6D8"/>
+                    </a:solidFill>
+                  </a:tcPr>
+                </a:tc>
+                <a:tc>
+                  <a:txBody>
+                    <a:bodyPr wrap="square"/>
+                    <a:lstStyle/>
+                    <a:p>
+                      <a:r>
+                        <a:rPr sz="1000" b="1">
+                          <a:solidFill>
+                            <a:srgbClr val="254563"/>
+                          </a:solidFill>
+                          <a:latin typeface="Calibri"/>
+                        </a:rPr>
+                        <a:t>Kind</a:t>
+                      </a:r>
+                    </a:p>
+                  </a:txBody>
+                  <a:tcPr>
+                    <a:solidFill>
+                      <a:srgbClr val="EFE6D8"/>
+                    </a:solidFill>
+                  </a:tcPr>
+                </a:tc>
+                <a:tc>
+                  <a:txBody>
+                    <a:bodyPr wrap="square"/>
+                    <a:lstStyle/>
+                    <a:p>
+                      <a:r>
+                        <a:rPr sz="1000" b="1">
+                          <a:solidFill>
+                            <a:srgbClr val="254563"/>
+                          </a:solidFill>
+                          <a:latin typeface="Calibri"/>
+                        </a:rPr>
+                        <a:t>Runtime</a:t>
+                      </a:r>
+                    </a:p>
+                  </a:txBody>
+                  <a:tcPr>
+                    <a:solidFill>
+                      <a:srgbClr val="EFE6D8"/>
+                    </a:solidFill>
+                  </a:tcPr>
+                </a:tc>
+                <a:tc>
+                  <a:txBody>
+                    <a:bodyPr wrap="square"/>
+                    <a:lstStyle/>
+                    <a:p>
+                      <a:r>
+                        <a:rPr sz="1000" b="1">
+                          <a:solidFill>
+                            <a:srgbClr val="254563"/>
+                          </a:solidFill>
+                          <a:latin typeface="Calibri"/>
+                        </a:rPr>
+                        <a:t>What is stored</a:t>
+                      </a:r>
+                    </a:p>
+                  </a:txBody>
+                  <a:tcPr>
+                    <a:solidFill>
+                      <a:srgbClr val="EFE6D8"/>
+                    </a:solidFill>
+                  </a:tcPr>
+                </a:tc>
+                <a:tc>
+                  <a:txBody>
+                    <a:bodyPr wrap="square"/>
+                    <a:lstStyle/>
+                    <a:p>
+                      <a:r>
+                        <a:rPr sz="1000" b="1">
+                          <a:solidFill>
+                            <a:srgbClr val="254563"/>
+                          </a:solidFill>
+                          <a:latin typeface="Calibri"/>
+                        </a:rPr>
+                        <a:t>Resident meaning</a:t>
+                      </a:r>
+                    </a:p>
+                  </a:txBody>
+                  <a:tcPr>
+                    <a:solidFill>
+                      <a:srgbClr val="EFE6D8"/>
+                    </a:solidFill>
+                  </a:tcPr>
+                </a:tc>
+              </a:tr>
+              <a:tr h="853440">
+                <a:tc>
+                  <a:txBody>
+                    <a:bodyPr wrap="square"/>
+                    <a:lstStyle/>
+                    <a:p>
+                      <a:r>
+                        <a:rPr sz="1100" b="1">
+                          <a:solidFill>
+                            <a:srgbClr val="231F1A"/>
+                          </a:solidFill>
+                          <a:latin typeface="Calibri"/>
+                        </a:rPr>
+                        <a:t>SACHET / NDMA CAP</a:t>
+                      </a:r>
+                    </a:p>
+                  </a:txBody>
+                  <a:tcPr>
+                    <a:solidFill>
+                      <a:srgbClr val="FBF7F0"/>
+                    </a:solidFill>
+                  </a:tcPr>
+                </a:tc>
+                <a:tc>
+                  <a:txBody>
+                    <a:bodyPr wrap="square"/>
+                    <a:lstStyle/>
+                    <a:p>
+                      <a:r>
+                        <a:rPr sz="1100" b="0">
+                          <a:solidFill>
+                            <a:srgbClr val="231F1A"/>
+                          </a:solidFill>
+                          <a:latin typeface="Calibri"/>
+                        </a:rPr>
+                        <a:t>Public warnings</a:t>
+                      </a:r>
+                    </a:p>
+                  </a:txBody>
+                  <a:tcPr>
+                    <a:solidFill>
+                      <a:srgbClr val="FBF7F0"/>
+                    </a:solidFill>
+                  </a:tcPr>
+                </a:tc>
+                <a:tc>
+                  <a:txBody>
+                    <a:bodyPr wrap="square"/>
+                    <a:lstStyle/>
+                    <a:p>
+                      <a:r>
+                        <a:rPr sz="1100" b="0">
+                          <a:solidFill>
+                            <a:srgbClr val="231F1A"/>
+                          </a:solidFill>
+                          <a:latin typeface="Calibri"/>
+                        </a:rPr>
+                        <a:t>Connected</a:t>
+                      </a:r>
+                    </a:p>
+                  </a:txBody>
+                  <a:tcPr>
+                    <a:solidFill>
+                      <a:srgbClr val="FBF7F0"/>
+                    </a:solidFill>
+                  </a:tcPr>
+                </a:tc>
+                <a:tc>
+                  <a:txBody>
+                    <a:bodyPr wrap="square"/>
+                    <a:lstStyle/>
+                    <a:p>
+                      <a:r>
+                        <a:rPr sz="1100" b="0">
+                          <a:solidFill>
+                            <a:srgbClr val="231F1A"/>
+                          </a:solidFill>
+                          <a:latin typeface="Calibri"/>
+                        </a:rPr>
+                        <a:t>CAP lifecycle + retained cancels</a:t>
+                      </a:r>
+                    </a:p>
+                  </a:txBody>
+                  <a:tcPr>
+                    <a:solidFill>
+                      <a:srgbClr val="FBF7F0"/>
+                    </a:solidFill>
+                  </a:tcPr>
+                </a:tc>
+                <a:tc>
+                  <a:txBody>
+                    <a:bodyPr wrap="square"/>
+                    <a:lstStyle/>
+                    <a:p>
+                      <a:r>
+                        <a:rPr sz="1100" b="0">
+                          <a:solidFill>
+                            <a:srgbClr val="231F1A"/>
+                          </a:solidFill>
+                          <a:latin typeface="Calibri"/>
+                        </a:rPr>
+                        <a:t>Primary official bulletin</a:t>
+                      </a:r>
+                    </a:p>
+                  </a:txBody>
+                  <a:tcPr>
+                    <a:solidFill>
+                      <a:srgbClr val="FBF7F0"/>
+                    </a:solidFill>
+                  </a:tcPr>
+                </a:tc>
+              </a:tr>
+              <a:tr h="853440">
+                <a:tc>
+                  <a:txBody>
+                    <a:bodyPr wrap="square"/>
+                    <a:lstStyle/>
+                    <a:p>
+                      <a:r>
+                        <a:rPr sz="1100" b="1">
+                          <a:solidFill>
+                            <a:srgbClr val="231F1A"/>
+                          </a:solidFill>
+                          <a:latin typeface="Calibri"/>
+                        </a:rPr>
+                        <a:t>IMD</a:t>
+                      </a:r>
+                    </a:p>
+                  </a:txBody>
+                  <a:tcPr>
+                    <a:solidFill>
+                      <a:srgbClr val="F7F1E8"/>
+                    </a:solidFill>
+                  </a:tcPr>
+                </a:tc>
+                <a:tc>
+                  <a:txBody>
+                    <a:bodyPr wrap="square"/>
+                    <a:lstStyle/>
+                    <a:p>
+                      <a:r>
+                        <a:rPr sz="1100" b="0">
+                          <a:solidFill>
+                            <a:srgbClr val="231F1A"/>
+                          </a:solidFill>
+                          <a:latin typeface="Calibri"/>
+                        </a:rPr>
+                        <a:t>Weather notices</a:t>
+                      </a:r>
+                    </a:p>
+                  </a:txBody>
+                  <a:tcPr>
+                    <a:solidFill>
+                      <a:srgbClr val="F7F1E8"/>
+                    </a:solidFill>
+                  </a:tcPr>
+                </a:tc>
+                <a:tc>
+                  <a:txBody>
+                    <a:bodyPr wrap="square"/>
+                    <a:lstStyle/>
+                    <a:p>
+                      <a:r>
+                        <a:rPr sz="1100" b="0">
+                          <a:solidFill>
+                            <a:srgbClr val="231F1A"/>
+                          </a:solidFill>
+                          <a:latin typeface="Calibri"/>
+                        </a:rPr>
+                        <a:t>Connected</a:t>
+                      </a:r>
+                    </a:p>
+                  </a:txBody>
+                  <a:tcPr>
+                    <a:solidFill>
+                      <a:srgbClr val="F7F1E8"/>
+                    </a:solidFill>
+                  </a:tcPr>
+                </a:tc>
+                <a:tc>
+                  <a:txBody>
+                    <a:bodyPr wrap="square"/>
+                    <a:lstStyle/>
+                    <a:p>
+                      <a:r>
+                        <a:rPr sz="1100" b="0">
+                          <a:solidFill>
+                            <a:srgbClr val="231F1A"/>
+                          </a:solidFill>
+                          <a:latin typeface="Calibri"/>
+                        </a:rPr>
+                        <a:t>Official text only</a:t>
+                      </a:r>
+                    </a:p>
+                  </a:txBody>
+                  <a:tcPr>
+                    <a:solidFill>
+                      <a:srgbClr val="F7F1E8"/>
+                    </a:solidFill>
+                  </a:tcPr>
+                </a:tc>
+                <a:tc>
+                  <a:txBody>
+                    <a:bodyPr wrap="square"/>
+                    <a:lstStyle/>
+                    <a:p>
+                      <a:r>
+                        <a:rPr sz="1100" b="0">
+                          <a:solidFill>
+                            <a:srgbClr val="231F1A"/>
+                          </a:solidFill>
+                          <a:latin typeface="Calibri"/>
+                        </a:rPr>
+                        <a:t>No invented severity</a:t>
+                      </a:r>
+                    </a:p>
+                  </a:txBody>
+                  <a:tcPr>
+                    <a:solidFill>
+                      <a:srgbClr val="F7F1E8"/>
+                    </a:solidFill>
+                  </a:tcPr>
+                </a:tc>
+              </a:tr>
+              <a:tr h="853440">
+                <a:tc>
+                  <a:txBody>
+                    <a:bodyPr wrap="square"/>
+                    <a:lstStyle/>
+                    <a:p>
+                      <a:r>
+                        <a:rPr sz="1100" b="1">
+                          <a:solidFill>
+                            <a:srgbClr val="231F1A"/>
+                          </a:solidFill>
+                          <a:latin typeface="Calibri"/>
+                        </a:rPr>
+                        <a:t>INCOIS</a:t>
+                      </a:r>
+                    </a:p>
+                  </a:txBody>
+                  <a:tcPr>
+                    <a:solidFill>
+                      <a:srgbClr val="FBF7F0"/>
+                    </a:solidFill>
+                  </a:tcPr>
+                </a:tc>
+                <a:tc>
+                  <a:txBody>
+                    <a:bodyPr wrap="square"/>
+                    <a:lstStyle/>
+                    <a:p>
+                      <a:r>
+                        <a:rPr sz="1100" b="0">
+                          <a:solidFill>
+                            <a:srgbClr val="231F1A"/>
+                          </a:solidFill>
+                          <a:latin typeface="Calibri"/>
+                        </a:rPr>
+                        <a:t>Ocean / quake</a:t>
+                      </a:r>
+                    </a:p>
+                  </a:txBody>
+                  <a:tcPr>
+                    <a:solidFill>
+                      <a:srgbClr val="FBF7F0"/>
+                    </a:solidFill>
+                  </a:tcPr>
+                </a:tc>
+                <a:tc>
+                  <a:txBody>
+                    <a:bodyPr wrap="square"/>
+                    <a:lstStyle/>
+                    <a:p>
+                      <a:r>
+                        <a:rPr sz="1100" b="0">
+                          <a:solidFill>
+                            <a:srgbClr val="231F1A"/>
+                          </a:solidFill>
+                          <a:latin typeface="Calibri"/>
+                        </a:rPr>
+                        <a:t>Connected</a:t>
+                      </a:r>
+                    </a:p>
+                  </a:txBody>
+                  <a:tcPr>
+                    <a:solidFill>
+                      <a:srgbClr val="FBF7F0"/>
+                    </a:solidFill>
+                  </a:tcPr>
+                </a:tc>
+                <a:tc>
+                  <a:txBody>
+                    <a:bodyPr wrap="square"/>
+                    <a:lstStyle/>
+                    <a:p>
+                      <a:r>
+                        <a:rPr sz="1100" b="0">
+                          <a:solidFill>
+                            <a:srgbClr val="231F1A"/>
+                          </a:solidFill>
+                          <a:latin typeface="Calibri"/>
+                        </a:rPr>
+                        <a:t>Arabian Sea relevant events</a:t>
+                      </a:r>
+                    </a:p>
+                  </a:txBody>
+                  <a:tcPr>
+                    <a:solidFill>
+                      <a:srgbClr val="FBF7F0"/>
+                    </a:solidFill>
+                  </a:tcPr>
+                </a:tc>
+                <a:tc>
+                  <a:txBody>
+                    <a:bodyPr wrap="square"/>
+                    <a:lstStyle/>
+                    <a:p>
+                      <a:r>
+                        <a:rPr sz="1100" b="0">
+                          <a:solidFill>
+                            <a:srgbClr val="231F1A"/>
+                          </a:solidFill>
+                          <a:latin typeface="Calibri"/>
+                        </a:rPr>
+                        <a:t>Pacific quakes excluded</a:t>
+                      </a:r>
+                    </a:p>
+                  </a:txBody>
+                  <a:tcPr>
+                    <a:solidFill>
+                      <a:srgbClr val="FBF7F0"/>
+                    </a:solidFill>
+                  </a:tcPr>
+                </a:tc>
+              </a:tr>
+              <a:tr h="853440">
+                <a:tc>
+                  <a:txBody>
+                    <a:bodyPr wrap="square"/>
+                    <a:lstStyle/>
+                    <a:p>
+                      <a:r>
+                        <a:rPr sz="1100" b="1">
+                          <a:solidFill>
+                            <a:srgbClr val="231F1A"/>
+                          </a:solidFill>
+                          <a:latin typeface="Calibri"/>
+                        </a:rPr>
+                        <a:t>CWC FloodWatch</a:t>
+                      </a:r>
+                    </a:p>
+                  </a:txBody>
+                  <a:tcPr>
+                    <a:solidFill>
+                      <a:srgbClr val="F7F1E8"/>
+                    </a:solidFill>
+                  </a:tcPr>
+                </a:tc>
+                <a:tc>
+                  <a:txBody>
+                    <a:bodyPr wrap="square"/>
+                    <a:lstStyle/>
+                    <a:p>
+                      <a:r>
+                        <a:rPr sz="1100" b="0">
+                          <a:solidFill>
+                            <a:srgbClr val="231F1A"/>
+                          </a:solidFill>
+                          <a:latin typeface="Calibri"/>
+                        </a:rPr>
+                        <a:t>Flood</a:t>
+                      </a:r>
+                    </a:p>
+                  </a:txBody>
+                  <a:tcPr>
+                    <a:solidFill>
+                      <a:srgbClr val="F7F1E8"/>
+                    </a:solidFill>
+                  </a:tcPr>
+                </a:tc>
+                <a:tc>
+                  <a:txBody>
+                    <a:bodyPr wrap="square"/>
+                    <a:lstStyle/>
+                    <a:p>
+                      <a:r>
+                        <a:rPr sz="1100" b="0">
+                          <a:solidFill>
+                            <a:srgbClr val="231F1A"/>
+                          </a:solidFill>
+                          <a:latin typeface="Calibri"/>
+                        </a:rPr>
+                        <a:t>Disabled</a:t>
+                      </a:r>
+                    </a:p>
+                  </a:txBody>
+                  <a:tcPr>
+                    <a:solidFill>
+                      <a:srgbClr val="F7F1E8"/>
+                    </a:solidFill>
+                  </a:tcPr>
+                </a:tc>
+                <a:tc>
+                  <a:txBody>
+                    <a:bodyPr wrap="square"/>
+                    <a:lstStyle/>
+                    <a:p>
+                      <a:r>
+                        <a:rPr sz="1100" b="0">
+                          <a:solidFill>
+                            <a:srgbClr val="231F1A"/>
+                          </a:solidFill>
+                          <a:latin typeface="Calibri"/>
+                        </a:rPr>
+                        <a:t>No adapter</a:t>
+                      </a:r>
+                    </a:p>
+                  </a:txBody>
+                  <a:tcPr>
+                    <a:solidFill>
+                      <a:srgbClr val="F7F1E8"/>
+                    </a:solidFill>
+                  </a:tcPr>
+                </a:tc>
+                <a:tc>
+                  <a:txBody>
+                    <a:bodyPr wrap="square"/>
+                    <a:lstStyle/>
+                    <a:p>
+                      <a:r>
+                        <a:rPr sz="1100" b="0">
+                          <a:solidFill>
+                            <a:srgbClr val="231F1A"/>
+                          </a:solidFill>
+                          <a:latin typeface="Calibri"/>
+                        </a:rPr>
+                        <a:t>Use official directory</a:t>
+                      </a:r>
+                    </a:p>
+                  </a:txBody>
+                  <a:tcPr>
+                    <a:solidFill>
+                      <a:srgbClr val="F7F1E8"/>
+                    </a:solidFill>
+                  </a:tcPr>
+                </a:tc>
+              </a:tr>
+              <a:tr h="853440">
+                <a:tc>
+                  <a:txBody>
+                    <a:bodyPr wrap="square"/>
+                    <a:lstStyle/>
+                    <a:p>
+                      <a:r>
+                        <a:rPr sz="1100" b="1">
+                          <a:solidFill>
+                            <a:srgbClr val="231F1A"/>
+                          </a:solidFill>
+                          <a:latin typeface="Calibri"/>
+                        </a:rPr>
+                        <a:t>CPCB AQI</a:t>
+                      </a:r>
+                    </a:p>
+                  </a:txBody>
+                  <a:tcPr>
+                    <a:solidFill>
+                      <a:srgbClr val="FBF7F0"/>
+                    </a:solidFill>
+                  </a:tcPr>
+                </a:tc>
+                <a:tc>
+                  <a:txBody>
+                    <a:bodyPr wrap="square"/>
+                    <a:lstStyle/>
+                    <a:p>
+                      <a:r>
+                        <a:rPr sz="1100" b="0">
+                          <a:solidFill>
+                            <a:srgbClr val="231F1A"/>
+                          </a:solidFill>
+                          <a:latin typeface="Calibri"/>
+                        </a:rPr>
+                        <a:t>Air quality</a:t>
+                      </a:r>
+                    </a:p>
+                  </a:txBody>
+                  <a:tcPr>
+                    <a:solidFill>
+                      <a:srgbClr val="FBF7F0"/>
+                    </a:solidFill>
+                  </a:tcPr>
+                </a:tc>
+                <a:tc>
+                  <a:txBody>
+                    <a:bodyPr wrap="square"/>
+                    <a:lstStyle/>
+                    <a:p>
+                      <a:r>
+                        <a:rPr sz="1100" b="0">
+                          <a:solidFill>
+                            <a:srgbClr val="231F1A"/>
+                          </a:solidFill>
+                          <a:latin typeface="Calibri"/>
+                        </a:rPr>
+                        <a:t>Disabled</a:t>
+                      </a:r>
+                    </a:p>
+                  </a:txBody>
+                  <a:tcPr>
+                    <a:solidFill>
+                      <a:srgbClr val="FBF7F0"/>
+                    </a:solidFill>
+                  </a:tcPr>
+                </a:tc>
+                <a:tc>
+                  <a:txBody>
+                    <a:bodyPr wrap="square"/>
+                    <a:lstStyle/>
+                    <a:p>
+                      <a:r>
+                        <a:rPr sz="1100" b="0">
+                          <a:solidFill>
+                            <a:srgbClr val="231F1A"/>
+                          </a:solidFill>
+                          <a:latin typeface="Calibri"/>
+                        </a:rPr>
+                        <a:t>No key / not enabled</a:t>
+                      </a:r>
+                    </a:p>
+                  </a:txBody>
+                  <a:tcPr>
+                    <a:solidFill>
+                      <a:srgbClr val="FBF7F0"/>
+                    </a:solidFill>
+                  </a:tcPr>
+                </a:tc>
+                <a:tc>
+                  <a:txBody>
+                    <a:bodyPr wrap="square"/>
+                    <a:lstStyle/>
+                    <a:p>
+                      <a:r>
+                        <a:rPr sz="1100" b="0">
+                          <a:solidFill>
+                            <a:srgbClr val="231F1A"/>
+                          </a:solidFill>
+                          <a:latin typeface="Calibri"/>
+                        </a:rPr>
+                        <a:t>Concentration ≠ AQI warning</a:t>
+                      </a:r>
+                    </a:p>
+                  </a:txBody>
+                  <a:tcPr>
+                    <a:solidFill>
+                      <a:srgbClr val="FBF7F0"/>
+                    </a:solidFill>
+                  </a:tcPr>
+                </a:tc>
+              </a:tr>
+            </a:tbl>
+          </a:graphicData>
+        </a:graphic>
+      </p:graphicFrame>
     </p:spTree>
   </p:cSld>
   <p:clrMapOvr>
@@ -3732,79 +6390,9 @@
         <p:nvPr/>
       </p:nvGrpSpPr>
       <p:grpSpPr/>
-      <p:sp>
-        <p:nvSpPr>
-          <p:cNvPr id="2" name="TextBox 1"/>
-          <p:cNvSpPr txBox="1"/>
-          <p:nvPr/>
-        </p:nvSpPr>
-        <p:spPr>
-          <a:xfrm>
-            <a:off x="457200" y="228600"/>
-            <a:ext cx="10972800" cy="320040"/>
-          </a:xfrm>
-          <a:prstGeom prst="rect">
-            <a:avLst/>
-          </a:prstGeom>
-          <a:noFill/>
-        </p:spPr>
-        <p:txBody>
-          <a:bodyPr wrap="none">
-            <a:spAutoFit/>
-          </a:bodyPr>
-          <a:lstStyle/>
-          <a:p>
-            <a:pPr algn="l"/>
-            <a:r>
-              <a:rPr sz="1300" b="1">
-                <a:solidFill>
-                  <a:srgbClr val="A44B13"/>
-                </a:solidFill>
-                <a:latin typeface="Calibri"/>
-              </a:rPr>
-              <a:t>SEARCH HONESTY</a:t>
-            </a:r>
-          </a:p>
-        </p:txBody>
-      </p:sp>
-      <p:sp>
-        <p:nvSpPr>
-          <p:cNvPr id="3" name="TextBox 2"/>
-          <p:cNvSpPr txBox="1"/>
-          <p:nvPr/>
-        </p:nvSpPr>
-        <p:spPr>
-          <a:xfrm>
-            <a:off x="457200" y="502920"/>
-            <a:ext cx="10972800" cy="548640"/>
-          </a:xfrm>
-          <a:prstGeom prst="rect">
-            <a:avLst/>
-          </a:prstGeom>
-          <a:noFill/>
-        </p:spPr>
-        <p:txBody>
-          <a:bodyPr wrap="none">
-            <a:spAutoFit/>
-          </a:bodyPr>
-          <a:lstStyle/>
-          <a:p>
-            <a:pPr algn="l"/>
-            <a:r>
-              <a:rPr sz="2600" b="1">
-                <a:solidFill>
-                  <a:srgbClr val="254563"/>
-                </a:solidFill>
-                <a:latin typeface="Calibri"/>
-              </a:rPr>
-              <a:t>Places map to districts, not invented village polygons</a:t>
-            </a:r>
-          </a:p>
-        </p:txBody>
-      </p:sp>
       <p:pic>
         <p:nvPicPr>
-          <p:cNvPr id="4" name="Picture 3" descr="desktop-search-navi-mumbai.png"/>
+          <p:cNvPr id="2" name="Picture 1" descr="paper-wash.jpg"/>
           <p:cNvPicPr>
             <a:picLocks noChangeAspect="1"/>
           </p:cNvPicPr>
@@ -3818,8 +6406,8 @@
         </p:blipFill>
         <p:spPr>
           <a:xfrm>
-            <a:off x="457200" y="1143000"/>
-            <a:ext cx="11247120" cy="7029450"/>
+            <a:off x="0" y="0"/>
+            <a:ext cx="12191695" cy="6858000"/>
           </a:xfrm>
           <a:prstGeom prst="rect">
             <a:avLst/>
@@ -3828,14 +6416,57 @@
       </p:pic>
       <p:sp>
         <p:nvSpPr>
-          <p:cNvPr id="5" name="TextBox 4"/>
+          <p:cNvPr id="3" name="Rectangle 2"/>
+          <p:cNvSpPr/>
+          <p:nvPr/>
+        </p:nvSpPr>
+        <p:spPr>
+          <a:xfrm>
+            <a:off x="0" y="0"/>
+            <a:ext cx="128016" cy="6858000"/>
+          </a:xfrm>
+          <a:prstGeom prst="rect">
+            <a:avLst/>
+          </a:prstGeom>
+          <a:solidFill>
+            <a:srgbClr val="C56A1A"/>
+          </a:solidFill>
+          <a:ln>
+            <a:noFill/>
+          </a:ln>
+        </p:spPr>
+        <p:style>
+          <a:lnRef idx="1">
+            <a:schemeClr val="accent1"/>
+          </a:lnRef>
+          <a:fillRef idx="3">
+            <a:schemeClr val="accent1"/>
+          </a:fillRef>
+          <a:effectRef idx="2">
+            <a:schemeClr val="accent1"/>
+          </a:effectRef>
+          <a:fontRef idx="minor">
+            <a:schemeClr val="lt1"/>
+          </a:fontRef>
+        </p:style>
+        <p:txBody>
+          <a:bodyPr rtlCol="0" anchor="ctr"/>
+          <a:lstStyle/>
+          <a:p>
+            <a:pPr algn="ctr"/>
+          </a:p>
+        </p:txBody>
+      </p:sp>
+      <p:sp>
+        <p:nvSpPr>
+          <p:cNvPr id="4" name="TextBox 3"/>
           <p:cNvSpPr txBox="1"/>
           <p:nvPr/>
         </p:nvSpPr>
         <p:spPr>
           <a:xfrm>
-            <a:off x="457200" y="6355080"/>
-            <a:ext cx="11247120" cy="365760"/>
+            <a:off x="411480" y="201168"/>
+            <a:ext cx="10972800" cy="256032"/>
           </a:xfrm>
           <a:prstGeom prst="rect">
             <a:avLst/>
@@ -3843,24 +6474,477 @@
           <a:noFill/>
         </p:spPr>
         <p:txBody>
-          <a:bodyPr wrap="none">
+          <a:bodyPr wrap="square">
             <a:spAutoFit/>
           </a:bodyPr>
           <a:lstStyle/>
           <a:p>
             <a:pPr algn="l"/>
             <a:r>
-              <a:rPr sz="1300" b="0">
+              <a:rPr sz="1200" b="1">
                 <a:solidFill>
-                  <a:srgbClr val="58616B"/>
+                  <a:srgbClr val="C56A1A"/>
                 </a:solidFill>
                 <a:latin typeface="Calibri"/>
               </a:rPr>
-              <a:t>Navi Mumbai returns separate Raigad and Thane candidates.</a:t>
-            </a:r>
-          </a:p>
-        </p:txBody>
-      </p:sp>
+              <a:t>OPERATING MODEL</a:t>
+            </a:r>
+          </a:p>
+        </p:txBody>
+      </p:sp>
+      <p:sp>
+        <p:nvSpPr>
+          <p:cNvPr id="5" name="TextBox 4"/>
+          <p:cNvSpPr txBox="1"/>
+          <p:nvPr/>
+        </p:nvSpPr>
+        <p:spPr>
+          <a:xfrm>
+            <a:off x="411480" y="438912"/>
+            <a:ext cx="11338560" cy="640080"/>
+          </a:xfrm>
+          <a:prstGeom prst="rect">
+            <a:avLst/>
+          </a:prstGeom>
+          <a:noFill/>
+        </p:spPr>
+        <p:txBody>
+          <a:bodyPr wrap="square">
+            <a:spAutoFit/>
+          </a:bodyPr>
+          <a:lstStyle/>
+          <a:p>
+            <a:pPr algn="l"/>
+            <a:r>
+              <a:rPr sz="2400" b="1">
+                <a:solidFill>
+                  <a:srgbClr val="254563"/>
+                </a:solidFill>
+                <a:latin typeface="Calibri"/>
+              </a:rPr>
+              <a:t>Read-only relay: collect, retain, expire, never invent</a:t>
+            </a:r>
+          </a:p>
+        </p:txBody>
+      </p:sp>
+      <p:sp>
+        <p:nvSpPr>
+          <p:cNvPr id="6" name="TextBox 5"/>
+          <p:cNvSpPr txBox="1"/>
+          <p:nvPr/>
+        </p:nvSpPr>
+        <p:spPr>
+          <a:xfrm>
+            <a:off x="411480" y="6510528"/>
+            <a:ext cx="8229600" cy="237744"/>
+          </a:xfrm>
+          <a:prstGeom prst="rect">
+            <a:avLst/>
+          </a:prstGeom>
+          <a:noFill/>
+        </p:spPr>
+        <p:txBody>
+          <a:bodyPr wrap="square">
+            <a:spAutoFit/>
+          </a:bodyPr>
+          <a:lstStyle/>
+          <a:p>
+            <a:pPr algn="l"/>
+            <a:r>
+              <a:rPr sz="1100" b="0">
+                <a:solidFill>
+                  <a:srgbClr val="5C564C"/>
+                </a:solidFill>
+                <a:latin typeface="Calibri"/>
+              </a:rPr>
+              <a:t>Maharashtra Civic Alerts  ·  Codex Build House Pune</a:t>
+            </a:r>
+          </a:p>
+        </p:txBody>
+      </p:sp>
+      <p:sp>
+        <p:nvSpPr>
+          <p:cNvPr id="7" name="TextBox 6"/>
+          <p:cNvSpPr txBox="1"/>
+          <p:nvPr/>
+        </p:nvSpPr>
+        <p:spPr>
+          <a:xfrm>
+            <a:off x="10332720" y="6510528"/>
+            <a:ext cx="1371600" cy="237744"/>
+          </a:xfrm>
+          <a:prstGeom prst="rect">
+            <a:avLst/>
+          </a:prstGeom>
+          <a:noFill/>
+        </p:spPr>
+        <p:txBody>
+          <a:bodyPr wrap="square">
+            <a:spAutoFit/>
+          </a:bodyPr>
+          <a:lstStyle/>
+          <a:p>
+            <a:pPr algn="r"/>
+            <a:r>
+              <a:rPr sz="1100" b="1">
+                <a:solidFill>
+                  <a:srgbClr val="5C564C"/>
+                </a:solidFill>
+                <a:latin typeface="Calibri"/>
+              </a:rPr>
+              <a:t>5 / 9</a:t>
+            </a:r>
+          </a:p>
+        </p:txBody>
+      </p:sp>
+      <p:graphicFrame>
+        <p:nvGraphicFramePr>
+          <p:cNvPr id="8" name="Table 7"/>
+          <p:cNvGraphicFramePr>
+            <a:graphicFrameLocks noGrp="1"/>
+          </p:cNvGraphicFramePr>
+          <p:nvPr/>
+        </p:nvGraphicFramePr>
+        <p:xfrm>
+          <a:off x="411480" y="1143000"/>
+          <a:ext cx="11384280" cy="5120640"/>
+        </p:xfrm>
+        <a:graphic>
+          <a:graphicData uri="http://schemas.openxmlformats.org/drawingml/2006/table">
+            <a:tbl>
+              <a:tblPr firstRow="1" bandRow="1">
+                <a:tableStyleId>{5C22544A-7EE6-4342-B048-85BDC9FD1C3A}</a:tableStyleId>
+              </a:tblPr>
+              <a:tblGrid>
+                <a:gridCol w="5692140"/>
+                <a:gridCol w="5692140"/>
+              </a:tblGrid>
+              <a:tr h="731520">
+                <a:tc>
+                  <a:txBody>
+                    <a:bodyPr wrap="square"/>
+                    <a:lstStyle/>
+                    <a:p>
+                      <a:r>
+                        <a:rPr sz="1000" b="1">
+                          <a:solidFill>
+                            <a:srgbClr val="254563"/>
+                          </a:solidFill>
+                          <a:latin typeface="Calibri"/>
+                        </a:rPr>
+                        <a:t>Stage</a:t>
+                      </a:r>
+                    </a:p>
+                  </a:txBody>
+                  <a:tcPr>
+                    <a:solidFill>
+                      <a:srgbClr val="EFE6D8"/>
+                    </a:solidFill>
+                  </a:tcPr>
+                </a:tc>
+                <a:tc>
+                  <a:txBody>
+                    <a:bodyPr wrap="square"/>
+                    <a:lstStyle/>
+                    <a:p>
+                      <a:r>
+                        <a:rPr sz="1000" b="1">
+                          <a:solidFill>
+                            <a:srgbClr val="254563"/>
+                          </a:solidFill>
+                          <a:latin typeface="Calibri"/>
+                        </a:rPr>
+                        <a:t>Rule</a:t>
+                      </a:r>
+                    </a:p>
+                  </a:txBody>
+                  <a:tcPr>
+                    <a:solidFill>
+                      <a:srgbClr val="EFE6D8"/>
+                    </a:solidFill>
+                  </a:tcPr>
+                </a:tc>
+              </a:tr>
+              <a:tr h="731520">
+                <a:tc>
+                  <a:txBody>
+                    <a:bodyPr wrap="square"/>
+                    <a:lstStyle/>
+                    <a:p>
+                      <a:r>
+                        <a:rPr sz="1100" b="1">
+                          <a:solidFill>
+                            <a:srgbClr val="231F1A"/>
+                          </a:solidFill>
+                          <a:latin typeface="Calibri"/>
+                        </a:rPr>
+                        <a:t>01 Cron + heal-on-read</a:t>
+                      </a:r>
+                    </a:p>
+                  </a:txBody>
+                  <a:tcPr>
+                    <a:solidFill>
+                      <a:srgbClr val="FBF7F0"/>
+                    </a:solidFill>
+                  </a:tcPr>
+                </a:tc>
+                <a:tc>
+                  <a:txBody>
+                    <a:bodyPr wrap="square"/>
+                    <a:lstStyle/>
+                    <a:p>
+                      <a:r>
+                        <a:rPr sz="1100" b="0">
+                          <a:solidFill>
+                            <a:srgbClr val="231F1A"/>
+                          </a:solidFill>
+                          <a:latin typeface="Calibri"/>
+                        </a:rPr>
+                        <a:t>Every minute; recovery if enabled sources older than 5 minutes; 60s cooldown</a:t>
+                      </a:r>
+                    </a:p>
+                  </a:txBody>
+                  <a:tcPr>
+                    <a:solidFill>
+                      <a:srgbClr val="FBF7F0"/>
+                    </a:solidFill>
+                  </a:tcPr>
+                </a:tc>
+              </a:tr>
+              <a:tr h="731520">
+                <a:tc>
+                  <a:txBody>
+                    <a:bodyPr wrap="square"/>
+                    <a:lstStyle/>
+                    <a:p>
+                      <a:r>
+                        <a:rPr sz="1100" b="1">
+                          <a:solidFill>
+                            <a:srgbClr val="231F1A"/>
+                          </a:solidFill>
+                          <a:latin typeface="Calibri"/>
+                        </a:rPr>
+                        <a:t>02 Collectors</a:t>
+                      </a:r>
+                    </a:p>
+                  </a:txBody>
+                  <a:tcPr>
+                    <a:solidFill>
+                      <a:srgbClr val="F7F1E8"/>
+                    </a:solidFill>
+                  </a:tcPr>
+                </a:tc>
+                <a:tc>
+                  <a:txBody>
+                    <a:bodyPr wrap="square"/>
+                    <a:lstStyle/>
+                    <a:p>
+                      <a:r>
+                        <a:rPr sz="1100" b="0">
+                          <a:solidFill>
+                            <a:srgbClr val="231F1A"/>
+                          </a:solidFill>
+                          <a:latin typeface="Calibri"/>
+                        </a:rPr>
+                        <a:t>Bounded byte/time limits, TLS allowlist, token-owned D1 lease</a:t>
+                      </a:r>
+                    </a:p>
+                  </a:txBody>
+                  <a:tcPr>
+                    <a:solidFill>
+                      <a:srgbClr val="F7F1E8"/>
+                    </a:solidFill>
+                  </a:tcPr>
+                </a:tc>
+              </a:tr>
+              <a:tr h="731520">
+                <a:tc>
+                  <a:txBody>
+                    <a:bodyPr wrap="square"/>
+                    <a:lstStyle/>
+                    <a:p>
+                      <a:r>
+                        <a:rPr sz="1100" b="1">
+                          <a:solidFill>
+                            <a:srgbClr val="231F1A"/>
+                          </a:solidFill>
+                          <a:latin typeface="Calibri"/>
+                        </a:rPr>
+                        <a:t>03 CAP lifecycle</a:t>
+                      </a:r>
+                    </a:p>
+                  </a:txBody>
+                  <a:tcPr>
+                    <a:solidFill>
+                      <a:srgbClr val="FBF7F0"/>
+                    </a:solidFill>
+                  </a:tcPr>
+                </a:tc>
+                <a:tc>
+                  <a:txBody>
+                    <a:bodyPr wrap="square"/>
+                    <a:lstStyle/>
+                    <a:p>
+                      <a:r>
+                        <a:rPr sz="1100" b="0">
+                          <a:solidFill>
+                            <a:srgbClr val="231F1A"/>
+                          </a:solidFill>
+                          <a:latin typeface="Calibri"/>
+                        </a:rPr>
+                        <a:t>Actual / Update / Cancel / expiry retained so old warnings die</a:t>
+                      </a:r>
+                    </a:p>
+                  </a:txBody>
+                  <a:tcPr>
+                    <a:solidFill>
+                      <a:srgbClr val="FBF7F0"/>
+                    </a:solidFill>
+                  </a:tcPr>
+                </a:tc>
+              </a:tr>
+              <a:tr h="731520">
+                <a:tc>
+                  <a:txBody>
+                    <a:bodyPr wrap="square"/>
+                    <a:lstStyle/>
+                    <a:p>
+                      <a:r>
+                        <a:rPr sz="1100" b="1">
+                          <a:solidFill>
+                            <a:srgbClr val="231F1A"/>
+                          </a:solidFill>
+                          <a:latin typeface="Calibri"/>
+                        </a:rPr>
+                        <a:t>04 Public API</a:t>
+                      </a:r>
+                    </a:p>
+                  </a:txBody>
+                  <a:tcPr>
+                    <a:solidFill>
+                      <a:srgbClr val="F7F1E8"/>
+                    </a:solidFill>
+                  </a:tcPr>
+                </a:tc>
+                <a:tc>
+                  <a:txBody>
+                    <a:bodyPr wrap="square"/>
+                    <a:lstStyle/>
+                    <a:p>
+                      <a:r>
+                        <a:rPr sz="1100" b="0">
+                          <a:solidFill>
+                            <a:srgbClr val="231F1A"/>
+                          </a:solidFill>
+                          <a:latin typeface="Calibri"/>
+                        </a:rPr>
+                        <a:t>GET only. No refresh POST. Demo mutation routes return 405 in production</a:t>
+                      </a:r>
+                    </a:p>
+                  </a:txBody>
+                  <a:tcPr>
+                    <a:solidFill>
+                      <a:srgbClr val="F7F1E8"/>
+                    </a:solidFill>
+                  </a:tcPr>
+                </a:tc>
+              </a:tr>
+              <a:tr h="731520">
+                <a:tc>
+                  <a:txBody>
+                    <a:bodyPr wrap="square"/>
+                    <a:lstStyle/>
+                    <a:p>
+                      <a:r>
+                        <a:rPr sz="1100" b="1">
+                          <a:solidFill>
+                            <a:srgbClr val="231F1A"/>
+                          </a:solidFill>
+                          <a:latin typeface="Calibri"/>
+                        </a:rPr>
+                        <a:t>05 Host</a:t>
+                      </a:r>
+                    </a:p>
+                  </a:txBody>
+                  <a:tcPr>
+                    <a:solidFill>
+                      <a:srgbClr val="FBF7F0"/>
+                    </a:solidFill>
+                  </a:tcPr>
+                </a:tc>
+                <a:tc>
+                  <a:txBody>
+                    <a:bodyPr wrap="square"/>
+                    <a:lstStyle/>
+                    <a:p>
+                      <a:r>
+                        <a:rPr sz="1100" b="0">
+                          <a:solidFill>
+                            <a:srgbClr val="231F1A"/>
+                          </a:solidFill>
+                          <a:latin typeface="Calibri"/>
+                        </a:rPr>
+                        <a:t>Cloudflare Workers + D1. Fixtures only via npm run demo, never production</a:t>
+                      </a:r>
+                    </a:p>
+                  </a:txBody>
+                  <a:tcPr>
+                    <a:solidFill>
+                      <a:srgbClr val="FBF7F0"/>
+                    </a:solidFill>
+                  </a:tcPr>
+                </a:tc>
+              </a:tr>
+              <a:tr h="731520">
+                <a:tc>
+                  <a:txBody>
+                    <a:bodyPr wrap="square"/>
+                    <a:lstStyle/>
+                    <a:p>
+                      <a:r>
+                        <a:rPr sz="1100" b="1">
+                          <a:solidFill>
+                            <a:srgbClr val="231F1A"/>
+                          </a:solidFill>
+                          <a:latin typeface="Calibri"/>
+                        </a:rPr>
+                        <a:t>06 Empty bulletin</a:t>
+                      </a:r>
+                    </a:p>
+                  </a:txBody>
+                  <a:tcPr>
+                    <a:solidFill>
+                      <a:srgbClr val="F7F1E8"/>
+                    </a:solidFill>
+                  </a:tcPr>
+                </a:tc>
+                <a:tc>
+                  <a:txBody>
+                    <a:bodyPr wrap="square"/>
+                    <a:lstStyle/>
+                    <a:p>
+                      <a:r>
+                        <a:rPr sz="1100" b="0">
+                          <a:solidFill>
+                            <a:srgbClr val="231F1A"/>
+                          </a:solidFill>
+                          <a:latin typeface="Calibri"/>
+                        </a:rPr>
+                        <a:t>UI states it is not an all-clear. Call 112 in danger</a:t>
+                      </a:r>
+                    </a:p>
+                  </a:txBody>
+                  <a:tcPr>
+                    <a:solidFill>
+                      <a:srgbClr val="F7F1E8"/>
+                    </a:solidFill>
+                  </a:tcPr>
+                </a:tc>
+              </a:tr>
+            </a:tbl>
+          </a:graphicData>
+        </a:graphic>
+      </p:graphicFrame>
     </p:spTree>
   </p:cSld>
   <p:clrMapOvr>
@@ -3879,79 +6963,9 @@
         <p:nvPr/>
       </p:nvGrpSpPr>
       <p:grpSpPr/>
-      <p:sp>
-        <p:nvSpPr>
-          <p:cNvPr id="2" name="TextBox 1"/>
-          <p:cNvSpPr txBox="1"/>
-          <p:nvPr/>
-        </p:nvSpPr>
-        <p:spPr>
-          <a:xfrm>
-            <a:off x="457200" y="228600"/>
-            <a:ext cx="10972800" cy="320040"/>
-          </a:xfrm>
-          <a:prstGeom prst="rect">
-            <a:avLst/>
-          </a:prstGeom>
-          <a:noFill/>
-        </p:spPr>
-        <p:txBody>
-          <a:bodyPr wrap="none">
-            <a:spAutoFit/>
-          </a:bodyPr>
-          <a:lstStyle/>
-          <a:p>
-            <a:pPr algn="l"/>
-            <a:r>
-              <a:rPr sz="1300" b="1">
-                <a:solidFill>
-                  <a:srgbClr val="A44B13"/>
-                </a:solidFill>
-                <a:latin typeface="Calibri"/>
-              </a:rPr>
-              <a:t>SOURCE HEALTH</a:t>
-            </a:r>
-          </a:p>
-        </p:txBody>
-      </p:sp>
-      <p:sp>
-        <p:nvSpPr>
-          <p:cNvPr id="3" name="TextBox 2"/>
-          <p:cNvSpPr txBox="1"/>
-          <p:nvPr/>
-        </p:nvSpPr>
-        <p:spPr>
-          <a:xfrm>
-            <a:off x="457200" y="502920"/>
-            <a:ext cx="10972800" cy="548640"/>
-          </a:xfrm>
-          <a:prstGeom prst="rect">
-            <a:avLst/>
-          </a:prstGeom>
-          <a:noFill/>
-        </p:spPr>
-        <p:txBody>
-          <a:bodyPr wrap="none">
-            <a:spAutoFit/>
-          </a:bodyPr>
-          <a:lstStyle/>
-          <a:p>
-            <a:pPr algn="l"/>
-            <a:r>
-              <a:rPr sz="2600" b="1">
-                <a:solidFill>
-                  <a:srgbClr val="254563"/>
-                </a:solidFill>
-                <a:latin typeface="Calibri"/>
-              </a:rPr>
-              <a:t>Read freshness before sharing an empty bulletin</a:t>
-            </a:r>
-          </a:p>
-        </p:txBody>
-      </p:sp>
       <p:pic>
         <p:nvPicPr>
-          <p:cNvPr id="4" name="Picture 3" descr="desktop-source-health.png"/>
+          <p:cNvPr id="2" name="Picture 1" descr="paper-wash.jpg"/>
           <p:cNvPicPr>
             <a:picLocks noChangeAspect="1"/>
           </p:cNvPicPr>
@@ -3965,8 +6979,8 @@
         </p:blipFill>
         <p:spPr>
           <a:xfrm>
-            <a:off x="457200" y="1143000"/>
-            <a:ext cx="11247120" cy="7029450"/>
+            <a:off x="0" y="0"/>
+            <a:ext cx="12191695" cy="6858000"/>
           </a:xfrm>
           <a:prstGeom prst="rect">
             <a:avLst/>
@@ -3975,14 +6989,57 @@
       </p:pic>
       <p:sp>
         <p:nvSpPr>
-          <p:cNvPr id="5" name="TextBox 4"/>
+          <p:cNvPr id="3" name="Rectangle 2"/>
+          <p:cNvSpPr/>
+          <p:nvPr/>
+        </p:nvSpPr>
+        <p:spPr>
+          <a:xfrm>
+            <a:off x="0" y="0"/>
+            <a:ext cx="128016" cy="6858000"/>
+          </a:xfrm>
+          <a:prstGeom prst="rect">
+            <a:avLst/>
+          </a:prstGeom>
+          <a:solidFill>
+            <a:srgbClr val="C56A1A"/>
+          </a:solidFill>
+          <a:ln>
+            <a:noFill/>
+          </a:ln>
+        </p:spPr>
+        <p:style>
+          <a:lnRef idx="1">
+            <a:schemeClr val="accent1"/>
+          </a:lnRef>
+          <a:fillRef idx="3">
+            <a:schemeClr val="accent1"/>
+          </a:fillRef>
+          <a:effectRef idx="2">
+            <a:schemeClr val="accent1"/>
+          </a:effectRef>
+          <a:fontRef idx="minor">
+            <a:schemeClr val="lt1"/>
+          </a:fontRef>
+        </p:style>
+        <p:txBody>
+          <a:bodyPr rtlCol="0" anchor="ctr"/>
+          <a:lstStyle/>
+          <a:p>
+            <a:pPr algn="ctr"/>
+          </a:p>
+        </p:txBody>
+      </p:sp>
+      <p:sp>
+        <p:nvSpPr>
+          <p:cNvPr id="4" name="TextBox 3"/>
           <p:cNvSpPr txBox="1"/>
           <p:nvPr/>
         </p:nvSpPr>
         <p:spPr>
           <a:xfrm>
-            <a:off x="457200" y="6355080"/>
-            <a:ext cx="11247120" cy="365760"/>
+            <a:off x="411480" y="201168"/>
+            <a:ext cx="10972800" cy="256032"/>
           </a:xfrm>
           <a:prstGeom prst="rect">
             <a:avLst/>
@@ -3990,24 +7047,697 @@
           <a:noFill/>
         </p:spPr>
         <p:txBody>
-          <a:bodyPr wrap="none">
+          <a:bodyPr wrap="square">
             <a:spAutoFit/>
           </a:bodyPr>
           <a:lstStyle/>
           <a:p>
             <a:pPr algn="l"/>
             <a:r>
-              <a:rPr sz="1300" b="0">
+              <a:rPr sz="1200" b="1">
                 <a:solidFill>
-                  <a:srgbClr val="58616B"/>
+                  <a:srgbClr val="C56A1A"/>
                 </a:solidFill>
                 <a:latin typeface="Calibri"/>
               </a:rPr>
-              <a:t>CWC and CPCB stay disabled until a reviewed adapter exists.</a:t>
-            </a:r>
-          </a:p>
-        </p:txBody>
-      </p:sp>
+              <a:t>PLACE RESOLUTION</a:t>
+            </a:r>
+          </a:p>
+        </p:txBody>
+      </p:sp>
+      <p:sp>
+        <p:nvSpPr>
+          <p:cNvPr id="5" name="TextBox 4"/>
+          <p:cNvSpPr txBox="1"/>
+          <p:nvPr/>
+        </p:nvSpPr>
+        <p:spPr>
+          <a:xfrm>
+            <a:off x="411480" y="438912"/>
+            <a:ext cx="11338560" cy="640080"/>
+          </a:xfrm>
+          <a:prstGeom prst="rect">
+            <a:avLst/>
+          </a:prstGeom>
+          <a:noFill/>
+        </p:spPr>
+        <p:txBody>
+          <a:bodyPr wrap="square">
+            <a:spAutoFit/>
+          </a:bodyPr>
+          <a:lstStyle/>
+          <a:p>
+            <a:pPr algn="l"/>
+            <a:r>
+              <a:rPr sz="2400" b="1">
+                <a:solidFill>
+                  <a:srgbClr val="254563"/>
+                </a:solidFill>
+                <a:latin typeface="Calibri"/>
+              </a:rPr>
+              <a:t>Typed names resolve to districts, not village polygons</a:t>
+            </a:r>
+          </a:p>
+        </p:txBody>
+      </p:sp>
+      <p:sp>
+        <p:nvSpPr>
+          <p:cNvPr id="6" name="TextBox 5"/>
+          <p:cNvSpPr txBox="1"/>
+          <p:nvPr/>
+        </p:nvSpPr>
+        <p:spPr>
+          <a:xfrm>
+            <a:off x="411480" y="6510528"/>
+            <a:ext cx="8229600" cy="237744"/>
+          </a:xfrm>
+          <a:prstGeom prst="rect">
+            <a:avLst/>
+          </a:prstGeom>
+          <a:noFill/>
+        </p:spPr>
+        <p:txBody>
+          <a:bodyPr wrap="square">
+            <a:spAutoFit/>
+          </a:bodyPr>
+          <a:lstStyle/>
+          <a:p>
+            <a:pPr algn="l"/>
+            <a:r>
+              <a:rPr sz="1100" b="0">
+                <a:solidFill>
+                  <a:srgbClr val="5C564C"/>
+                </a:solidFill>
+                <a:latin typeface="Calibri"/>
+              </a:rPr>
+              <a:t>Maharashtra Civic Alerts  ·  Codex Build House Pune</a:t>
+            </a:r>
+          </a:p>
+        </p:txBody>
+      </p:sp>
+      <p:sp>
+        <p:nvSpPr>
+          <p:cNvPr id="7" name="TextBox 6"/>
+          <p:cNvSpPr txBox="1"/>
+          <p:nvPr/>
+        </p:nvSpPr>
+        <p:spPr>
+          <a:xfrm>
+            <a:off x="10332720" y="6510528"/>
+            <a:ext cx="1371600" cy="237744"/>
+          </a:xfrm>
+          <a:prstGeom prst="rect">
+            <a:avLst/>
+          </a:prstGeom>
+          <a:noFill/>
+        </p:spPr>
+        <p:txBody>
+          <a:bodyPr wrap="square">
+            <a:spAutoFit/>
+          </a:bodyPr>
+          <a:lstStyle/>
+          <a:p>
+            <a:pPr algn="r"/>
+            <a:r>
+              <a:rPr sz="1100" b="1">
+                <a:solidFill>
+                  <a:srgbClr val="5C564C"/>
+                </a:solidFill>
+                <a:latin typeface="Calibri"/>
+              </a:rPr>
+              <a:t>6 / 9</a:t>
+            </a:r>
+          </a:p>
+        </p:txBody>
+      </p:sp>
+      <p:graphicFrame>
+        <p:nvGraphicFramePr>
+          <p:cNvPr id="8" name="Table 7"/>
+          <p:cNvGraphicFramePr>
+            <a:graphicFrameLocks noGrp="1"/>
+          </p:cNvGraphicFramePr>
+          <p:nvPr/>
+        </p:nvGraphicFramePr>
+        <p:xfrm>
+          <a:off x="411480" y="1143000"/>
+          <a:ext cx="11384280" cy="5120640"/>
+        </p:xfrm>
+        <a:graphic>
+          <a:graphicData uri="http://schemas.openxmlformats.org/drawingml/2006/table">
+            <a:tbl>
+              <a:tblPr firstRow="1" bandRow="1">
+                <a:tableStyleId>{5C22544A-7EE6-4342-B048-85BDC9FD1C3A}</a:tableStyleId>
+              </a:tblPr>
+              <a:tblGrid>
+                <a:gridCol w="2846070"/>
+                <a:gridCol w="2846070"/>
+                <a:gridCol w="2846070"/>
+                <a:gridCol w="2846070"/>
+              </a:tblGrid>
+              <a:tr h="853440">
+                <a:tc>
+                  <a:txBody>
+                    <a:bodyPr wrap="square"/>
+                    <a:lstStyle/>
+                    <a:p>
+                      <a:r>
+                        <a:rPr sz="1000" b="1">
+                          <a:solidFill>
+                            <a:srgbClr val="254563"/>
+                          </a:solidFill>
+                          <a:latin typeface="Calibri"/>
+                        </a:rPr>
+                        <a:t>Query</a:t>
+                      </a:r>
+                    </a:p>
+                  </a:txBody>
+                  <a:tcPr>
+                    <a:solidFill>
+                      <a:srgbClr val="EFE6D8"/>
+                    </a:solidFill>
+                  </a:tcPr>
+                </a:tc>
+                <a:tc>
+                  <a:txBody>
+                    <a:bodyPr wrap="square"/>
+                    <a:lstStyle/>
+                    <a:p>
+                      <a:r>
+                        <a:rPr sz="1000" b="1">
+                          <a:solidFill>
+                            <a:srgbClr val="254563"/>
+                          </a:solidFill>
+                          <a:latin typeface="Calibri"/>
+                        </a:rPr>
+                        <a:t>Result</a:t>
+                      </a:r>
+                    </a:p>
+                  </a:txBody>
+                  <a:tcPr>
+                    <a:solidFill>
+                      <a:srgbClr val="EFE6D8"/>
+                    </a:solidFill>
+                  </a:tcPr>
+                </a:tc>
+                <a:tc>
+                  <a:txBody>
+                    <a:bodyPr wrap="square"/>
+                    <a:lstStyle/>
+                    <a:p>
+                      <a:r>
+                        <a:rPr sz="1000" b="1">
+                          <a:solidFill>
+                            <a:srgbClr val="254563"/>
+                          </a:solidFill>
+                          <a:latin typeface="Calibri"/>
+                        </a:rPr>
+                        <a:t>Precision</a:t>
+                      </a:r>
+                    </a:p>
+                  </a:txBody>
+                  <a:tcPr>
+                    <a:solidFill>
+                      <a:srgbClr val="EFE6D8"/>
+                    </a:solidFill>
+                  </a:tcPr>
+                </a:tc>
+                <a:tc>
+                  <a:txBody>
+                    <a:bodyPr wrap="square"/>
+                    <a:lstStyle/>
+                    <a:p>
+                      <a:r>
+                        <a:rPr sz="1000" b="1">
+                          <a:solidFill>
+                            <a:srgbClr val="254563"/>
+                          </a:solidFill>
+                          <a:latin typeface="Calibri"/>
+                        </a:rPr>
+                        <a:t>Why it matters</a:t>
+                      </a:r>
+                    </a:p>
+                  </a:txBody>
+                  <a:tcPr>
+                    <a:solidFill>
+                      <a:srgbClr val="EFE6D8"/>
+                    </a:solidFill>
+                  </a:tcPr>
+                </a:tc>
+              </a:tr>
+              <a:tr h="853440">
+                <a:tc>
+                  <a:txBody>
+                    <a:bodyPr wrap="square"/>
+                    <a:lstStyle/>
+                    <a:p>
+                      <a:r>
+                        <a:rPr sz="1100" b="1">
+                          <a:solidFill>
+                            <a:srgbClr val="231F1A"/>
+                          </a:solidFill>
+                          <a:latin typeface="Calibri"/>
+                        </a:rPr>
+                        <a:t>Pune</a:t>
+                      </a:r>
+                    </a:p>
+                  </a:txBody>
+                  <a:tcPr>
+                    <a:solidFill>
+                      <a:srgbClr val="FBF7F0"/>
+                    </a:solidFill>
+                  </a:tcPr>
+                </a:tc>
+                <a:tc>
+                  <a:txBody>
+                    <a:bodyPr wrap="square"/>
+                    <a:lstStyle/>
+                    <a:p>
+                      <a:r>
+                        <a:rPr sz="1100" b="0">
+                          <a:solidFill>
+                            <a:srgbClr val="231F1A"/>
+                          </a:solidFill>
+                          <a:latin typeface="Calibri"/>
+                        </a:rPr>
+                        <a:t>Pune</a:t>
+                      </a:r>
+                    </a:p>
+                  </a:txBody>
+                  <a:tcPr>
+                    <a:solidFill>
+                      <a:srgbClr val="FBF7F0"/>
+                    </a:solidFill>
+                  </a:tcPr>
+                </a:tc>
+                <a:tc>
+                  <a:txBody>
+                    <a:bodyPr wrap="square"/>
+                    <a:lstStyle/>
+                    <a:p>
+                      <a:r>
+                        <a:rPr sz="1100" b="0">
+                          <a:solidFill>
+                            <a:srgbClr val="231F1A"/>
+                          </a:solidFill>
+                          <a:latin typeface="Calibri"/>
+                        </a:rPr>
+                        <a:t>district</a:t>
+                      </a:r>
+                    </a:p>
+                  </a:txBody>
+                  <a:tcPr>
+                    <a:solidFill>
+                      <a:srgbClr val="FBF7F0"/>
+                    </a:solidFill>
+                  </a:tcPr>
+                </a:tc>
+                <a:tc>
+                  <a:txBody>
+                    <a:bodyPr wrap="square"/>
+                    <a:lstStyle/>
+                    <a:p>
+                      <a:r>
+                        <a:rPr sz="1100" b="0">
+                          <a:solidFill>
+                            <a:srgbClr val="231F1A"/>
+                          </a:solidFill>
+                          <a:latin typeface="Calibri"/>
+                        </a:rPr>
+                        <a:t>Direct district match</a:t>
+                      </a:r>
+                    </a:p>
+                  </a:txBody>
+                  <a:tcPr>
+                    <a:solidFill>
+                      <a:srgbClr val="FBF7F0"/>
+                    </a:solidFill>
+                  </a:tcPr>
+                </a:tc>
+              </a:tr>
+              <a:tr h="853440">
+                <a:tc>
+                  <a:txBody>
+                    <a:bodyPr wrap="square"/>
+                    <a:lstStyle/>
+                    <a:p>
+                      <a:r>
+                        <a:rPr sz="1100" b="1">
+                          <a:solidFill>
+                            <a:srgbClr val="231F1A"/>
+                          </a:solidFill>
+                          <a:latin typeface="Calibri"/>
+                        </a:rPr>
+                        <a:t>Navi Mumbai</a:t>
+                      </a:r>
+                    </a:p>
+                  </a:txBody>
+                  <a:tcPr>
+                    <a:solidFill>
+                      <a:srgbClr val="F7F1E8"/>
+                    </a:solidFill>
+                  </a:tcPr>
+                </a:tc>
+                <a:tc>
+                  <a:txBody>
+                    <a:bodyPr wrap="square"/>
+                    <a:lstStyle/>
+                    <a:p>
+                      <a:r>
+                        <a:rPr sz="1100" b="0">
+                          <a:solidFill>
+                            <a:srgbClr val="231F1A"/>
+                          </a:solidFill>
+                          <a:latin typeface="Calibri"/>
+                        </a:rPr>
+                        <a:t>Raigad and Thane</a:t>
+                      </a:r>
+                    </a:p>
+                  </a:txBody>
+                  <a:tcPr>
+                    <a:solidFill>
+                      <a:srgbClr val="F7F1E8"/>
+                    </a:solidFill>
+                  </a:tcPr>
+                </a:tc>
+                <a:tc>
+                  <a:txBody>
+                    <a:bodyPr wrap="square"/>
+                    <a:lstStyle/>
+                    <a:p>
+                      <a:r>
+                        <a:rPr sz="1100" b="0">
+                          <a:solidFill>
+                            <a:srgbClr val="231F1A"/>
+                          </a:solidFill>
+                          <a:latin typeface="Calibri"/>
+                        </a:rPr>
+                        <a:t>district-alias</a:t>
+                      </a:r>
+                    </a:p>
+                  </a:txBody>
+                  <a:tcPr>
+                    <a:solidFill>
+                      <a:srgbClr val="F7F1E8"/>
+                    </a:solidFill>
+                  </a:tcPr>
+                </a:tc>
+                <a:tc>
+                  <a:txBody>
+                    <a:bodyPr wrap="square"/>
+                    <a:lstStyle/>
+                    <a:p>
+                      <a:r>
+                        <a:rPr sz="1100" b="0">
+                          <a:solidFill>
+                            <a:srgbClr val="231F1A"/>
+                          </a:solidFill>
+                          <a:latin typeface="Calibri"/>
+                        </a:rPr>
+                        <a:t>Resident must pick one</a:t>
+                      </a:r>
+                    </a:p>
+                  </a:txBody>
+                  <a:tcPr>
+                    <a:solidFill>
+                      <a:srgbClr val="F7F1E8"/>
+                    </a:solidFill>
+                  </a:tcPr>
+                </a:tc>
+              </a:tr>
+              <a:tr h="853440">
+                <a:tc>
+                  <a:txBody>
+                    <a:bodyPr wrap="square"/>
+                    <a:lstStyle/>
+                    <a:p>
+                      <a:r>
+                        <a:rPr sz="1100" b="1">
+                          <a:solidFill>
+                            <a:srgbClr val="231F1A"/>
+                          </a:solidFill>
+                          <a:latin typeface="Calibri"/>
+                        </a:rPr>
+                        <a:t>Sawantwadi</a:t>
+                      </a:r>
+                    </a:p>
+                  </a:txBody>
+                  <a:tcPr>
+                    <a:solidFill>
+                      <a:srgbClr val="FBF7F0"/>
+                    </a:solidFill>
+                  </a:tcPr>
+                </a:tc>
+                <a:tc>
+                  <a:txBody>
+                    <a:bodyPr wrap="square"/>
+                    <a:lstStyle/>
+                    <a:p>
+                      <a:r>
+                        <a:rPr sz="1100" b="0">
+                          <a:solidFill>
+                            <a:srgbClr val="231F1A"/>
+                          </a:solidFill>
+                          <a:latin typeface="Calibri"/>
+                        </a:rPr>
+                        <a:t>Sindhudurg</a:t>
+                      </a:r>
+                    </a:p>
+                  </a:txBody>
+                  <a:tcPr>
+                    <a:solidFill>
+                      <a:srgbClr val="FBF7F0"/>
+                    </a:solidFill>
+                  </a:tcPr>
+                </a:tc>
+                <a:tc>
+                  <a:txBody>
+                    <a:bodyPr wrap="square"/>
+                    <a:lstStyle/>
+                    <a:p>
+                      <a:r>
+                        <a:rPr sz="1100" b="0">
+                          <a:solidFill>
+                            <a:srgbClr val="231F1A"/>
+                          </a:solidFill>
+                          <a:latin typeface="Calibri"/>
+                        </a:rPr>
+                        <a:t>district-alias</a:t>
+                      </a:r>
+                    </a:p>
+                  </a:txBody>
+                  <a:tcPr>
+                    <a:solidFill>
+                      <a:srgbClr val="FBF7F0"/>
+                    </a:solidFill>
+                  </a:tcPr>
+                </a:tc>
+                <a:tc>
+                  <a:txBody>
+                    <a:bodyPr wrap="square"/>
+                    <a:lstStyle/>
+                    <a:p>
+                      <a:r>
+                        <a:rPr sz="1100" b="0">
+                          <a:solidFill>
+                            <a:srgbClr val="231F1A"/>
+                          </a:solidFill>
+                          <a:latin typeface="Calibri"/>
+                        </a:rPr>
+                        <a:t>Town ≠ verified ward</a:t>
+                      </a:r>
+                    </a:p>
+                  </a:txBody>
+                  <a:tcPr>
+                    <a:solidFill>
+                      <a:srgbClr val="FBF7F0"/>
+                    </a:solidFill>
+                  </a:tcPr>
+                </a:tc>
+              </a:tr>
+              <a:tr h="853440">
+                <a:tc>
+                  <a:txBody>
+                    <a:bodyPr wrap="square"/>
+                    <a:lstStyle/>
+                    <a:p>
+                      <a:r>
+                        <a:rPr sz="1100" b="1">
+                          <a:solidFill>
+                            <a:srgbClr val="231F1A"/>
+                          </a:solidFill>
+                          <a:latin typeface="Calibri"/>
+                        </a:rPr>
+                        <a:t>Marunji</a:t>
+                      </a:r>
+                    </a:p>
+                  </a:txBody>
+                  <a:tcPr>
+                    <a:solidFill>
+                      <a:srgbClr val="F7F1E8"/>
+                    </a:solidFill>
+                  </a:tcPr>
+                </a:tc>
+                <a:tc>
+                  <a:txBody>
+                    <a:bodyPr wrap="square"/>
+                    <a:lstStyle/>
+                    <a:p>
+                      <a:r>
+                        <a:rPr sz="1100" b="0">
+                          <a:solidFill>
+                            <a:srgbClr val="231F1A"/>
+                          </a:solidFill>
+                          <a:latin typeface="Calibri"/>
+                        </a:rPr>
+                        <a:t>Pune</a:t>
+                      </a:r>
+                    </a:p>
+                  </a:txBody>
+                  <a:tcPr>
+                    <a:solidFill>
+                      <a:srgbClr val="F7F1E8"/>
+                    </a:solidFill>
+                  </a:tcPr>
+                </a:tc>
+                <a:tc>
+                  <a:txBody>
+                    <a:bodyPr wrap="square"/>
+                    <a:lstStyle/>
+                    <a:p>
+                      <a:r>
+                        <a:rPr sz="1100" b="0">
+                          <a:solidFill>
+                            <a:srgbClr val="231F1A"/>
+                          </a:solidFill>
+                          <a:latin typeface="Calibri"/>
+                        </a:rPr>
+                        <a:t>district-alias</a:t>
+                      </a:r>
+                    </a:p>
+                  </a:txBody>
+                  <a:tcPr>
+                    <a:solidFill>
+                      <a:srgbClr val="F7F1E8"/>
+                    </a:solidFill>
+                  </a:tcPr>
+                </a:tc>
+                <a:tc>
+                  <a:txBody>
+                    <a:bodyPr wrap="square"/>
+                    <a:lstStyle/>
+                    <a:p>
+                      <a:r>
+                        <a:rPr sz="1100" b="0">
+                          <a:solidFill>
+                            <a:srgbClr val="231F1A"/>
+                          </a:solidFill>
+                          <a:latin typeface="Calibri"/>
+                        </a:rPr>
+                        <a:t>Place maps to district only</a:t>
+                      </a:r>
+                    </a:p>
+                  </a:txBody>
+                  <a:tcPr>
+                    <a:solidFill>
+                      <a:srgbClr val="F7F1E8"/>
+                    </a:solidFill>
+                  </a:tcPr>
+                </a:tc>
+              </a:tr>
+              <a:tr h="853440">
+                <a:tc>
+                  <a:txBody>
+                    <a:bodyPr wrap="square"/>
+                    <a:lstStyle/>
+                    <a:p>
+                      <a:r>
+                        <a:rPr sz="1100" b="1">
+                          <a:solidFill>
+                            <a:srgbClr val="231F1A"/>
+                          </a:solidFill>
+                          <a:latin typeface="Calibri"/>
+                        </a:rPr>
+                        <a:t>Panaji</a:t>
+                      </a:r>
+                    </a:p>
+                  </a:txBody>
+                  <a:tcPr>
+                    <a:solidFill>
+                      <a:srgbClr val="FBF7F0"/>
+                    </a:solidFill>
+                  </a:tcPr>
+                </a:tc>
+                <a:tc>
+                  <a:txBody>
+                    <a:bodyPr wrap="square"/>
+                    <a:lstStyle/>
+                    <a:p>
+                      <a:r>
+                        <a:rPr sz="1100" b="0">
+                          <a:solidFill>
+                            <a:srgbClr val="231F1A"/>
+                          </a:solidFill>
+                          <a:latin typeface="Calibri"/>
+                        </a:rPr>
+                        <a:t>No Maharashtra match</a:t>
+                      </a:r>
+                    </a:p>
+                  </a:txBody>
+                  <a:tcPr>
+                    <a:solidFill>
+                      <a:srgbClr val="FBF7F0"/>
+                    </a:solidFill>
+                  </a:tcPr>
+                </a:tc>
+                <a:tc>
+                  <a:txBody>
+                    <a:bodyPr wrap="square"/>
+                    <a:lstStyle/>
+                    <a:p>
+                      <a:r>
+                        <a:rPr sz="1100" b="0">
+                          <a:solidFill>
+                            <a:srgbClr val="231F1A"/>
+                          </a:solidFill>
+                          <a:latin typeface="Calibri"/>
+                        </a:rPr>
+                        <a:t>—</a:t>
+                      </a:r>
+                    </a:p>
+                  </a:txBody>
+                  <a:tcPr>
+                    <a:solidFill>
+                      <a:srgbClr val="FBF7F0"/>
+                    </a:solidFill>
+                  </a:tcPr>
+                </a:tc>
+                <a:tc>
+                  <a:txBody>
+                    <a:bodyPr wrap="square"/>
+                    <a:lstStyle/>
+                    <a:p>
+                      <a:r>
+                        <a:rPr sz="1100" b="0">
+                          <a:solidFill>
+                            <a:srgbClr val="231F1A"/>
+                          </a:solidFill>
+                          <a:latin typeface="Calibri"/>
+                        </a:rPr>
+                        <a:t>Goa is excluded on purpose</a:t>
+                      </a:r>
+                    </a:p>
+                  </a:txBody>
+                  <a:tcPr>
+                    <a:solidFill>
+                      <a:srgbClr val="FBF7F0"/>
+                    </a:solidFill>
+                  </a:tcPr>
+                </a:tc>
+              </a:tr>
+            </a:tbl>
+          </a:graphicData>
+        </a:graphic>
+      </p:graphicFrame>
     </p:spTree>
   </p:cSld>
   <p:clrMapOvr>
@@ -4026,79 +7756,9 @@
         <p:nvPr/>
       </p:nvGrpSpPr>
       <p:grpSpPr/>
-      <p:sp>
-        <p:nvSpPr>
-          <p:cNvPr id="2" name="TextBox 1"/>
-          <p:cNvSpPr txBox="1"/>
-          <p:nvPr/>
-        </p:nvSpPr>
-        <p:spPr>
-          <a:xfrm>
-            <a:off x="457200" y="228600"/>
-            <a:ext cx="10972800" cy="320040"/>
-          </a:xfrm>
-          <a:prstGeom prst="rect">
-            <a:avLst/>
-          </a:prstGeom>
-          <a:noFill/>
-        </p:spPr>
-        <p:txBody>
-          <a:bodyPr wrap="none">
-            <a:spAutoFit/>
-          </a:bodyPr>
-          <a:lstStyle/>
-          <a:p>
-            <a:pPr algn="l"/>
-            <a:r>
-              <a:rPr sz="1300" b="1">
-                <a:solidFill>
-                  <a:srgbClr val="A44B13"/>
-                </a:solidFill>
-                <a:latin typeface="Calibri"/>
-              </a:rPr>
-              <a:t>MARATHI</a:t>
-            </a:r>
-          </a:p>
-        </p:txBody>
-      </p:sp>
-      <p:sp>
-        <p:nvSpPr>
-          <p:cNvPr id="3" name="TextBox 2"/>
-          <p:cNvSpPr txBox="1"/>
-          <p:nvPr/>
-        </p:nvSpPr>
-        <p:spPr>
-          <a:xfrm>
-            <a:off x="457200" y="502920"/>
-            <a:ext cx="10972800" cy="548640"/>
-          </a:xfrm>
-          <a:prstGeom prst="rect">
-            <a:avLst/>
-          </a:prstGeom>
-          <a:noFill/>
-        </p:spPr>
-        <p:txBody>
-          <a:bodyPr wrap="none">
-            <a:spAutoFit/>
-          </a:bodyPr>
-          <a:lstStyle/>
-          <a:p>
-            <a:pPr algn="l"/>
-            <a:r>
-              <a:rPr sz="2600" b="1">
-                <a:solidFill>
-                  <a:srgbClr val="254563"/>
-                </a:solidFill>
-                <a:latin typeface="Calibri"/>
-              </a:rPr>
-              <a:t>Same bulletin, resident language</a:t>
-            </a:r>
-          </a:p>
-        </p:txBody>
-      </p:sp>
       <p:pic>
         <p:nvPicPr>
-          <p:cNvPr id="4" name="Picture 3" descr="desktop-marathi.png"/>
+          <p:cNvPr id="2" name="Picture 1" descr="paper-wash.jpg"/>
           <p:cNvPicPr>
             <a:picLocks noChangeAspect="1"/>
           </p:cNvPicPr>
@@ -4112,8 +7772,8 @@
         </p:blipFill>
         <p:spPr>
           <a:xfrm>
-            <a:off x="457200" y="1143000"/>
-            <a:ext cx="11247120" cy="7029450"/>
+            <a:off x="0" y="0"/>
+            <a:ext cx="12191695" cy="6858000"/>
           </a:xfrm>
           <a:prstGeom prst="rect">
             <a:avLst/>
@@ -4122,14 +7782,57 @@
       </p:pic>
       <p:sp>
         <p:nvSpPr>
-          <p:cNvPr id="5" name="TextBox 4"/>
+          <p:cNvPr id="3" name="Rectangle 2"/>
+          <p:cNvSpPr/>
+          <p:nvPr/>
+        </p:nvSpPr>
+        <p:spPr>
+          <a:xfrm>
+            <a:off x="0" y="0"/>
+            <a:ext cx="128016" cy="6858000"/>
+          </a:xfrm>
+          <a:prstGeom prst="rect">
+            <a:avLst/>
+          </a:prstGeom>
+          <a:solidFill>
+            <a:srgbClr val="C56A1A"/>
+          </a:solidFill>
+          <a:ln>
+            <a:noFill/>
+          </a:ln>
+        </p:spPr>
+        <p:style>
+          <a:lnRef idx="1">
+            <a:schemeClr val="accent1"/>
+          </a:lnRef>
+          <a:fillRef idx="3">
+            <a:schemeClr val="accent1"/>
+          </a:fillRef>
+          <a:effectRef idx="2">
+            <a:schemeClr val="accent1"/>
+          </a:effectRef>
+          <a:fontRef idx="minor">
+            <a:schemeClr val="lt1"/>
+          </a:fontRef>
+        </p:style>
+        <p:txBody>
+          <a:bodyPr rtlCol="0" anchor="ctr"/>
+          <a:lstStyle/>
+          <a:p>
+            <a:pPr algn="ctr"/>
+          </a:p>
+        </p:txBody>
+      </p:sp>
+      <p:sp>
+        <p:nvSpPr>
+          <p:cNvPr id="4" name="TextBox 3"/>
           <p:cNvSpPr txBox="1"/>
           <p:nvPr/>
         </p:nvSpPr>
         <p:spPr>
           <a:xfrm>
-            <a:off x="457200" y="6355080"/>
-            <a:ext cx="11247120" cy="365760"/>
+            <a:off x="411480" y="201168"/>
+            <a:ext cx="10972800" cy="256032"/>
           </a:xfrm>
           <a:prstGeom prst="rect">
             <a:avLst/>
@@ -4137,24 +7840,564 @@
           <a:noFill/>
         </p:spPr>
         <p:txBody>
-          <a:bodyPr wrap="none">
+          <a:bodyPr wrap="square">
             <a:spAutoFit/>
           </a:bodyPr>
           <a:lstStyle/>
           <a:p>
             <a:pPr algn="l"/>
             <a:r>
-              <a:rPr sz="1300" b="0">
+              <a:rPr sz="1200" b="1">
                 <a:solidFill>
-                  <a:srgbClr val="58616B"/>
+                  <a:srgbClr val="C56A1A"/>
                 </a:solidFill>
                 <a:latin typeface="Calibri"/>
               </a:rPr>
-              <a:t>Original warning text is kept. Language fallback is labelled.</a:t>
-            </a:r>
-          </a:p>
-        </p:txBody>
-      </p:sp>
+              <a:t>INFORMATION MODEL</a:t>
+            </a:r>
+          </a:p>
+        </p:txBody>
+      </p:sp>
+      <p:sp>
+        <p:nvSpPr>
+          <p:cNvPr id="5" name="TextBox 4"/>
+          <p:cNvSpPr txBox="1"/>
+          <p:nvPr/>
+        </p:nvSpPr>
+        <p:spPr>
+          <a:xfrm>
+            <a:off x="411480" y="438912"/>
+            <a:ext cx="11338560" cy="640080"/>
+          </a:xfrm>
+          <a:prstGeom prst="rect">
+            <a:avLst/>
+          </a:prstGeom>
+          <a:noFill/>
+        </p:spPr>
+        <p:txBody>
+          <a:bodyPr wrap="square">
+            <a:spAutoFit/>
+          </a:bodyPr>
+          <a:lstStyle/>
+          <a:p>
+            <a:pPr algn="l"/>
+            <a:r>
+              <a:rPr sz="2400" b="1">
+                <a:solidFill>
+                  <a:srgbClr val="254563"/>
+                </a:solidFill>
+                <a:latin typeface="Calibri"/>
+              </a:rPr>
+              <a:t>What the resident can actually know</a:t>
+            </a:r>
+          </a:p>
+        </p:txBody>
+      </p:sp>
+      <p:sp>
+        <p:nvSpPr>
+          <p:cNvPr id="6" name="TextBox 5"/>
+          <p:cNvSpPr txBox="1"/>
+          <p:nvPr/>
+        </p:nvSpPr>
+        <p:spPr>
+          <a:xfrm>
+            <a:off x="411480" y="6510528"/>
+            <a:ext cx="8229600" cy="237744"/>
+          </a:xfrm>
+          <a:prstGeom prst="rect">
+            <a:avLst/>
+          </a:prstGeom>
+          <a:noFill/>
+        </p:spPr>
+        <p:txBody>
+          <a:bodyPr wrap="square">
+            <a:spAutoFit/>
+          </a:bodyPr>
+          <a:lstStyle/>
+          <a:p>
+            <a:pPr algn="l"/>
+            <a:r>
+              <a:rPr sz="1100" b="0">
+                <a:solidFill>
+                  <a:srgbClr val="5C564C"/>
+                </a:solidFill>
+                <a:latin typeface="Calibri"/>
+              </a:rPr>
+              <a:t>Maharashtra Civic Alerts  ·  Codex Build House Pune</a:t>
+            </a:r>
+          </a:p>
+        </p:txBody>
+      </p:sp>
+      <p:sp>
+        <p:nvSpPr>
+          <p:cNvPr id="7" name="TextBox 6"/>
+          <p:cNvSpPr txBox="1"/>
+          <p:nvPr/>
+        </p:nvSpPr>
+        <p:spPr>
+          <a:xfrm>
+            <a:off x="10332720" y="6510528"/>
+            <a:ext cx="1371600" cy="237744"/>
+          </a:xfrm>
+          <a:prstGeom prst="rect">
+            <a:avLst/>
+          </a:prstGeom>
+          <a:noFill/>
+        </p:spPr>
+        <p:txBody>
+          <a:bodyPr wrap="square">
+            <a:spAutoFit/>
+          </a:bodyPr>
+          <a:lstStyle/>
+          <a:p>
+            <a:pPr algn="r"/>
+            <a:r>
+              <a:rPr sz="1100" b="1">
+                <a:solidFill>
+                  <a:srgbClr val="5C564C"/>
+                </a:solidFill>
+                <a:latin typeface="Calibri"/>
+              </a:rPr>
+              <a:t>7 / 9</a:t>
+            </a:r>
+          </a:p>
+        </p:txBody>
+      </p:sp>
+      <p:graphicFrame>
+        <p:nvGraphicFramePr>
+          <p:cNvPr id="8" name="Table 7"/>
+          <p:cNvGraphicFramePr>
+            <a:graphicFrameLocks noGrp="1"/>
+          </p:cNvGraphicFramePr>
+          <p:nvPr/>
+        </p:nvGraphicFramePr>
+        <p:xfrm>
+          <a:off x="411480" y="1143000"/>
+          <a:ext cx="11384280" cy="5120640"/>
+        </p:xfrm>
+        <a:graphic>
+          <a:graphicData uri="http://schemas.openxmlformats.org/drawingml/2006/table">
+            <a:tbl>
+              <a:tblPr firstRow="1" bandRow="1">
+                <a:tableStyleId>{5C22544A-7EE6-4342-B048-85BDC9FD1C3A}</a:tableStyleId>
+              </a:tblPr>
+              <a:tblGrid>
+                <a:gridCol w="3794760"/>
+                <a:gridCol w="3794760"/>
+                <a:gridCol w="3794760"/>
+              </a:tblGrid>
+              <a:tr h="853440">
+                <a:tc>
+                  <a:txBody>
+                    <a:bodyPr wrap="square"/>
+                    <a:lstStyle/>
+                    <a:p>
+                      <a:r>
+                        <a:rPr sz="1000" b="1">
+                          <a:solidFill>
+                            <a:srgbClr val="254563"/>
+                          </a:solidFill>
+                          <a:latin typeface="Calibri"/>
+                        </a:rPr>
+                        <a:t>Surface</a:t>
+                      </a:r>
+                    </a:p>
+                  </a:txBody>
+                  <a:tcPr>
+                    <a:solidFill>
+                      <a:srgbClr val="EFE6D8"/>
+                    </a:solidFill>
+                  </a:tcPr>
+                </a:tc>
+                <a:tc>
+                  <a:txBody>
+                    <a:bodyPr wrap="square"/>
+                    <a:lstStyle/>
+                    <a:p>
+                      <a:r>
+                        <a:rPr sz="1000" b="1">
+                          <a:solidFill>
+                            <a:srgbClr val="254563"/>
+                          </a:solidFill>
+                          <a:latin typeface="Calibri"/>
+                        </a:rPr>
+                        <a:t>Fields shown</a:t>
+                      </a:r>
+                    </a:p>
+                  </a:txBody>
+                  <a:tcPr>
+                    <a:solidFill>
+                      <a:srgbClr val="EFE6D8"/>
+                    </a:solidFill>
+                  </a:tcPr>
+                </a:tc>
+                <a:tc>
+                  <a:txBody>
+                    <a:bodyPr wrap="square"/>
+                    <a:lstStyle/>
+                    <a:p>
+                      <a:r>
+                        <a:rPr sz="1000" b="1">
+                          <a:solidFill>
+                            <a:srgbClr val="254563"/>
+                          </a:solidFill>
+                          <a:latin typeface="Calibri"/>
+                        </a:rPr>
+                        <a:t>Not shown</a:t>
+                      </a:r>
+                    </a:p>
+                  </a:txBody>
+                  <a:tcPr>
+                    <a:solidFill>
+                      <a:srgbClr val="EFE6D8"/>
+                    </a:solidFill>
+                  </a:tcPr>
+                </a:tc>
+              </a:tr>
+              <a:tr h="853440">
+                <a:tc>
+                  <a:txBody>
+                    <a:bodyPr wrap="square"/>
+                    <a:lstStyle/>
+                    <a:p>
+                      <a:r>
+                        <a:rPr sz="1100" b="1">
+                          <a:solidFill>
+                            <a:srgbClr val="231F1A"/>
+                          </a:solidFill>
+                          <a:latin typeface="Calibri"/>
+                        </a:rPr>
+                        <a:t>Latest status</a:t>
+                      </a:r>
+                    </a:p>
+                  </a:txBody>
+                  <a:tcPr>
+                    <a:solidFill>
+                      <a:srgbClr val="FBF7F0"/>
+                    </a:solidFill>
+                  </a:tcPr>
+                </a:tc>
+                <a:tc>
+                  <a:txBody>
+                    <a:bodyPr wrap="square"/>
+                    <a:lstStyle/>
+                    <a:p>
+                      <a:r>
+                        <a:rPr sz="1100" b="0">
+                          <a:solidFill>
+                            <a:srgbClr val="231F1A"/>
+                          </a:solidFill>
+                          <a:latin typeface="Calibri"/>
+                        </a:rPr>
+                        <a:t>Overall mode, generation time, polling interval</a:t>
+                      </a:r>
+                    </a:p>
+                  </a:txBody>
+                  <a:tcPr>
+                    <a:solidFill>
+                      <a:srgbClr val="FBF7F0"/>
+                    </a:solidFill>
+                  </a:tcPr>
+                </a:tc>
+                <a:tc>
+                  <a:txBody>
+                    <a:bodyPr wrap="square"/>
+                    <a:lstStyle/>
+                    <a:p>
+                      <a:r>
+                        <a:rPr sz="1100" b="0">
+                          <a:solidFill>
+                            <a:srgbClr val="231F1A"/>
+                          </a:solidFill>
+                          <a:latin typeface="Calibri"/>
+                        </a:rPr>
+                        <a:t>Guarantee that the area is safe</a:t>
+                      </a:r>
+                    </a:p>
+                  </a:txBody>
+                  <a:tcPr>
+                    <a:solidFill>
+                      <a:srgbClr val="FBF7F0"/>
+                    </a:solidFill>
+                  </a:tcPr>
+                </a:tc>
+              </a:tr>
+              <a:tr h="853440">
+                <a:tc>
+                  <a:txBody>
+                    <a:bodyPr wrap="square"/>
+                    <a:lstStyle/>
+                    <a:p>
+                      <a:r>
+                        <a:rPr sz="1100" b="1">
+                          <a:solidFill>
+                            <a:srgbClr val="231F1A"/>
+                          </a:solidFill>
+                          <a:latin typeface="Calibri"/>
+                        </a:rPr>
+                        <a:t>Source health</a:t>
+                      </a:r>
+                    </a:p>
+                  </a:txBody>
+                  <a:tcPr>
+                    <a:solidFill>
+                      <a:srgbClr val="F7F1E8"/>
+                    </a:solidFill>
+                  </a:tcPr>
+                </a:tc>
+                <a:tc>
+                  <a:txBody>
+                    <a:bodyPr wrap="square"/>
+                    <a:lstStyle/>
+                    <a:p>
+                      <a:r>
+                        <a:rPr sz="1100" b="0">
+                          <a:solidFill>
+                            <a:srgbClr val="231F1A"/>
+                          </a:solidFill>
+                          <a:latin typeface="Calibri"/>
+                        </a:rPr>
+                        <a:t>ok/stale/disabled, last success, error class, count</a:t>
+                      </a:r>
+                    </a:p>
+                  </a:txBody>
+                  <a:tcPr>
+                    <a:solidFill>
+                      <a:srgbClr val="F7F1E8"/>
+                    </a:solidFill>
+                  </a:tcPr>
+                </a:tc>
+                <a:tc>
+                  <a:txBody>
+                    <a:bodyPr wrap="square"/>
+                    <a:lstStyle/>
+                    <a:p>
+                      <a:r>
+                        <a:rPr sz="1100" b="0">
+                          <a:solidFill>
+                            <a:srgbClr val="231F1A"/>
+                          </a:solidFill>
+                          <a:latin typeface="Calibri"/>
+                        </a:rPr>
+                        <a:t>Raw upstream bodies or keys</a:t>
+                      </a:r>
+                    </a:p>
+                  </a:txBody>
+                  <a:tcPr>
+                    <a:solidFill>
+                      <a:srgbClr val="F7F1E8"/>
+                    </a:solidFill>
+                  </a:tcPr>
+                </a:tc>
+              </a:tr>
+              <a:tr h="853440">
+                <a:tc>
+                  <a:txBody>
+                    <a:bodyPr wrap="square"/>
+                    <a:lstStyle/>
+                    <a:p>
+                      <a:r>
+                        <a:rPr sz="1100" b="1">
+                          <a:solidFill>
+                            <a:srgbClr val="231F1A"/>
+                          </a:solidFill>
+                          <a:latin typeface="Calibri"/>
+                        </a:rPr>
+                        <a:t>Bulletin</a:t>
+                      </a:r>
+                    </a:p>
+                  </a:txBody>
+                  <a:tcPr>
+                    <a:solidFill>
+                      <a:srgbClr val="FBF7F0"/>
+                    </a:solidFill>
+                  </a:tcPr>
+                </a:tc>
+                <a:tc>
+                  <a:txBody>
+                    <a:bodyPr wrap="square"/>
+                    <a:lstStyle/>
+                    <a:p>
+                      <a:r>
+                        <a:rPr sz="1100" b="0">
+                          <a:solidFill>
+                            <a:srgbClr val="231F1A"/>
+                          </a:solidFill>
+                          <a:latin typeface="Calibri"/>
+                        </a:rPr>
+                        <a:t>Issuer, area, class, original instructions, expiry</a:t>
+                      </a:r>
+                    </a:p>
+                  </a:txBody>
+                  <a:tcPr>
+                    <a:solidFill>
+                      <a:srgbClr val="FBF7F0"/>
+                    </a:solidFill>
+                  </a:tcPr>
+                </a:tc>
+                <a:tc>
+                  <a:txBody>
+                    <a:bodyPr wrap="square"/>
+                    <a:lstStyle/>
+                    <a:p>
+                      <a:r>
+                        <a:rPr sz="1100" b="0">
+                          <a:solidFill>
+                            <a:srgbClr val="231F1A"/>
+                          </a:solidFill>
+                          <a:latin typeface="Calibri"/>
+                        </a:rPr>
+                        <a:t>AI paraphrase, village polygons</a:t>
+                      </a:r>
+                    </a:p>
+                  </a:txBody>
+                  <a:tcPr>
+                    <a:solidFill>
+                      <a:srgbClr val="FBF7F0"/>
+                    </a:solidFill>
+                  </a:tcPr>
+                </a:tc>
+              </a:tr>
+              <a:tr h="853440">
+                <a:tc>
+                  <a:txBody>
+                    <a:bodyPr wrap="square"/>
+                    <a:lstStyle/>
+                    <a:p>
+                      <a:r>
+                        <a:rPr sz="1100" b="1">
+                          <a:solidFill>
+                            <a:srgbClr val="231F1A"/>
+                          </a:solidFill>
+                          <a:latin typeface="Calibri"/>
+                        </a:rPr>
+                        <a:t>Citizen services</a:t>
+                      </a:r>
+                    </a:p>
+                  </a:txBody>
+                  <a:tcPr>
+                    <a:solidFill>
+                      <a:srgbClr val="F7F1E8"/>
+                    </a:solidFill>
+                  </a:tcPr>
+                </a:tc>
+                <a:tc>
+                  <a:txBody>
+                    <a:bodyPr wrap="square"/>
+                    <a:lstStyle/>
+                    <a:p>
+                      <a:r>
+                        <a:rPr sz="1100" b="0">
+                          <a:solidFill>
+                            <a:srgbClr val="231F1A"/>
+                          </a:solidFill>
+                          <a:latin typeface="Calibri"/>
+                        </a:rPr>
+                        <a:t>12 categories, official URL, live vs directory</a:t>
+                      </a:r>
+                    </a:p>
+                  </a:txBody>
+                  <a:tcPr>
+                    <a:solidFill>
+                      <a:srgbClr val="F7F1E8"/>
+                    </a:solidFill>
+                  </a:tcPr>
+                </a:tc>
+                <a:tc>
+                  <a:txBody>
+                    <a:bodyPr wrap="square"/>
+                    <a:lstStyle/>
+                    <a:p>
+                      <a:r>
+                        <a:rPr sz="1100" b="0">
+                          <a:solidFill>
+                            <a:srgbClr val="231F1A"/>
+                          </a:solidFill>
+                          <a:latin typeface="Calibri"/>
+                        </a:rPr>
+                        <a:t>Statewide live power/water/AQI feeds</a:t>
+                      </a:r>
+                    </a:p>
+                  </a:txBody>
+                  <a:tcPr>
+                    <a:solidFill>
+                      <a:srgbClr val="F7F1E8"/>
+                    </a:solidFill>
+                  </a:tcPr>
+                </a:tc>
+              </a:tr>
+              <a:tr h="853440">
+                <a:tc>
+                  <a:txBody>
+                    <a:bodyPr wrap="square"/>
+                    <a:lstStyle/>
+                    <a:p>
+                      <a:r>
+                        <a:rPr sz="1100" b="1">
+                          <a:solidFill>
+                            <a:srgbClr val="231F1A"/>
+                          </a:solidFill>
+                          <a:latin typeface="Calibri"/>
+                        </a:rPr>
+                        <a:t>Phone guide</a:t>
+                      </a:r>
+                    </a:p>
+                  </a:txBody>
+                  <a:tcPr>
+                    <a:solidFill>
+                      <a:srgbClr val="FBF7F0"/>
+                    </a:solidFill>
+                  </a:tcPr>
+                </a:tc>
+                <a:tc>
+                  <a:txBody>
+                    <a:bodyPr wrap="square"/>
+                    <a:lstStyle/>
+                    <a:p>
+                      <a:r>
+                        <a:rPr sz="1100" b="0">
+                          <a:solidFill>
+                            <a:srgbClr val="231F1A"/>
+                          </a:solidFill>
+                          <a:latin typeface="Calibri"/>
+                        </a:rPr>
+                        <a:t>How to check device government-alert settings</a:t>
+                      </a:r>
+                    </a:p>
+                  </a:txBody>
+                  <a:tcPr>
+                    <a:solidFill>
+                      <a:srgbClr val="FBF7F0"/>
+                    </a:solidFill>
+                  </a:tcPr>
+                </a:tc>
+                <a:tc>
+                  <a:txBody>
+                    <a:bodyPr wrap="square"/>
+                    <a:lstStyle/>
+                    <a:p>
+                      <a:r>
+                        <a:rPr sz="1100" b="0">
+                          <a:solidFill>
+                            <a:srgbClr val="231F1A"/>
+                          </a:solidFill>
+                          <a:latin typeface="Calibri"/>
+                        </a:rPr>
+                        <a:t>A button that sends a cell broadcast</a:t>
+                      </a:r>
+                    </a:p>
+                  </a:txBody>
+                  <a:tcPr>
+                    <a:solidFill>
+                      <a:srgbClr val="FBF7F0"/>
+                    </a:solidFill>
+                  </a:tcPr>
+                </a:tc>
+              </a:tr>
+            </a:tbl>
+          </a:graphicData>
+        </a:graphic>
+      </p:graphicFrame>
     </p:spTree>
   </p:cSld>
   <p:clrMapOvr>
@@ -4173,16 +8416,83 @@
         <p:nvPr/>
       </p:nvGrpSpPr>
       <p:grpSpPr/>
-      <p:sp>
-        <p:nvSpPr>
-          <p:cNvPr id="2" name="TextBox 1"/>
+      <p:pic>
+        <p:nvPicPr>
+          <p:cNvPr id="2" name="Picture 1" descr="paper-wash.jpg"/>
+          <p:cNvPicPr>
+            <a:picLocks noChangeAspect="1"/>
+          </p:cNvPicPr>
+          <p:nvPr/>
+        </p:nvPicPr>
+        <p:blipFill>
+          <a:blip r:embed="rId2"/>
+          <a:stretch>
+            <a:fillRect/>
+          </a:stretch>
+        </p:blipFill>
+        <p:spPr>
+          <a:xfrm>
+            <a:off x="0" y="0"/>
+            <a:ext cx="12191695" cy="6858000"/>
+          </a:xfrm>
+          <a:prstGeom prst="rect">
+            <a:avLst/>
+          </a:prstGeom>
+        </p:spPr>
+      </p:pic>
+      <p:sp>
+        <p:nvSpPr>
+          <p:cNvPr id="3" name="Rectangle 2"/>
+          <p:cNvSpPr/>
+          <p:nvPr/>
+        </p:nvSpPr>
+        <p:spPr>
+          <a:xfrm>
+            <a:off x="0" y="0"/>
+            <a:ext cx="128016" cy="6858000"/>
+          </a:xfrm>
+          <a:prstGeom prst="rect">
+            <a:avLst/>
+          </a:prstGeom>
+          <a:solidFill>
+            <a:srgbClr val="C56A1A"/>
+          </a:solidFill>
+          <a:ln>
+            <a:noFill/>
+          </a:ln>
+        </p:spPr>
+        <p:style>
+          <a:lnRef idx="1">
+            <a:schemeClr val="accent1"/>
+          </a:lnRef>
+          <a:fillRef idx="3">
+            <a:schemeClr val="accent1"/>
+          </a:fillRef>
+          <a:effectRef idx="2">
+            <a:schemeClr val="accent1"/>
+          </a:effectRef>
+          <a:fontRef idx="minor">
+            <a:schemeClr val="lt1"/>
+          </a:fontRef>
+        </p:style>
+        <p:txBody>
+          <a:bodyPr rtlCol="0" anchor="ctr"/>
+          <a:lstStyle/>
+          <a:p>
+            <a:pPr algn="ctr"/>
+          </a:p>
+        </p:txBody>
+      </p:sp>
+      <p:sp>
+        <p:nvSpPr>
+          <p:cNvPr id="4" name="TextBox 3"/>
           <p:cNvSpPr txBox="1"/>
           <p:nvPr/>
         </p:nvSpPr>
         <p:spPr>
           <a:xfrm>
-            <a:off x="548640" y="411480"/>
-            <a:ext cx="10972800" cy="365760"/>
+            <a:off x="411480" y="201168"/>
+            <a:ext cx="10972800" cy="256032"/>
           </a:xfrm>
           <a:prstGeom prst="rect">
             <a:avLst/>
@@ -4190,16 +8500,16 @@
           <a:noFill/>
         </p:spPr>
         <p:txBody>
-          <a:bodyPr wrap="none">
+          <a:bodyPr wrap="square">
             <a:spAutoFit/>
           </a:bodyPr>
           <a:lstStyle/>
           <a:p>
             <a:pPr algn="l"/>
             <a:r>
-              <a:rPr sz="1400" b="1">
+              <a:rPr sz="1200" b="1">
                 <a:solidFill>
-                  <a:srgbClr val="A44B13"/>
+                  <a:srgbClr val="C56A1A"/>
                 </a:solidFill>
                 <a:latin typeface="Calibri"/>
               </a:rPr>
@@ -4210,14 +8520,14 @@
       </p:sp>
       <p:sp>
         <p:nvSpPr>
-          <p:cNvPr id="3" name="TextBox 2"/>
+          <p:cNvPr id="5" name="TextBox 4"/>
           <p:cNvSpPr txBox="1"/>
           <p:nvPr/>
         </p:nvSpPr>
         <p:spPr>
           <a:xfrm>
-            <a:off x="548640" y="914400"/>
-            <a:ext cx="10972800" cy="1463040"/>
+            <a:off x="411480" y="438912"/>
+            <a:ext cx="11338560" cy="640080"/>
           </a:xfrm>
           <a:prstGeom prst="rect">
             <a:avLst/>
@@ -4225,34 +8535,34 @@
           <a:noFill/>
         </p:spPr>
         <p:txBody>
-          <a:bodyPr wrap="none">
+          <a:bodyPr wrap="square">
             <a:spAutoFit/>
           </a:bodyPr>
           <a:lstStyle/>
           <a:p>
             <a:pPr algn="l"/>
             <a:r>
-              <a:rPr sz="3600" b="1">
+              <a:rPr sz="2400" b="1">
                 <a:solidFill>
                   <a:srgbClr val="254563"/>
                 </a:solidFill>
                 <a:latin typeface="Calibri"/>
               </a:rPr>
-              <a:t>What this project does not do</a:t>
-            </a:r>
-          </a:p>
-        </p:txBody>
-      </p:sp>
-      <p:sp>
-        <p:nvSpPr>
-          <p:cNvPr id="4" name="TextBox 3"/>
+              <a:t>Public does / does not so the demo cannot overclaim</a:t>
+            </a:r>
+          </a:p>
+        </p:txBody>
+      </p:sp>
+      <p:sp>
+        <p:nvSpPr>
+          <p:cNvPr id="6" name="TextBox 5"/>
           <p:cNvSpPr txBox="1"/>
           <p:nvPr/>
         </p:nvSpPr>
         <p:spPr>
           <a:xfrm>
-            <a:off x="548640" y="2560320"/>
-            <a:ext cx="10972800" cy="3108960"/>
+            <a:off x="411480" y="6510528"/>
+            <a:ext cx="8229600" cy="237744"/>
           </a:xfrm>
           <a:prstGeom prst="rect">
             <a:avLst/>
@@ -4260,72 +8570,407 @@
           <a:noFill/>
         </p:spPr>
         <p:txBody>
-          <a:bodyPr wrap="none">
+          <a:bodyPr wrap="square">
             <a:spAutoFit/>
           </a:bodyPr>
           <a:lstStyle/>
           <a:p>
-            <a:pPr/>
-            <a:r>
-              <a:rPr sz="2000">
+            <a:pPr algn="l"/>
+            <a:r>
+              <a:rPr sz="1100" b="0">
                 <a:solidFill>
-                  <a:srgbClr val="262B31"/>
+                  <a:srgbClr val="5C564C"/>
                 </a:solidFill>
                 <a:latin typeface="Calibri"/>
               </a:rPr>
-              <a:t>No government affiliation, cell broadcast or 112 dispatch.</a:t>
-            </a:r>
-          </a:p>
-          <a:p>
-            <a:pPr/>
-            <a:r>
-              <a:rPr sz="2000">
+              <a:t>Maharashtra Civic Alerts  ·  Codex Build House Pune</a:t>
+            </a:r>
+          </a:p>
+        </p:txBody>
+      </p:sp>
+      <p:sp>
+        <p:nvSpPr>
+          <p:cNvPr id="7" name="TextBox 6"/>
+          <p:cNvSpPr txBox="1"/>
+          <p:nvPr/>
+        </p:nvSpPr>
+        <p:spPr>
+          <a:xfrm>
+            <a:off x="10332720" y="6510528"/>
+            <a:ext cx="1371600" cy="237744"/>
+          </a:xfrm>
+          <a:prstGeom prst="rect">
+            <a:avLst/>
+          </a:prstGeom>
+          <a:noFill/>
+        </p:spPr>
+        <p:txBody>
+          <a:bodyPr wrap="square">
+            <a:spAutoFit/>
+          </a:bodyPr>
+          <a:lstStyle/>
+          <a:p>
+            <a:pPr algn="r"/>
+            <a:r>
+              <a:rPr sz="1100" b="1">
                 <a:solidFill>
-                  <a:srgbClr val="262B31"/>
+                  <a:srgbClr val="5C564C"/>
                 </a:solidFill>
                 <a:latin typeface="Calibri"/>
               </a:rPr>
-              <a:t>No complete village or ward map.</a:t>
-            </a:r>
-          </a:p>
-          <a:p>
-            <a:pPr/>
-            <a:r>
-              <a:rPr sz="2000">
-                <a:solidFill>
-                  <a:srgbClr val="262B31"/>
-                </a:solidFill>
-                <a:latin typeface="Calibri"/>
-              </a:rPr>
-              <a:t>No background Web Push after the tab closes.</a:t>
-            </a:r>
-          </a:p>
-          <a:p>
-            <a:pPr/>
-            <a:r>
-              <a:rPr sz="2000">
-                <a:solidFill>
-                  <a:srgbClr val="262B31"/>
-                </a:solidFill>
-                <a:latin typeface="Calibri"/>
-              </a:rPr>
-              <a:t>No generative rewrite of emergency instructions.</a:t>
-            </a:r>
-          </a:p>
-          <a:p>
-            <a:pPr/>
-            <a:r>
-              <a:rPr sz="2000">
-                <a:solidFill>
-                  <a:srgbClr val="262B31"/>
-                </a:solidFill>
-                <a:latin typeface="Calibri"/>
-              </a:rPr>
-              <a:t>The repository predates the event. Event work: honesty, realtime ingest, place search, labelled demo.</a:t>
-            </a:r>
-          </a:p>
-        </p:txBody>
-      </p:sp>
+              <a:t>8 / 9</a:t>
+            </a:r>
+          </a:p>
+        </p:txBody>
+      </p:sp>
+      <p:graphicFrame>
+        <p:nvGraphicFramePr>
+          <p:cNvPr id="8" name="Table 7"/>
+          <p:cNvGraphicFramePr>
+            <a:graphicFrameLocks noGrp="1"/>
+          </p:cNvGraphicFramePr>
+          <p:nvPr/>
+        </p:nvGraphicFramePr>
+        <p:xfrm>
+          <a:off x="411480" y="1143000"/>
+          <a:ext cx="11384280" cy="5120640"/>
+        </p:xfrm>
+        <a:graphic>
+          <a:graphicData uri="http://schemas.openxmlformats.org/drawingml/2006/table">
+            <a:tbl>
+              <a:tblPr firstRow="1" bandRow="1">
+                <a:tableStyleId>{5C22544A-7EE6-4342-B048-85BDC9FD1C3A}</a:tableStyleId>
+              </a:tblPr>
+              <a:tblGrid>
+                <a:gridCol w="5692140"/>
+                <a:gridCol w="5692140"/>
+              </a:tblGrid>
+              <a:tr h="731520">
+                <a:tc>
+                  <a:txBody>
+                    <a:bodyPr wrap="square"/>
+                    <a:lstStyle/>
+                    <a:p>
+                      <a:r>
+                        <a:rPr sz="1000" b="1">
+                          <a:solidFill>
+                            <a:srgbClr val="254563"/>
+                          </a:solidFill>
+                          <a:latin typeface="Calibri"/>
+                        </a:rPr>
+                        <a:t>Does</a:t>
+                      </a:r>
+                    </a:p>
+                  </a:txBody>
+                  <a:tcPr>
+                    <a:solidFill>
+                      <a:srgbClr val="EFE6D8"/>
+                    </a:solidFill>
+                  </a:tcPr>
+                </a:tc>
+                <a:tc>
+                  <a:txBody>
+                    <a:bodyPr wrap="square"/>
+                    <a:lstStyle/>
+                    <a:p>
+                      <a:r>
+                        <a:rPr sz="1000" b="1">
+                          <a:solidFill>
+                            <a:srgbClr val="254563"/>
+                          </a:solidFill>
+                          <a:latin typeface="Calibri"/>
+                        </a:rPr>
+                        <a:t>Does not</a:t>
+                      </a:r>
+                    </a:p>
+                  </a:txBody>
+                  <a:tcPr>
+                    <a:solidFill>
+                      <a:srgbClr val="EFE6D8"/>
+                    </a:solidFill>
+                  </a:tcPr>
+                </a:tc>
+              </a:tr>
+              <a:tr h="731520">
+                <a:tc>
+                  <a:txBody>
+                    <a:bodyPr wrap="square"/>
+                    <a:lstStyle/>
+                    <a:p>
+                      <a:r>
+                        <a:rPr sz="1100" b="1">
+                          <a:solidFill>
+                            <a:srgbClr val="231F1A"/>
+                          </a:solidFill>
+                          <a:latin typeface="Calibri"/>
+                        </a:rPr>
+                        <a:t>Relay official public feeds with attribution</a:t>
+                      </a:r>
+                    </a:p>
+                  </a:txBody>
+                  <a:tcPr>
+                    <a:solidFill>
+                      <a:srgbClr val="FBF7F0"/>
+                    </a:solidFill>
+                  </a:tcPr>
+                </a:tc>
+                <a:tc>
+                  <a:txBody>
+                    <a:bodyPr wrap="square"/>
+                    <a:lstStyle/>
+                    <a:p>
+                      <a:r>
+                        <a:rPr sz="1100" b="0">
+                          <a:solidFill>
+                            <a:srgbClr val="231F1A"/>
+                          </a:solidFill>
+                          <a:latin typeface="Calibri"/>
+                        </a:rPr>
+                        <a:t>Speak as government or dispatch 112</a:t>
+                      </a:r>
+                    </a:p>
+                  </a:txBody>
+                  <a:tcPr>
+                    <a:solidFill>
+                      <a:srgbClr val="FBF7F0"/>
+                    </a:solidFill>
+                  </a:tcPr>
+                </a:tc>
+              </a:tr>
+              <a:tr h="731520">
+                <a:tc>
+                  <a:txBody>
+                    <a:bodyPr wrap="square"/>
+                    <a:lstStyle/>
+                    <a:p>
+                      <a:r>
+                        <a:rPr sz="1100" b="1">
+                          <a:solidFill>
+                            <a:srgbClr val="231F1A"/>
+                          </a:solidFill>
+                          <a:latin typeface="Calibri"/>
+                        </a:rPr>
+                        <a:t>Keep cancel/expiry so old warnings die</a:t>
+                      </a:r>
+                    </a:p>
+                  </a:txBody>
+                  <a:tcPr>
+                    <a:solidFill>
+                      <a:srgbClr val="F7F1E8"/>
+                    </a:solidFill>
+                  </a:tcPr>
+                </a:tc>
+                <a:tc>
+                  <a:txBody>
+                    <a:bodyPr wrap="square"/>
+                    <a:lstStyle/>
+                    <a:p>
+                      <a:r>
+                        <a:rPr sz="1100" b="0">
+                          <a:solidFill>
+                            <a:srgbClr val="231F1A"/>
+                          </a:solidFill>
+                          <a:latin typeface="Calibri"/>
+                        </a:rPr>
+                        <a:t>Send carrier cell broadcast / WEA</a:t>
+                      </a:r>
+                    </a:p>
+                  </a:txBody>
+                  <a:tcPr>
+                    <a:solidFill>
+                      <a:srgbClr val="F7F1E8"/>
+                    </a:solidFill>
+                  </a:tcPr>
+                </a:tc>
+              </a:tr>
+              <a:tr h="731520">
+                <a:tc>
+                  <a:txBody>
+                    <a:bodyPr wrap="square"/>
+                    <a:lstStyle/>
+                    <a:p>
+                      <a:r>
+                        <a:rPr sz="1100" b="1">
+                          <a:solidFill>
+                            <a:srgbClr val="231F1A"/>
+                          </a:solidFill>
+                          <a:latin typeface="Calibri"/>
+                        </a:rPr>
+                        <a:t>Map places to 36 Maharashtra districts</a:t>
+                      </a:r>
+                    </a:p>
+                  </a:txBody>
+                  <a:tcPr>
+                    <a:solidFill>
+                      <a:srgbClr val="FBF7F0"/>
+                    </a:solidFill>
+                  </a:tcPr>
+                </a:tc>
+                <a:tc>
+                  <a:txBody>
+                    <a:bodyPr wrap="square"/>
+                    <a:lstStyle/>
+                    <a:p>
+                      <a:r>
+                        <a:rPr sz="1100" b="0">
+                          <a:solidFill>
+                            <a:srgbClr val="231F1A"/>
+                          </a:solidFill>
+                          <a:latin typeface="Calibri"/>
+                        </a:rPr>
+                        <a:t>Claim complete village or ward coverage</a:t>
+                      </a:r>
+                    </a:p>
+                  </a:txBody>
+                  <a:tcPr>
+                    <a:solidFill>
+                      <a:srgbClr val="FBF7F0"/>
+                    </a:solidFill>
+                  </a:tcPr>
+                </a:tc>
+              </a:tr>
+              <a:tr h="731520">
+                <a:tc>
+                  <a:txBody>
+                    <a:bodyPr wrap="square"/>
+                    <a:lstStyle/>
+                    <a:p>
+                      <a:r>
+                        <a:rPr sz="1100" b="1">
+                          <a:solidFill>
+                            <a:srgbClr val="231F1A"/>
+                          </a:solidFill>
+                          <a:latin typeface="Calibri"/>
+                        </a:rPr>
+                        <a:t>Label CWC/CPCB as disconnected</a:t>
+                      </a:r>
+                    </a:p>
+                  </a:txBody>
+                  <a:tcPr>
+                    <a:solidFill>
+                      <a:srgbClr val="F7F1E8"/>
+                    </a:solidFill>
+                  </a:tcPr>
+                </a:tc>
+                <a:tc>
+                  <a:txBody>
+                    <a:bodyPr wrap="square"/>
+                    <a:lstStyle/>
+                    <a:p>
+                      <a:r>
+                        <a:rPr sz="1100" b="0">
+                          <a:solidFill>
+                            <a:srgbClr val="231F1A"/>
+                          </a:solidFill>
+                          <a:latin typeface="Calibri"/>
+                        </a:rPr>
+                        <a:t>Invent flood or AQI alerts</a:t>
+                      </a:r>
+                    </a:p>
+                  </a:txBody>
+                  <a:tcPr>
+                    <a:solidFill>
+                      <a:srgbClr val="F7F1E8"/>
+                    </a:solidFill>
+                  </a:tcPr>
+                </a:tc>
+              </a:tr>
+              <a:tr h="731520">
+                <a:tc>
+                  <a:txBody>
+                    <a:bodyPr wrap="square"/>
+                    <a:lstStyle/>
+                    <a:p>
+                      <a:r>
+                        <a:rPr sz="1100" b="1">
+                          <a:solidFill>
+                            <a:srgbClr val="231F1A"/>
+                          </a:solidFill>
+                          <a:latin typeface="Calibri"/>
+                        </a:rPr>
+                        <a:t>Offer a labelled local fixture demo</a:t>
+                      </a:r>
+                    </a:p>
+                  </a:txBody>
+                  <a:tcPr>
+                    <a:solidFill>
+                      <a:srgbClr val="FBF7F0"/>
+                    </a:solidFill>
+                  </a:tcPr>
+                </a:tc>
+                <a:tc>
+                  <a:txBody>
+                    <a:bodyPr wrap="square"/>
+                    <a:lstStyle/>
+                    <a:p>
+                      <a:r>
+                        <a:rPr sz="1100" b="0">
+                          <a:solidFill>
+                            <a:srgbClr val="231F1A"/>
+                          </a:solidFill>
+                          <a:latin typeface="Calibri"/>
+                        </a:rPr>
+                        <a:t>Seed production with test alerts</a:t>
+                      </a:r>
+                    </a:p>
+                  </a:txBody>
+                  <a:tcPr>
+                    <a:solidFill>
+                      <a:srgbClr val="FBF7F0"/>
+                    </a:solidFill>
+                  </a:tcPr>
+                </a:tc>
+              </a:tr>
+              <a:tr h="731520">
+                <a:tc>
+                  <a:txBody>
+                    <a:bodyPr wrap="square"/>
+                    <a:lstStyle/>
+                    <a:p>
+                      <a:r>
+                        <a:rPr sz="1100" b="1">
+                          <a:solidFill>
+                            <a:srgbClr val="231F1A"/>
+                          </a:solidFill>
+                          <a:latin typeface="Calibri"/>
+                        </a:rPr>
+                        <a:t>Preserve original EN/MR wording</a:t>
+                      </a:r>
+                    </a:p>
+                  </a:txBody>
+                  <a:tcPr>
+                    <a:solidFill>
+                      <a:srgbClr val="F7F1E8"/>
+                    </a:solidFill>
+                  </a:tcPr>
+                </a:tc>
+                <a:tc>
+                  <a:txBody>
+                    <a:bodyPr wrap="square"/>
+                    <a:lstStyle/>
+                    <a:p>
+                      <a:r>
+                        <a:rPr sz="1100" b="0">
+                          <a:solidFill>
+                            <a:srgbClr val="231F1A"/>
+                          </a:solidFill>
+                          <a:latin typeface="Calibri"/>
+                        </a:rPr>
+                        <a:t>Rewrite emergency instructions with a model</a:t>
+                      </a:r>
+                    </a:p>
+                  </a:txBody>
+                  <a:tcPr>
+                    <a:solidFill>
+                      <a:srgbClr val="F7F1E8"/>
+                    </a:solidFill>
+                  </a:tcPr>
+                </a:tc>
+              </a:tr>
+            </a:tbl>
+          </a:graphicData>
+        </a:graphic>
+      </p:graphicFrame>
     </p:spTree>
   </p:cSld>
   <p:clrMapOvr>
@@ -4344,16 +8989,83 @@
         <p:nvPr/>
       </p:nvGrpSpPr>
       <p:grpSpPr/>
-      <p:sp>
-        <p:nvSpPr>
-          <p:cNvPr id="2" name="TextBox 1"/>
+      <p:pic>
+        <p:nvPicPr>
+          <p:cNvPr id="2" name="Picture 1" descr="title-wash.jpg"/>
+          <p:cNvPicPr>
+            <a:picLocks noChangeAspect="1"/>
+          </p:cNvPicPr>
+          <p:nvPr/>
+        </p:nvPicPr>
+        <p:blipFill>
+          <a:blip r:embed="rId2"/>
+          <a:stretch>
+            <a:fillRect/>
+          </a:stretch>
+        </p:blipFill>
+        <p:spPr>
+          <a:xfrm>
+            <a:off x="0" y="0"/>
+            <a:ext cx="12191695" cy="6858000"/>
+          </a:xfrm>
+          <a:prstGeom prst="rect">
+            <a:avLst/>
+          </a:prstGeom>
+        </p:spPr>
+      </p:pic>
+      <p:sp>
+        <p:nvSpPr>
+          <p:cNvPr id="3" name="Rectangle 2"/>
+          <p:cNvSpPr/>
+          <p:nvPr/>
+        </p:nvSpPr>
+        <p:spPr>
+          <a:xfrm>
+            <a:off x="0" y="0"/>
+            <a:ext cx="128016" cy="6858000"/>
+          </a:xfrm>
+          <a:prstGeom prst="rect">
+            <a:avLst/>
+          </a:prstGeom>
+          <a:solidFill>
+            <a:srgbClr val="C56A1A"/>
+          </a:solidFill>
+          <a:ln>
+            <a:noFill/>
+          </a:ln>
+        </p:spPr>
+        <p:style>
+          <a:lnRef idx="1">
+            <a:schemeClr val="accent1"/>
+          </a:lnRef>
+          <a:fillRef idx="3">
+            <a:schemeClr val="accent1"/>
+          </a:fillRef>
+          <a:effectRef idx="2">
+            <a:schemeClr val="accent1"/>
+          </a:effectRef>
+          <a:fontRef idx="minor">
+            <a:schemeClr val="lt1"/>
+          </a:fontRef>
+        </p:style>
+        <p:txBody>
+          <a:bodyPr rtlCol="0" anchor="ctr"/>
+          <a:lstStyle/>
+          <a:p>
+            <a:pPr algn="ctr"/>
+          </a:p>
+        </p:txBody>
+      </p:sp>
+      <p:sp>
+        <p:nvSpPr>
+          <p:cNvPr id="4" name="TextBox 3"/>
           <p:cNvSpPr txBox="1"/>
           <p:nvPr/>
         </p:nvSpPr>
         <p:spPr>
           <a:xfrm>
-            <a:off x="548640" y="411480"/>
-            <a:ext cx="10972800" cy="365760"/>
+            <a:off x="457200" y="320040"/>
+            <a:ext cx="10972800" cy="256032"/>
           </a:xfrm>
           <a:prstGeom prst="rect">
             <a:avLst/>
@@ -4361,34 +9073,34 @@
           <a:noFill/>
         </p:spPr>
         <p:txBody>
-          <a:bodyPr wrap="none">
+          <a:bodyPr wrap="square">
             <a:spAutoFit/>
           </a:bodyPr>
           <a:lstStyle/>
           <a:p>
             <a:pPr algn="l"/>
             <a:r>
-              <a:rPr sz="1400" b="1">
+              <a:rPr sz="1200" b="1">
                 <a:solidFill>
-                  <a:srgbClr val="A44B13"/>
+                  <a:srgbClr val="C56A1A"/>
                 </a:solidFill>
                 <a:latin typeface="Calibri"/>
               </a:rPr>
-              <a:t>LINKS</a:t>
-            </a:r>
-          </a:p>
-        </p:txBody>
-      </p:sp>
-      <p:sp>
-        <p:nvSpPr>
-          <p:cNvPr id="3" name="TextBox 2"/>
+              <a:t>REVIEW PATH</a:t>
+            </a:r>
+          </a:p>
+        </p:txBody>
+      </p:sp>
+      <p:sp>
+        <p:nvSpPr>
+          <p:cNvPr id="5" name="TextBox 4"/>
           <p:cNvSpPr txBox="1"/>
           <p:nvPr/>
         </p:nvSpPr>
         <p:spPr>
           <a:xfrm>
-            <a:off x="548640" y="914400"/>
-            <a:ext cx="10972800" cy="1463040"/>
+            <a:off x="457200" y="640080"/>
+            <a:ext cx="10972800" cy="548640"/>
           </a:xfrm>
           <a:prstGeom prst="rect">
             <a:avLst/>
@@ -4396,34 +9108,77 @@
           <a:noFill/>
         </p:spPr>
         <p:txBody>
-          <a:bodyPr wrap="none">
+          <a:bodyPr wrap="square">
             <a:spAutoFit/>
           </a:bodyPr>
           <a:lstStyle/>
           <a:p>
             <a:pPr algn="l"/>
             <a:r>
-              <a:rPr sz="3600" b="1">
+              <a:rPr sz="2800" b="1">
                 <a:solidFill>
-                  <a:srgbClr val="254563"/>
+                  <a:srgbClr val="FFF8EE"/>
                 </a:solidFill>
                 <a:latin typeface="Calibri"/>
               </a:rPr>
-              <a:t>Review these surfaces</a:t>
-            </a:r>
-          </a:p>
-        </p:txBody>
-      </p:sp>
-      <p:sp>
-        <p:nvSpPr>
-          <p:cNvPr id="4" name="TextBox 3"/>
+              <a:t>Open these in the review</a:t>
+            </a:r>
+          </a:p>
+        </p:txBody>
+      </p:sp>
+      <p:sp>
+        <p:nvSpPr>
+          <p:cNvPr id="6" name="Rounded Rectangle 5"/>
+          <p:cNvSpPr/>
+          <p:nvPr/>
+        </p:nvSpPr>
+        <p:spPr>
+          <a:xfrm>
+            <a:off x="457200" y="1463040"/>
+            <a:ext cx="5532120" cy="1371600"/>
+          </a:xfrm>
+          <a:prstGeom prst="roundRect">
+            <a:avLst/>
+          </a:prstGeom>
+          <a:solidFill>
+            <a:srgbClr val="1C3A37"/>
+          </a:solidFill>
+          <a:ln>
+            <a:noFill/>
+          </a:ln>
+        </p:spPr>
+        <p:style>
+          <a:lnRef idx="1">
+            <a:schemeClr val="accent1"/>
+          </a:lnRef>
+          <a:fillRef idx="3">
+            <a:schemeClr val="accent1"/>
+          </a:fillRef>
+          <a:effectRef idx="2">
+            <a:schemeClr val="accent1"/>
+          </a:effectRef>
+          <a:fontRef idx="minor">
+            <a:schemeClr val="lt1"/>
+          </a:fontRef>
+        </p:style>
+        <p:txBody>
+          <a:bodyPr rtlCol="0" anchor="ctr"/>
+          <a:lstStyle/>
+          <a:p>
+            <a:pPr algn="ctr"/>
+          </a:p>
+        </p:txBody>
+      </p:sp>
+      <p:sp>
+        <p:nvSpPr>
+          <p:cNvPr id="7" name="TextBox 6"/>
           <p:cNvSpPr txBox="1"/>
           <p:nvPr/>
         </p:nvSpPr>
         <p:spPr>
           <a:xfrm>
-            <a:off x="548640" y="2560320"/>
-            <a:ext cx="10972800" cy="3108960"/>
+            <a:off x="685800" y="1691640"/>
+            <a:ext cx="5074920" cy="365760"/>
           </a:xfrm>
           <a:prstGeom prst="rect">
             <a:avLst/>
@@ -4431,68 +9186,500 @@
           <a:noFill/>
         </p:spPr>
         <p:txBody>
-          <a:bodyPr wrap="none">
+          <a:bodyPr wrap="square">
             <a:spAutoFit/>
           </a:bodyPr>
           <a:lstStyle/>
           <a:p>
-            <a:pPr/>
-            <a:r>
-              <a:rPr sz="2000">
+            <a:pPr algn="l"/>
+            <a:r>
+              <a:rPr sz="1800" b="1">
                 <a:solidFill>
-                  <a:srgbClr val="262B31"/>
+                  <a:srgbClr val="FFF8EE"/>
                 </a:solidFill>
                 <a:latin typeface="Calibri"/>
               </a:rPr>
-              <a:t>Live demo: https://maharashtra-sachet.mangeshraut712.workers.dev</a:t>
-            </a:r>
-          </a:p>
-          <a:p>
-            <a:pPr/>
-            <a:r>
-              <a:rPr sz="2000">
+              <a:t>Live demo</a:t>
+            </a:r>
+          </a:p>
+        </p:txBody>
+      </p:sp>
+      <p:sp>
+        <p:nvSpPr>
+          <p:cNvPr id="8" name="TextBox 7"/>
+          <p:cNvSpPr txBox="1"/>
+          <p:nvPr/>
+        </p:nvSpPr>
+        <p:spPr>
+          <a:xfrm>
+            <a:off x="685800" y="2148840"/>
+            <a:ext cx="5074920" cy="457200"/>
+          </a:xfrm>
+          <a:prstGeom prst="rect">
+            <a:avLst/>
+          </a:prstGeom>
+          <a:noFill/>
+        </p:spPr>
+        <p:txBody>
+          <a:bodyPr wrap="square">
+            <a:spAutoFit/>
+          </a:bodyPr>
+          <a:lstStyle/>
+          <a:p>
+            <a:pPr algn="l"/>
+            <a:r>
+              <a:rPr sz="1300" b="0">
                 <a:solidFill>
-                  <a:srgbClr val="262B31"/>
+                  <a:srgbClr val="F4EFE6"/>
                 </a:solidFill>
                 <a:latin typeface="Calibri"/>
               </a:rPr>
-              <a:t>Pitch: https://maharashtra-sachet.mangeshraut712.workers.dev/pitch.html</a:t>
-            </a:r>
-          </a:p>
-          <a:p>
-            <a:pPr/>
-            <a:r>
-              <a:rPr sz="2000">
+              <a:t>https://maharashtra-sachet.mangeshraut712.workers.dev</a:t>
+            </a:r>
+          </a:p>
+        </p:txBody>
+      </p:sp>
+      <p:sp>
+        <p:nvSpPr>
+          <p:cNvPr id="9" name="Rounded Rectangle 8"/>
+          <p:cNvSpPr/>
+          <p:nvPr/>
+        </p:nvSpPr>
+        <p:spPr>
+          <a:xfrm>
+            <a:off x="6217920" y="1463040"/>
+            <a:ext cx="5532120" cy="1371600"/>
+          </a:xfrm>
+          <a:prstGeom prst="roundRect">
+            <a:avLst/>
+          </a:prstGeom>
+          <a:solidFill>
+            <a:srgbClr val="1C3A37"/>
+          </a:solidFill>
+          <a:ln>
+            <a:noFill/>
+          </a:ln>
+        </p:spPr>
+        <p:style>
+          <a:lnRef idx="1">
+            <a:schemeClr val="accent1"/>
+          </a:lnRef>
+          <a:fillRef idx="3">
+            <a:schemeClr val="accent1"/>
+          </a:fillRef>
+          <a:effectRef idx="2">
+            <a:schemeClr val="accent1"/>
+          </a:effectRef>
+          <a:fontRef idx="minor">
+            <a:schemeClr val="lt1"/>
+          </a:fontRef>
+        </p:style>
+        <p:txBody>
+          <a:bodyPr rtlCol="0" anchor="ctr"/>
+          <a:lstStyle/>
+          <a:p>
+            <a:pPr algn="ctr"/>
+          </a:p>
+        </p:txBody>
+      </p:sp>
+      <p:sp>
+        <p:nvSpPr>
+          <p:cNvPr id="10" name="TextBox 9"/>
+          <p:cNvSpPr txBox="1"/>
+          <p:nvPr/>
+        </p:nvSpPr>
+        <p:spPr>
+          <a:xfrm>
+            <a:off x="6446520" y="1691640"/>
+            <a:ext cx="5074920" cy="365760"/>
+          </a:xfrm>
+          <a:prstGeom prst="rect">
+            <a:avLst/>
+          </a:prstGeom>
+          <a:noFill/>
+        </p:spPr>
+        <p:txBody>
+          <a:bodyPr wrap="square">
+            <a:spAutoFit/>
+          </a:bodyPr>
+          <a:lstStyle/>
+          <a:p>
+            <a:pPr algn="l"/>
+            <a:r>
+              <a:rPr sz="1800" b="1">
                 <a:solidFill>
-                  <a:srgbClr val="262B31"/>
+                  <a:srgbClr val="FFF8EE"/>
                 </a:solidFill>
                 <a:latin typeface="Calibri"/>
               </a:rPr>
-              <a:t>GitHub: https://github.com/mangeshraut712/maharashtra-sachet</a:t>
-            </a:r>
-          </a:p>
-          <a:p>
-            <a:pPr/>
-            <a:r>
-              <a:rPr sz="2000">
+              <a:t>GitHub</a:t>
+            </a:r>
+          </a:p>
+        </p:txBody>
+      </p:sp>
+      <p:sp>
+        <p:nvSpPr>
+          <p:cNvPr id="11" name="TextBox 10"/>
+          <p:cNvSpPr txBox="1"/>
+          <p:nvPr/>
+        </p:nvSpPr>
+        <p:spPr>
+          <a:xfrm>
+            <a:off x="6446520" y="2148840"/>
+            <a:ext cx="5074920" cy="457200"/>
+          </a:xfrm>
+          <a:prstGeom prst="rect">
+            <a:avLst/>
+          </a:prstGeom>
+          <a:noFill/>
+        </p:spPr>
+        <p:txBody>
+          <a:bodyPr wrap="square">
+            <a:spAutoFit/>
+          </a:bodyPr>
+          <a:lstStyle/>
+          <a:p>
+            <a:pPr algn="l"/>
+            <a:r>
+              <a:rPr sz="1300" b="0">
                 <a:solidFill>
-                  <a:srgbClr val="262B31"/>
+                  <a:srgbClr val="F4EFE6"/>
                 </a:solidFill>
                 <a:latin typeface="Calibri"/>
               </a:rPr>
-              <a:t>Local labelled demo: npm run demo  →  http://127.0.0.1:8799</a:t>
-            </a:r>
-          </a:p>
-          <a:p>
-            <a:pPr/>
-            <a:r>
-              <a:rPr sz="2000">
+              <a:t>https://github.com/mangeshraut712/maharashtra-sachet</a:t>
+            </a:r>
+          </a:p>
+        </p:txBody>
+      </p:sp>
+      <p:sp>
+        <p:nvSpPr>
+          <p:cNvPr id="12" name="Rounded Rectangle 11"/>
+          <p:cNvSpPr/>
+          <p:nvPr/>
+        </p:nvSpPr>
+        <p:spPr>
+          <a:xfrm>
+            <a:off x="457200" y="3017520"/>
+            <a:ext cx="5532120" cy="1371600"/>
+          </a:xfrm>
+          <a:prstGeom prst="roundRect">
+            <a:avLst/>
+          </a:prstGeom>
+          <a:solidFill>
+            <a:srgbClr val="1C3A37"/>
+          </a:solidFill>
+          <a:ln>
+            <a:noFill/>
+          </a:ln>
+        </p:spPr>
+        <p:style>
+          <a:lnRef idx="1">
+            <a:schemeClr val="accent1"/>
+          </a:lnRef>
+          <a:fillRef idx="3">
+            <a:schemeClr val="accent1"/>
+          </a:fillRef>
+          <a:effectRef idx="2">
+            <a:schemeClr val="accent1"/>
+          </a:effectRef>
+          <a:fontRef idx="minor">
+            <a:schemeClr val="lt1"/>
+          </a:fontRef>
+        </p:style>
+        <p:txBody>
+          <a:bodyPr rtlCol="0" anchor="ctr"/>
+          <a:lstStyle/>
+          <a:p>
+            <a:pPr algn="ctr"/>
+          </a:p>
+        </p:txBody>
+      </p:sp>
+      <p:sp>
+        <p:nvSpPr>
+          <p:cNvPr id="13" name="TextBox 12"/>
+          <p:cNvSpPr txBox="1"/>
+          <p:nvPr/>
+        </p:nvSpPr>
+        <p:spPr>
+          <a:xfrm>
+            <a:off x="685800" y="3246120"/>
+            <a:ext cx="5074920" cy="365760"/>
+          </a:xfrm>
+          <a:prstGeom prst="rect">
+            <a:avLst/>
+          </a:prstGeom>
+          <a:noFill/>
+        </p:spPr>
+        <p:txBody>
+          <a:bodyPr wrap="square">
+            <a:spAutoFit/>
+          </a:bodyPr>
+          <a:lstStyle/>
+          <a:p>
+            <a:pPr algn="l"/>
+            <a:r>
+              <a:rPr sz="1800" b="1">
                 <a:solidFill>
-                  <a:srgbClr val="262B31"/>
+                  <a:srgbClr val="FFF8EE"/>
                 </a:solidFill>
                 <a:latin typeface="Calibri"/>
               </a:rPr>
-              <a:t>Phone: +91 7276819090  ·  Email: mbr63drexel@gmail.com</a:t>
+              <a:t>HTML briefing</a:t>
+            </a:r>
+          </a:p>
+        </p:txBody>
+      </p:sp>
+      <p:sp>
+        <p:nvSpPr>
+          <p:cNvPr id="14" name="TextBox 13"/>
+          <p:cNvSpPr txBox="1"/>
+          <p:nvPr/>
+        </p:nvSpPr>
+        <p:spPr>
+          <a:xfrm>
+            <a:off x="685800" y="3703320"/>
+            <a:ext cx="5074920" cy="457200"/>
+          </a:xfrm>
+          <a:prstGeom prst="rect">
+            <a:avLst/>
+          </a:prstGeom>
+          <a:noFill/>
+        </p:spPr>
+        <p:txBody>
+          <a:bodyPr wrap="square">
+            <a:spAutoFit/>
+          </a:bodyPr>
+          <a:lstStyle/>
+          <a:p>
+            <a:pPr algn="l"/>
+            <a:r>
+              <a:rPr sz="1300" b="0">
+                <a:solidFill>
+                  <a:srgbClr val="F4EFE6"/>
+                </a:solidFill>
+                <a:latin typeface="Calibri"/>
+              </a:rPr>
+              <a:t>https://maharashtra-sachet.mangeshraut712.workers.dev/pitch.html</a:t>
+            </a:r>
+          </a:p>
+        </p:txBody>
+      </p:sp>
+      <p:sp>
+        <p:nvSpPr>
+          <p:cNvPr id="15" name="Rounded Rectangle 14"/>
+          <p:cNvSpPr/>
+          <p:nvPr/>
+        </p:nvSpPr>
+        <p:spPr>
+          <a:xfrm>
+            <a:off x="6217920" y="3017520"/>
+            <a:ext cx="5532120" cy="1371600"/>
+          </a:xfrm>
+          <a:prstGeom prst="roundRect">
+            <a:avLst/>
+          </a:prstGeom>
+          <a:solidFill>
+            <a:srgbClr val="1C3A37"/>
+          </a:solidFill>
+          <a:ln>
+            <a:noFill/>
+          </a:ln>
+        </p:spPr>
+        <p:style>
+          <a:lnRef idx="1">
+            <a:schemeClr val="accent1"/>
+          </a:lnRef>
+          <a:fillRef idx="3">
+            <a:schemeClr val="accent1"/>
+          </a:fillRef>
+          <a:effectRef idx="2">
+            <a:schemeClr val="accent1"/>
+          </a:effectRef>
+          <a:fontRef idx="minor">
+            <a:schemeClr val="lt1"/>
+          </a:fontRef>
+        </p:style>
+        <p:txBody>
+          <a:bodyPr rtlCol="0" anchor="ctr"/>
+          <a:lstStyle/>
+          <a:p>
+            <a:pPr algn="ctr"/>
+          </a:p>
+        </p:txBody>
+      </p:sp>
+      <p:sp>
+        <p:nvSpPr>
+          <p:cNvPr id="16" name="TextBox 15"/>
+          <p:cNvSpPr txBox="1"/>
+          <p:nvPr/>
+        </p:nvSpPr>
+        <p:spPr>
+          <a:xfrm>
+            <a:off x="6446520" y="3246120"/>
+            <a:ext cx="5074920" cy="365760"/>
+          </a:xfrm>
+          <a:prstGeom prst="rect">
+            <a:avLst/>
+          </a:prstGeom>
+          <a:noFill/>
+        </p:spPr>
+        <p:txBody>
+          <a:bodyPr wrap="square">
+            <a:spAutoFit/>
+          </a:bodyPr>
+          <a:lstStyle/>
+          <a:p>
+            <a:pPr algn="l"/>
+            <a:r>
+              <a:rPr sz="1800" b="1">
+                <a:solidFill>
+                  <a:srgbClr val="FFF8EE"/>
+                </a:solidFill>
+                <a:latin typeface="Calibri"/>
+              </a:rPr>
+              <a:t>Judge sequence</a:t>
+            </a:r>
+          </a:p>
+        </p:txBody>
+      </p:sp>
+      <p:sp>
+        <p:nvSpPr>
+          <p:cNvPr id="17" name="TextBox 16"/>
+          <p:cNvSpPr txBox="1"/>
+          <p:nvPr/>
+        </p:nvSpPr>
+        <p:spPr>
+          <a:xfrm>
+            <a:off x="6446520" y="3703320"/>
+            <a:ext cx="5074920" cy="457200"/>
+          </a:xfrm>
+          <a:prstGeom prst="rect">
+            <a:avLst/>
+          </a:prstGeom>
+          <a:noFill/>
+        </p:spPr>
+        <p:txBody>
+          <a:bodyPr wrap="square">
+            <a:spAutoFit/>
+          </a:bodyPr>
+          <a:lstStyle/>
+          <a:p>
+            <a:pPr algn="l"/>
+            <a:r>
+              <a:rPr sz="1300" b="0">
+                <a:solidFill>
+                  <a:srgbClr val="F4EFE6"/>
+                </a:solidFill>
+                <a:latin typeface="Calibri"/>
+              </a:rPr>
+              <a:t>Banner → status → Navi Mumbai → Marathi → source health</a:t>
+            </a:r>
+          </a:p>
+        </p:txBody>
+      </p:sp>
+      <p:sp>
+        <p:nvSpPr>
+          <p:cNvPr id="18" name="TextBox 17"/>
+          <p:cNvSpPr txBox="1"/>
+          <p:nvPr/>
+        </p:nvSpPr>
+        <p:spPr>
+          <a:xfrm>
+            <a:off x="457200" y="4846320"/>
+            <a:ext cx="11155680" cy="1097280"/>
+          </a:xfrm>
+          <a:prstGeom prst="rect">
+            <a:avLst/>
+          </a:prstGeom>
+          <a:noFill/>
+        </p:spPr>
+        <p:txBody>
+          <a:bodyPr wrap="square">
+            <a:spAutoFit/>
+          </a:bodyPr>
+          <a:lstStyle/>
+          <a:p>
+            <a:pPr algn="l"/>
+            <a:r>
+              <a:rPr sz="1400" b="0">
+                <a:solidFill>
+                  <a:srgbClr val="F4EFE6"/>
+                </a:solidFill>
+                <a:latin typeface="Calibri"/>
+              </a:rPr>
+              <a:t>Local labelled demo only: npm run demo → http://127.0.0.1:8799. Never production.
+Builder: Mangesh Raut  ·  +91 7276819090  ·  mbr63drexel@gmail.com</a:t>
+            </a:r>
+          </a:p>
+        </p:txBody>
+      </p:sp>
+      <p:sp>
+        <p:nvSpPr>
+          <p:cNvPr id="19" name="TextBox 18"/>
+          <p:cNvSpPr txBox="1"/>
+          <p:nvPr/>
+        </p:nvSpPr>
+        <p:spPr>
+          <a:xfrm>
+            <a:off x="411480" y="6510528"/>
+            <a:ext cx="8229600" cy="237744"/>
+          </a:xfrm>
+          <a:prstGeom prst="rect">
+            <a:avLst/>
+          </a:prstGeom>
+          <a:noFill/>
+        </p:spPr>
+        <p:txBody>
+          <a:bodyPr wrap="square">
+            <a:spAutoFit/>
+          </a:bodyPr>
+          <a:lstStyle/>
+          <a:p>
+            <a:pPr algn="l"/>
+            <a:r>
+              <a:rPr sz="1100" b="0">
+                <a:solidFill>
+                  <a:srgbClr val="D5CDC0"/>
+                </a:solidFill>
+                <a:latin typeface="Calibri"/>
+              </a:rPr>
+              <a:t>Maharashtra Civic Alerts  ·  Codex Build House Pune</a:t>
+            </a:r>
+          </a:p>
+        </p:txBody>
+      </p:sp>
+      <p:sp>
+        <p:nvSpPr>
+          <p:cNvPr id="20" name="TextBox 19"/>
+          <p:cNvSpPr txBox="1"/>
+          <p:nvPr/>
+        </p:nvSpPr>
+        <p:spPr>
+          <a:xfrm>
+            <a:off x="10332720" y="6510528"/>
+            <a:ext cx="1371600" cy="237744"/>
+          </a:xfrm>
+          <a:prstGeom prst="rect">
+            <a:avLst/>
+          </a:prstGeom>
+          <a:noFill/>
+        </p:spPr>
+        <p:txBody>
+          <a:bodyPr wrap="square">
+            <a:spAutoFit/>
+          </a:bodyPr>
+          <a:lstStyle/>
+          <a:p>
+            <a:pPr algn="r"/>
+            <a:r>
+              <a:rPr sz="1100" b="1">
+                <a:solidFill>
+                  <a:srgbClr val="D5CDC0"/>
+                </a:solidFill>
+                <a:latin typeface="Calibri"/>
+              </a:rPr>
+              <a:t>9 / 9</a:t>
             </a:r>
           </a:p>
         </p:txBody>
